--- a/docs/AI for Education_University of Malaya_UM-Gunners_PitchDeck.pptx
+++ b/docs/AI for Education_University of Malaya_UM-Gunners_PitchDeck.pptx
@@ -119,6 +119,400 @@
     </a:lvl9pPr>
   </p:defaultTextStyle>
 </p:presentation>
+</file>
+
+<file path=ppt/charts/chart1.xml><?xml version="1.0" encoding="utf-8"?>
+<c:chartSpace xmlns:c="http://schemas.openxmlformats.org/drawingml/2006/chart" xmlns:a="http://schemas.openxmlformats.org/drawingml/2006/main" xmlns:r="http://schemas.openxmlformats.org/officeDocument/2006/relationships">
+  <c:date1904 val="0"/>
+  <c:chart>
+    <c:title>
+      <c:tx>
+        <c:rich>
+          <a:bodyPr/>
+          <a:lstStyle/>
+          <a:p>
+            <a:r>
+              <a:rPr sz="1200"/>
+              <a:t>Grounding rate by language (same question)</a:t>
+            </a:r>
+          </a:p>
+        </c:rich>
+      </c:tx>
+      <c:layout/>
+      <c:overlay val="0"/>
+    </c:title>
+    <c:autoTitleDeleted val="0"/>
+    <c:plotArea>
+      <c:barChart>
+        <c:barDir val="col"/>
+        <c:grouping val="clustered"/>
+        <c:ser>
+          <c:idx val="0"/>
+          <c:order val="0"/>
+          <c:tx>
+            <c:strRef>
+              <c:f>Sheet1!$B$1</c:f>
+              <c:strCache>
+                <c:ptCount val="1"/>
+                <c:pt idx="0">
+                  <c:v>Before fix</c:v>
+                </c:pt>
+              </c:strCache>
+            </c:strRef>
+          </c:tx>
+          <c:spPr>
+            <a:solidFill>
+              <a:srgbClr val="5B3FE0"/>
+            </a:solidFill>
+          </c:spPr>
+          <c:cat>
+            <c:strRef>
+              <c:f>Sheet1!$A$2:$A$6</c:f>
+              <c:strCache>
+                <c:ptCount val="5"/>
+                <c:pt idx="0">
+                  <c:v>English</c:v>
+                </c:pt>
+                <c:pt idx="1">
+                  <c:v>B. Melayu</c:v>
+                </c:pt>
+                <c:pt idx="2">
+                  <c:v>Thai</c:v>
+                </c:pt>
+                <c:pt idx="3">
+                  <c:v>Viet</c:v>
+                </c:pt>
+                <c:pt idx="4">
+                  <c:v>Iban</c:v>
+                </c:pt>
+              </c:strCache>
+            </c:strRef>
+          </c:cat>
+          <c:val>
+            <c:numRef>
+              <c:f>Sheet1!$B$2:$B$6</c:f>
+              <c:numCache>
+                <c:formatCode>General</c:formatCode>
+                <c:ptCount val="5"/>
+                <c:pt idx="0">
+                  <c:v>100</c:v>
+                </c:pt>
+                <c:pt idx="1">
+                  <c:v>75</c:v>
+                </c:pt>
+                <c:pt idx="2">
+                  <c:v>50</c:v>
+                </c:pt>
+                <c:pt idx="3">
+                  <c:v>50</c:v>
+                </c:pt>
+                <c:pt idx="4">
+                  <c:v>88</c:v>
+                </c:pt>
+              </c:numCache>
+            </c:numRef>
+          </c:val>
+        </c:ser>
+        <c:ser>
+          <c:idx val="1"/>
+          <c:order val="1"/>
+          <c:tx>
+            <c:strRef>
+              <c:f>Sheet1!$C$1</c:f>
+              <c:strCache>
+                <c:ptCount val="1"/>
+                <c:pt idx="0">
+                  <c:v>After cross-lingual</c:v>
+                </c:pt>
+              </c:strCache>
+            </c:strRef>
+          </c:tx>
+          <c:spPr>
+            <a:solidFill>
+              <a:srgbClr val="1E8E3E"/>
+            </a:solidFill>
+          </c:spPr>
+          <c:cat>
+            <c:strRef>
+              <c:f>Sheet1!$A$2:$A$6</c:f>
+              <c:strCache>
+                <c:ptCount val="5"/>
+                <c:pt idx="0">
+                  <c:v>English</c:v>
+                </c:pt>
+                <c:pt idx="1">
+                  <c:v>B. Melayu</c:v>
+                </c:pt>
+                <c:pt idx="2">
+                  <c:v>Thai</c:v>
+                </c:pt>
+                <c:pt idx="3">
+                  <c:v>Viet</c:v>
+                </c:pt>
+                <c:pt idx="4">
+                  <c:v>Iban</c:v>
+                </c:pt>
+              </c:strCache>
+            </c:strRef>
+          </c:cat>
+          <c:val>
+            <c:numRef>
+              <c:f>Sheet1!$C$2:$C$6</c:f>
+              <c:numCache>
+                <c:formatCode>General</c:formatCode>
+                <c:ptCount val="5"/>
+                <c:pt idx="0">
+                  <c:v>100</c:v>
+                </c:pt>
+                <c:pt idx="1">
+                  <c:v>75</c:v>
+                </c:pt>
+                <c:pt idx="2">
+                  <c:v>62</c:v>
+                </c:pt>
+                <c:pt idx="3">
+                  <c:v>62</c:v>
+                </c:pt>
+                <c:pt idx="4">
+                  <c:v>100</c:v>
+                </c:pt>
+              </c:numCache>
+            </c:numRef>
+          </c:val>
+        </c:ser>
+        <c:axId val="-2068027336"/>
+        <c:axId val="-2113994440"/>
+      </c:barChart>
+      <c:catAx>
+        <c:axId val="-2068027336"/>
+        <c:scaling>
+          <c:orientation val="minMax"/>
+        </c:scaling>
+        <c:delete val="0"/>
+        <c:axPos val="b"/>
+        <c:majorTickMark val="out"/>
+        <c:minorTickMark val="none"/>
+        <c:tickLblPos val="nextTo"/>
+        <c:txPr>
+          <a:bodyPr/>
+          <a:lstStyle/>
+          <a:p>
+            <a:pPr>
+              <a:defRPr sz="1000"/>
+            </a:pPr>
+          </a:p>
+        </c:txPr>
+        <c:crossAx val="-2113994440"/>
+        <c:crosses val="autoZero"/>
+        <c:auto val="1"/>
+        <c:lblAlgn val="ctr"/>
+        <c:lblOffset val="100"/>
+        <c:noMultiLvlLbl val="0"/>
+      </c:catAx>
+      <c:valAx>
+        <c:axId val="-2113994440"/>
+        <c:scaling/>
+        <c:delete val="0"/>
+        <c:axPos val="l"/>
+        <c:majorTickMark val="out"/>
+        <c:minorTickMark val="none"/>
+        <c:tickLblPos val="nextTo"/>
+        <c:txPr>
+          <a:bodyPr/>
+          <a:lstStyle/>
+          <a:p>
+            <a:pPr>
+              <a:defRPr sz="900"/>
+            </a:pPr>
+          </a:p>
+        </c:txPr>
+        <c:crossAx val="-2068027336"/>
+        <c:crosses val="autoZero"/>
+      </c:valAx>
+    </c:plotArea>
+    <c:legend>
+      <c:legendPos val="b"/>
+      <c:overlay val="0"/>
+      <c:txPr>
+        <a:bodyPr/>
+        <a:lstStyle/>
+        <a:p>
+          <a:pPr>
+            <a:defRPr sz="1100"/>
+          </a:pPr>
+        </a:p>
+      </c:txPr>
+    </c:legend>
+    <c:dispBlanksAs val="gap"/>
+  </c:chart>
+  <c:txPr>
+    <a:bodyPr/>
+    <a:lstStyle/>
+    <a:p>
+      <a:pPr>
+        <a:defRPr sz="1800"/>
+      </a:pPr>
+      <a:endParaRPr lang="en-US"/>
+    </a:p>
+  </c:txPr>
+  <c:externalData r:id="rId1">
+    <c:autoUpdate val="0"/>
+  </c:externalData>
+</c:chartSpace>
+</file>
+
+<file path=ppt/charts/chart2.xml><?xml version="1.0" encoding="utf-8"?>
+<c:chartSpace xmlns:c="http://schemas.openxmlformats.org/drawingml/2006/chart" xmlns:a="http://schemas.openxmlformats.org/drawingml/2006/main" xmlns:r="http://schemas.openxmlformats.org/officeDocument/2006/relationships">
+  <c:date1904 val="0"/>
+  <c:chart>
+    <c:title>
+      <c:tx>
+        <c:rich>
+          <a:bodyPr/>
+          <a:lstStyle/>
+          <a:p>
+            <a:r>
+              <a:rPr sz="1200"/>
+              <a:t>RAG quality (%)</a:t>
+            </a:r>
+          </a:p>
+        </c:rich>
+      </c:tx>
+      <c:layout/>
+      <c:overlay val="0"/>
+    </c:title>
+    <c:autoTitleDeleted val="0"/>
+    <c:plotArea>
+      <c:barChart>
+        <c:barDir val="col"/>
+        <c:grouping val="clustered"/>
+        <c:ser>
+          <c:idx val="0"/>
+          <c:order val="0"/>
+          <c:tx>
+            <c:strRef>
+              <c:f>Sheet1!$B$1</c:f>
+              <c:strCache>
+                <c:ptCount val="1"/>
+                <c:pt idx="0">
+                  <c:v>score %</c:v>
+                </c:pt>
+              </c:strCache>
+            </c:strRef>
+          </c:tx>
+          <c:spPr>
+            <a:solidFill>
+              <a:srgbClr val="5B3FE0"/>
+            </a:solidFill>
+          </c:spPr>
+          <c:cat>
+            <c:strRef>
+              <c:f>Sheet1!$A$2:$A$5</c:f>
+              <c:strCache>
+                <c:ptCount val="4"/>
+                <c:pt idx="0">
+                  <c:v>Recall</c:v>
+                </c:pt>
+                <c:pt idx="1">
+                  <c:v>Precision</c:v>
+                </c:pt>
+                <c:pt idx="2">
+                  <c:v>Concept cov.</c:v>
+                </c:pt>
+                <c:pt idx="3">
+                  <c:v>Non-resp.</c:v>
+                </c:pt>
+              </c:strCache>
+            </c:strRef>
+          </c:cat>
+          <c:val>
+            <c:numRef>
+              <c:f>Sheet1!$B$2:$B$5</c:f>
+              <c:numCache>
+                <c:formatCode>General</c:formatCode>
+                <c:ptCount val="4"/>
+                <c:pt idx="0">
+                  <c:v>100</c:v>
+                </c:pt>
+                <c:pt idx="1">
+                  <c:v>79</c:v>
+                </c:pt>
+                <c:pt idx="2">
+                  <c:v>97</c:v>
+                </c:pt>
+                <c:pt idx="3">
+                  <c:v>0</c:v>
+                </c:pt>
+              </c:numCache>
+            </c:numRef>
+          </c:val>
+        </c:ser>
+        <c:axId val="-2068027336"/>
+        <c:axId val="-2113994440"/>
+      </c:barChart>
+      <c:catAx>
+        <c:axId val="-2068027336"/>
+        <c:scaling>
+          <c:orientation val="minMax"/>
+        </c:scaling>
+        <c:delete val="0"/>
+        <c:axPos val="b"/>
+        <c:majorTickMark val="out"/>
+        <c:minorTickMark val="none"/>
+        <c:tickLblPos val="nextTo"/>
+        <c:txPr>
+          <a:bodyPr/>
+          <a:lstStyle/>
+          <a:p>
+            <a:pPr>
+              <a:defRPr sz="1000"/>
+            </a:pPr>
+          </a:p>
+        </c:txPr>
+        <c:crossAx val="-2113994440"/>
+        <c:crosses val="autoZero"/>
+        <c:auto val="1"/>
+        <c:lblAlgn val="ctr"/>
+        <c:lblOffset val="100"/>
+        <c:noMultiLvlLbl val="0"/>
+      </c:catAx>
+      <c:valAx>
+        <c:axId val="-2113994440"/>
+        <c:scaling/>
+        <c:delete val="0"/>
+        <c:axPos val="l"/>
+        <c:majorTickMark val="out"/>
+        <c:minorTickMark val="none"/>
+        <c:tickLblPos val="nextTo"/>
+        <c:txPr>
+          <a:bodyPr/>
+          <a:lstStyle/>
+          <a:p>
+            <a:pPr>
+              <a:defRPr sz="900"/>
+            </a:pPr>
+          </a:p>
+        </c:txPr>
+        <c:crossAx val="-2068027336"/>
+        <c:crosses val="autoZero"/>
+      </c:valAx>
+    </c:plotArea>
+    <c:dispBlanksAs val="gap"/>
+  </c:chart>
+  <c:txPr>
+    <a:bodyPr/>
+    <a:lstStyle/>
+    <a:p>
+      <a:pPr>
+        <a:defRPr sz="1800"/>
+      </a:pPr>
+      <a:endParaRPr lang="en-US"/>
+    </a:p>
+  </c:txPr>
+  <c:externalData r:id="rId1">
+    <c:autoUpdate val="0"/>
+  </c:externalData>
+</c:chartSpace>
 </file>
 
 <file path=ppt/slideLayouts/slideLayout1.xml><?xml version="1.0" encoding="utf-8"?>
@@ -3112,14 +3506,58 @@
       <p:grpSpPr/>
       <p:sp>
         <p:nvSpPr>
-          <p:cNvPr id="2" name="TextBox 1"/>
+          <p:cNvPr id="2" name="Rectangle 1"/>
+          <p:cNvSpPr/>
+          <p:nvPr/>
+        </p:nvSpPr>
+        <p:spPr>
+          <a:xfrm>
+            <a:off x="0" y="5394960"/>
+            <a:ext cx="12191695" cy="1463040"/>
+          </a:xfrm>
+          <a:prstGeom prst="rect">
+            <a:avLst/>
+          </a:prstGeom>
+          <a:solidFill>
+            <a:srgbClr val="3B27A0"/>
+          </a:solidFill>
+          <a:ln>
+            <a:noFill/>
+          </a:ln>
+          <a:effectLst/>
+        </p:spPr>
+        <p:style>
+          <a:lnRef idx="1">
+            <a:schemeClr val="accent1"/>
+          </a:lnRef>
+          <a:fillRef idx="3">
+            <a:schemeClr val="accent1"/>
+          </a:fillRef>
+          <a:effectRef idx="2">
+            <a:schemeClr val="accent1"/>
+          </a:effectRef>
+          <a:fontRef idx="minor">
+            <a:schemeClr val="lt1"/>
+          </a:fontRef>
+        </p:style>
+        <p:txBody>
+          <a:bodyPr rtlCol="0" anchor="ctr"/>
+          <a:lstStyle/>
+          <a:p>
+            <a:pPr algn="ctr"/>
+          </a:p>
+        </p:txBody>
+      </p:sp>
+      <p:sp>
+        <p:nvSpPr>
+          <p:cNvPr id="3" name="TextBox 2"/>
           <p:cNvSpPr txBox="1"/>
           <p:nvPr/>
         </p:nvSpPr>
         <p:spPr>
           <a:xfrm>
-            <a:off x="822960" y="2011680"/>
-            <a:ext cx="10515600" cy="2743200"/>
+            <a:off x="822960" y="1737360"/>
+            <a:ext cx="10515600" cy="3108960"/>
           </a:xfrm>
           <a:prstGeom prst="rect">
             <a:avLst/>
@@ -3127,14 +3565,18 @@
           <a:noFill/>
         </p:spPr>
         <p:txBody>
-          <a:bodyPr wrap="square">
+          <a:bodyPr wrap="square" anchor="t">
             <a:spAutoFit/>
           </a:bodyPr>
           <a:lstStyle/>
           <a:p>
-            <a:pPr algn="l"/>
-            <a:r>
-              <a:rPr sz="7200" b="1" i="0">
+            <a:pPr algn="l">
+              <a:spcAft>
+                <a:spcPts val="200"/>
+              </a:spcAft>
+            </a:pPr>
+            <a:r>
+              <a:rPr sz="8000" b="1" i="0">
                 <a:solidFill>
                   <a:srgbClr val="FFFFFF"/>
                 </a:solidFill>
@@ -3144,51 +3586,74 @@
             </a:r>
           </a:p>
           <a:p>
-            <a:pPr algn="l"/>
-            <a:r>
-              <a:rPr sz="3000" b="0" i="0">
+            <a:pPr algn="l">
+              <a:spcAft>
+                <a:spcPts val="600"/>
+              </a:spcAft>
+            </a:pPr>
+            <a:r>
+              <a:rPr sz="3200" b="0" i="0">
+                <a:solidFill>
+                  <a:srgbClr val="E7E0FF"/>
+                </a:solidFill>
+                <a:latin typeface="Calibri"/>
+              </a:rPr>
+              <a:t>AI Education at the Last Mile</a:t>
+            </a:r>
+          </a:p>
+        </p:txBody>
+      </p:sp>
+      <p:sp>
+        <p:nvSpPr>
+          <p:cNvPr id="4" name="TextBox 3"/>
+          <p:cNvSpPr txBox="1"/>
+          <p:nvPr/>
+        </p:nvSpPr>
+        <p:spPr>
+          <a:xfrm>
+            <a:off x="868680" y="5532120"/>
+            <a:ext cx="10515600" cy="1188720"/>
+          </a:xfrm>
+          <a:prstGeom prst="rect">
+            <a:avLst/>
+          </a:prstGeom>
+          <a:noFill/>
+        </p:spPr>
+        <p:txBody>
+          <a:bodyPr wrap="square" anchor="t">
+            <a:spAutoFit/>
+          </a:bodyPr>
+          <a:lstStyle/>
+          <a:p>
+            <a:pPr algn="l">
+              <a:spcAft>
+                <a:spcPts val="300"/>
+              </a:spcAft>
+            </a:pPr>
+            <a:r>
+              <a:rPr sz="1800" b="1" i="0">
                 <a:solidFill>
                   <a:srgbClr val="FFFFFF"/>
                 </a:solidFill>
                 <a:latin typeface="Calibri"/>
               </a:rPr>
-              <a:t>AI Education at the Last Mile</a:t>
-            </a:r>
-          </a:p>
-          <a:p>
-            <a:pPr algn="l"/>
-            <a:r>
-              <a:rPr sz="1200" b="0" i="0">
-                <a:solidFill>
-                  <a:srgbClr val="FFFFFF"/>
-                </a:solidFill>
-                <a:latin typeface="Calibri"/>
-              </a:rPr>
-              <a:t> </a:t>
-            </a:r>
-          </a:p>
-          <a:p>
-            <a:pPr algn="l"/>
-            <a:r>
-              <a:rPr sz="1800" b="0" i="0">
-                <a:solidFill>
-                  <a:srgbClr val="FFFFFF"/>
-                </a:solidFill>
-                <a:latin typeface="Calibri"/>
-              </a:rPr>
-              <a:t>UM – Gunners  ·  University of Malaya  ·  Malaysia</a:t>
-            </a:r>
-          </a:p>
-          <a:p>
-            <a:pPr algn="l"/>
-            <a:r>
-              <a:rPr sz="1600" b="0" i="0">
-                <a:solidFill>
-                  <a:srgbClr val="E0D8FF"/>
-                </a:solidFill>
-                <a:latin typeface="Calibri"/>
-              </a:rPr>
-              <a:t>Track: AI for Education  ·  ASEAN AI Hackathon 2026</a:t>
+              <a:t>UM – Gunners   ·   University of Malaya   ·   Malaysia</a:t>
+            </a:r>
+          </a:p>
+          <a:p>
+            <a:pPr algn="l">
+              <a:spcAft>
+                <a:spcPts val="600"/>
+              </a:spcAft>
+            </a:pPr>
+            <a:r>
+              <a:rPr sz="1400" b="0" i="0">
+                <a:solidFill>
+                  <a:srgbClr val="D8CEFF"/>
+                </a:solidFill>
+                <a:latin typeface="Calibri"/>
+              </a:rPr>
+              <a:t>Track: AI for Education   ·   ASEAN AI Hackathon 2026</a:t>
             </a:r>
           </a:p>
         </p:txBody>
@@ -3228,7 +3693,7 @@
         <p:spPr>
           <a:xfrm>
             <a:off x="0" y="0"/>
-            <a:ext cx="201168" cy="6858000"/>
+            <a:ext cx="164592" cy="6858000"/>
           </a:xfrm>
           <a:prstGeom prst="rect">
             <a:avLst/>
@@ -3239,6 +3704,7 @@
           <a:ln>
             <a:noFill/>
           </a:ln>
+          <a:effectLst/>
         </p:spPr>
         <p:style>
           <a:lnRef idx="1">
@@ -3270,8 +3736,8 @@
         </p:nvSpPr>
         <p:spPr>
           <a:xfrm>
-            <a:off x="548640" y="411480"/>
-            <a:ext cx="11155680" cy="914400"/>
+            <a:off x="548640" y="365760"/>
+            <a:ext cx="11338560" cy="1005840"/>
           </a:xfrm>
           <a:prstGeom prst="rect">
             <a:avLst/>
@@ -3279,32 +3745,40 @@
           <a:noFill/>
         </p:spPr>
         <p:txBody>
-          <a:bodyPr wrap="square">
+          <a:bodyPr wrap="square" anchor="t">
             <a:spAutoFit/>
           </a:bodyPr>
           <a:lstStyle/>
           <a:p>
-            <a:pPr algn="l"/>
+            <a:pPr algn="l">
+              <a:spcAft>
+                <a:spcPts val="200"/>
+              </a:spcAft>
+            </a:pPr>
+            <a:r>
+              <a:rPr sz="1300" b="1" i="0">
+                <a:solidFill>
+                  <a:srgbClr val="5B3FE0"/>
+                </a:solidFill>
+                <a:latin typeface="Calibri"/>
+              </a:rPr>
+              <a:t>TECHNICAL HURDLES</a:t>
+            </a:r>
+          </a:p>
+          <a:p>
+            <a:pPr algn="l">
+              <a:spcAft>
+                <a:spcPts val="600"/>
+              </a:spcAft>
+            </a:pPr>
             <a:r>
               <a:rPr sz="3000" b="1" i="0">
                 <a:solidFill>
-                  <a:srgbClr val="5B3FE0"/>
-                </a:solidFill>
-                <a:latin typeface="Calibri"/>
-              </a:rPr>
-              <a:t>Technical Hurdles (honest reflection)</a:t>
-            </a:r>
-          </a:p>
-          <a:p>
-            <a:pPr algn="l"/>
-            <a:r>
-              <a:rPr sz="1500" b="0" i="1">
-                <a:solidFill>
-                  <a:srgbClr val="555560"/>
-                </a:solidFill>
-                <a:latin typeface="Calibri"/>
-              </a:rPr>
-              <a:t>Bugs, hallucinations and data gaps we overcame</a:t>
+                  <a:srgbClr val="1E1E28"/>
+                </a:solidFill>
+                <a:latin typeface="Calibri"/>
+              </a:rPr>
+              <a:t>Honest reflection — problem → fix</a:t>
             </a:r>
           </a:p>
         </p:txBody>
@@ -3317,8 +3791,8 @@
         </p:nvSpPr>
         <p:spPr>
           <a:xfrm>
-            <a:off x="640080" y="1554480"/>
-            <a:ext cx="10972800" cy="4846320"/>
+            <a:off x="548640" y="6419088"/>
+            <a:ext cx="11064240" cy="365760"/>
           </a:xfrm>
           <a:prstGeom prst="rect">
             <a:avLst/>
@@ -3326,88 +3800,1074 @@
           <a:noFill/>
         </p:spPr>
         <p:txBody>
-          <a:bodyPr wrap="square">
+          <a:bodyPr wrap="square" anchor="t">
             <a:spAutoFit/>
           </a:bodyPr>
           <a:lstStyle/>
           <a:p>
             <a:pPr algn="l">
               <a:spcAft>
-                <a:spcPts val="800"/>
-              </a:spcAft>
-            </a:pPr>
-            <a:r>
-              <a:rPr sz="1900" b="0" i="0">
-                <a:solidFill>
-                  <a:srgbClr val="202028"/>
-                </a:solidFill>
-                <a:latin typeface="Calibri"/>
-              </a:rPr>
-              <a:t>•  Hallucination in low-context queries → Verification Agent + tiered distance gates</a:t>
-            </a:r>
-          </a:p>
-          <a:p>
-            <a:pPr algn="l">
-              <a:spcAft>
-                <a:spcPts val="800"/>
-              </a:spcAft>
-            </a:pPr>
-            <a:r>
-              <a:rPr sz="1900" b="0" i="0">
-                <a:solidFill>
-                  <a:srgbClr val="202028"/>
-                </a:solidFill>
-                <a:latin typeface="Calibri"/>
-              </a:rPr>
-              <a:t>•  Automated LLM judges unreliable (3.4–97% spread on identical answers) → human validation</a:t>
-            </a:r>
-          </a:p>
-          <a:p>
-            <a:pPr algn="l">
-              <a:spcAft>
-                <a:spcPts val="800"/>
-              </a:spcAft>
-            </a:pPr>
-            <a:r>
-              <a:rPr sz="1900" b="0" i="0">
-                <a:solidFill>
-                  <a:srgbClr val="202028"/>
-                </a:solidFill>
-                <a:latin typeface="Calibri"/>
-              </a:rPr>
-              <a:t>•  Translation 'looked weak' (chrF 28) → measurement bug; scoring the translation gives chrF 56</a:t>
-            </a:r>
-          </a:p>
-          <a:p>
-            <a:pPr algn="l">
-              <a:spcAft>
-                <a:spcPts val="800"/>
-              </a:spcAft>
-            </a:pPr>
-            <a:r>
-              <a:rPr sz="1900" b="0" i="0">
-                <a:solidFill>
-                  <a:srgbClr val="202028"/>
-                </a:solidFill>
-                <a:latin typeface="Calibri"/>
-              </a:rPr>
-              <a:t>•  Query translation degraded retrieval for non-English → cross-lingual retrieval fix</a:t>
-            </a:r>
-          </a:p>
-          <a:p>
-            <a:pPr algn="l">
-              <a:spcAft>
-                <a:spcPts val="800"/>
-              </a:spcAft>
-            </a:pPr>
-            <a:r>
-              <a:rPr sz="1900" b="0" i="0">
-                <a:solidFill>
-                  <a:srgbClr val="202028"/>
-                </a:solidFill>
-                <a:latin typeface="Calibri"/>
-              </a:rPr>
-              <a:t>•  Memory on 4 GB Pi → admission queue + client-side TTS offload + two-node split</a:t>
+                <a:spcPts val="600"/>
+              </a:spcAft>
+            </a:pPr>
+            <a:r>
+              <a:rPr sz="1000" b="0" i="0">
+                <a:solidFill>
+                  <a:srgbClr val="5A5A66"/>
+                </a:solidFill>
+                <a:latin typeface="Calibri"/>
+              </a:rPr>
+              <a:t>Edge — AI Education at the Last Mile   ·   UM-Gunners</a:t>
+            </a:r>
+          </a:p>
+        </p:txBody>
+      </p:sp>
+      <p:sp>
+        <p:nvSpPr>
+          <p:cNvPr id="5" name="Rounded Rectangle 4"/>
+          <p:cNvSpPr/>
+          <p:nvPr/>
+        </p:nvSpPr>
+        <p:spPr>
+          <a:xfrm>
+            <a:off x="640080" y="1691640"/>
+            <a:ext cx="5303520" cy="777240"/>
+          </a:xfrm>
+          <a:prstGeom prst="roundRect">
+            <a:avLst/>
+          </a:prstGeom>
+          <a:solidFill>
+            <a:srgbClr val="F1EEFC"/>
+          </a:solidFill>
+          <a:ln>
+            <a:noFill/>
+          </a:ln>
+          <a:effectLst/>
+        </p:spPr>
+        <p:style>
+          <a:lnRef idx="1">
+            <a:schemeClr val="accent1"/>
+          </a:lnRef>
+          <a:fillRef idx="3">
+            <a:schemeClr val="accent1"/>
+          </a:fillRef>
+          <a:effectRef idx="2">
+            <a:schemeClr val="accent1"/>
+          </a:effectRef>
+          <a:fontRef idx="minor">
+            <a:schemeClr val="lt1"/>
+          </a:fontRef>
+        </p:style>
+        <p:txBody>
+          <a:bodyPr rtlCol="0" anchor="ctr"/>
+          <a:lstStyle/>
+          <a:p>
+            <a:pPr algn="ctr"/>
+          </a:p>
+        </p:txBody>
+      </p:sp>
+      <p:sp>
+        <p:nvSpPr>
+          <p:cNvPr id="6" name="Right Arrow 5"/>
+          <p:cNvSpPr/>
+          <p:nvPr/>
+        </p:nvSpPr>
+        <p:spPr>
+          <a:xfrm>
+            <a:off x="5989320" y="1874520"/>
+            <a:ext cx="457200" cy="411480"/>
+          </a:xfrm>
+          <a:prstGeom prst="rightArrow">
+            <a:avLst/>
+          </a:prstGeom>
+          <a:solidFill>
+            <a:srgbClr val="5B3FE0"/>
+          </a:solidFill>
+          <a:ln>
+            <a:noFill/>
+          </a:ln>
+          <a:effectLst/>
+        </p:spPr>
+        <p:style>
+          <a:lnRef idx="1">
+            <a:schemeClr val="accent1"/>
+          </a:lnRef>
+          <a:fillRef idx="3">
+            <a:schemeClr val="accent1"/>
+          </a:fillRef>
+          <a:effectRef idx="2">
+            <a:schemeClr val="accent1"/>
+          </a:effectRef>
+          <a:fontRef idx="minor">
+            <a:schemeClr val="lt1"/>
+          </a:fontRef>
+        </p:style>
+        <p:txBody>
+          <a:bodyPr rtlCol="0" anchor="ctr"/>
+          <a:lstStyle/>
+          <a:p>
+            <a:pPr algn="ctr"/>
+          </a:p>
+        </p:txBody>
+      </p:sp>
+      <p:sp>
+        <p:nvSpPr>
+          <p:cNvPr id="7" name="Rounded Rectangle 6"/>
+          <p:cNvSpPr/>
+          <p:nvPr/>
+        </p:nvSpPr>
+        <p:spPr>
+          <a:xfrm>
+            <a:off x="6537960" y="1691640"/>
+            <a:ext cx="5029200" cy="777240"/>
+          </a:xfrm>
+          <a:prstGeom prst="roundRect">
+            <a:avLst/>
+          </a:prstGeom>
+          <a:solidFill>
+            <a:srgbClr val="EAF6EE"/>
+          </a:solidFill>
+          <a:ln>
+            <a:noFill/>
+          </a:ln>
+          <a:effectLst/>
+        </p:spPr>
+        <p:style>
+          <a:lnRef idx="1">
+            <a:schemeClr val="accent1"/>
+          </a:lnRef>
+          <a:fillRef idx="3">
+            <a:schemeClr val="accent1"/>
+          </a:fillRef>
+          <a:effectRef idx="2">
+            <a:schemeClr val="accent1"/>
+          </a:effectRef>
+          <a:fontRef idx="minor">
+            <a:schemeClr val="lt1"/>
+          </a:fontRef>
+        </p:style>
+        <p:txBody>
+          <a:bodyPr rtlCol="0" anchor="ctr"/>
+          <a:lstStyle/>
+          <a:p>
+            <a:pPr algn="ctr"/>
+          </a:p>
+        </p:txBody>
+      </p:sp>
+      <p:sp>
+        <p:nvSpPr>
+          <p:cNvPr id="8" name="TextBox 7"/>
+          <p:cNvSpPr txBox="1"/>
+          <p:nvPr/>
+        </p:nvSpPr>
+        <p:spPr>
+          <a:xfrm>
+            <a:off x="822960" y="1728216"/>
+            <a:ext cx="5029200" cy="713232"/>
+          </a:xfrm>
+          <a:prstGeom prst="rect">
+            <a:avLst/>
+          </a:prstGeom>
+          <a:noFill/>
+        </p:spPr>
+        <p:txBody>
+          <a:bodyPr wrap="square" anchor="ctr">
+            <a:spAutoFit/>
+          </a:bodyPr>
+          <a:lstStyle/>
+          <a:p>
+            <a:pPr algn="l">
+              <a:spcAft>
+                <a:spcPts val="600"/>
+              </a:spcAft>
+            </a:pPr>
+            <a:r>
+              <a:rPr sz="1300" b="1" i="0">
+                <a:solidFill>
+                  <a:srgbClr val="1E1E28"/>
+                </a:solidFill>
+                <a:latin typeface="Calibri"/>
+              </a:rPr>
+              <a:t>Hallucination in low-context queries</a:t>
+            </a:r>
+          </a:p>
+        </p:txBody>
+      </p:sp>
+      <p:sp>
+        <p:nvSpPr>
+          <p:cNvPr id="9" name="TextBox 8"/>
+          <p:cNvSpPr txBox="1"/>
+          <p:nvPr/>
+        </p:nvSpPr>
+        <p:spPr>
+          <a:xfrm>
+            <a:off x="6720840" y="1728216"/>
+            <a:ext cx="4754880" cy="713232"/>
+          </a:xfrm>
+          <a:prstGeom prst="rect">
+            <a:avLst/>
+          </a:prstGeom>
+          <a:noFill/>
+        </p:spPr>
+        <p:txBody>
+          <a:bodyPr wrap="square" anchor="ctr">
+            <a:spAutoFit/>
+          </a:bodyPr>
+          <a:lstStyle/>
+          <a:p>
+            <a:pPr algn="l">
+              <a:spcAft>
+                <a:spcPts val="600"/>
+              </a:spcAft>
+            </a:pPr>
+            <a:r>
+              <a:rPr sz="1300" b="1" i="0">
+                <a:solidFill>
+                  <a:srgbClr val="1E8E3E"/>
+                </a:solidFill>
+                <a:latin typeface="Calibri"/>
+              </a:rPr>
+              <a:t>Verification Agent + tiered distance gates</a:t>
+            </a:r>
+          </a:p>
+        </p:txBody>
+      </p:sp>
+      <p:sp>
+        <p:nvSpPr>
+          <p:cNvPr id="10" name="Rounded Rectangle 9"/>
+          <p:cNvSpPr/>
+          <p:nvPr/>
+        </p:nvSpPr>
+        <p:spPr>
+          <a:xfrm>
+            <a:off x="640080" y="2587752"/>
+            <a:ext cx="5303520" cy="777240"/>
+          </a:xfrm>
+          <a:prstGeom prst="roundRect">
+            <a:avLst/>
+          </a:prstGeom>
+          <a:solidFill>
+            <a:srgbClr val="F1EEFC"/>
+          </a:solidFill>
+          <a:ln>
+            <a:noFill/>
+          </a:ln>
+          <a:effectLst/>
+        </p:spPr>
+        <p:style>
+          <a:lnRef idx="1">
+            <a:schemeClr val="accent1"/>
+          </a:lnRef>
+          <a:fillRef idx="3">
+            <a:schemeClr val="accent1"/>
+          </a:fillRef>
+          <a:effectRef idx="2">
+            <a:schemeClr val="accent1"/>
+          </a:effectRef>
+          <a:fontRef idx="minor">
+            <a:schemeClr val="lt1"/>
+          </a:fontRef>
+        </p:style>
+        <p:txBody>
+          <a:bodyPr rtlCol="0" anchor="ctr"/>
+          <a:lstStyle/>
+          <a:p>
+            <a:pPr algn="ctr"/>
+          </a:p>
+        </p:txBody>
+      </p:sp>
+      <p:sp>
+        <p:nvSpPr>
+          <p:cNvPr id="11" name="Right Arrow 10"/>
+          <p:cNvSpPr/>
+          <p:nvPr/>
+        </p:nvSpPr>
+        <p:spPr>
+          <a:xfrm>
+            <a:off x="5989320" y="2770632"/>
+            <a:ext cx="457200" cy="411480"/>
+          </a:xfrm>
+          <a:prstGeom prst="rightArrow">
+            <a:avLst/>
+          </a:prstGeom>
+          <a:solidFill>
+            <a:srgbClr val="5B3FE0"/>
+          </a:solidFill>
+          <a:ln>
+            <a:noFill/>
+          </a:ln>
+          <a:effectLst/>
+        </p:spPr>
+        <p:style>
+          <a:lnRef idx="1">
+            <a:schemeClr val="accent1"/>
+          </a:lnRef>
+          <a:fillRef idx="3">
+            <a:schemeClr val="accent1"/>
+          </a:fillRef>
+          <a:effectRef idx="2">
+            <a:schemeClr val="accent1"/>
+          </a:effectRef>
+          <a:fontRef idx="minor">
+            <a:schemeClr val="lt1"/>
+          </a:fontRef>
+        </p:style>
+        <p:txBody>
+          <a:bodyPr rtlCol="0" anchor="ctr"/>
+          <a:lstStyle/>
+          <a:p>
+            <a:pPr algn="ctr"/>
+          </a:p>
+        </p:txBody>
+      </p:sp>
+      <p:sp>
+        <p:nvSpPr>
+          <p:cNvPr id="12" name="Rounded Rectangle 11"/>
+          <p:cNvSpPr/>
+          <p:nvPr/>
+        </p:nvSpPr>
+        <p:spPr>
+          <a:xfrm>
+            <a:off x="6537960" y="2587752"/>
+            <a:ext cx="5029200" cy="777240"/>
+          </a:xfrm>
+          <a:prstGeom prst="roundRect">
+            <a:avLst/>
+          </a:prstGeom>
+          <a:solidFill>
+            <a:srgbClr val="EAF6EE"/>
+          </a:solidFill>
+          <a:ln>
+            <a:noFill/>
+          </a:ln>
+          <a:effectLst/>
+        </p:spPr>
+        <p:style>
+          <a:lnRef idx="1">
+            <a:schemeClr val="accent1"/>
+          </a:lnRef>
+          <a:fillRef idx="3">
+            <a:schemeClr val="accent1"/>
+          </a:fillRef>
+          <a:effectRef idx="2">
+            <a:schemeClr val="accent1"/>
+          </a:effectRef>
+          <a:fontRef idx="minor">
+            <a:schemeClr val="lt1"/>
+          </a:fontRef>
+        </p:style>
+        <p:txBody>
+          <a:bodyPr rtlCol="0" anchor="ctr"/>
+          <a:lstStyle/>
+          <a:p>
+            <a:pPr algn="ctr"/>
+          </a:p>
+        </p:txBody>
+      </p:sp>
+      <p:sp>
+        <p:nvSpPr>
+          <p:cNvPr id="13" name="TextBox 12"/>
+          <p:cNvSpPr txBox="1"/>
+          <p:nvPr/>
+        </p:nvSpPr>
+        <p:spPr>
+          <a:xfrm>
+            <a:off x="822960" y="2624328"/>
+            <a:ext cx="5029200" cy="713232"/>
+          </a:xfrm>
+          <a:prstGeom prst="rect">
+            <a:avLst/>
+          </a:prstGeom>
+          <a:noFill/>
+        </p:spPr>
+        <p:txBody>
+          <a:bodyPr wrap="square" anchor="ctr">
+            <a:spAutoFit/>
+          </a:bodyPr>
+          <a:lstStyle/>
+          <a:p>
+            <a:pPr algn="l">
+              <a:spcAft>
+                <a:spcPts val="600"/>
+              </a:spcAft>
+            </a:pPr>
+            <a:r>
+              <a:rPr sz="1300" b="1" i="0">
+                <a:solidFill>
+                  <a:srgbClr val="1E1E28"/>
+                </a:solidFill>
+                <a:latin typeface="Calibri"/>
+              </a:rPr>
+              <a:t>Automated LLM judges unreliable (3.4–97%)</a:t>
+            </a:r>
+          </a:p>
+        </p:txBody>
+      </p:sp>
+      <p:sp>
+        <p:nvSpPr>
+          <p:cNvPr id="14" name="TextBox 13"/>
+          <p:cNvSpPr txBox="1"/>
+          <p:nvPr/>
+        </p:nvSpPr>
+        <p:spPr>
+          <a:xfrm>
+            <a:off x="6720840" y="2624328"/>
+            <a:ext cx="4754880" cy="713232"/>
+          </a:xfrm>
+          <a:prstGeom prst="rect">
+            <a:avLst/>
+          </a:prstGeom>
+          <a:noFill/>
+        </p:spPr>
+        <p:txBody>
+          <a:bodyPr wrap="square" anchor="ctr">
+            <a:spAutoFit/>
+          </a:bodyPr>
+          <a:lstStyle/>
+          <a:p>
+            <a:pPr algn="l">
+              <a:spcAft>
+                <a:spcPts val="600"/>
+              </a:spcAft>
+            </a:pPr>
+            <a:r>
+              <a:rPr sz="1300" b="1" i="0">
+                <a:solidFill>
+                  <a:srgbClr val="1E8E3E"/>
+                </a:solidFill>
+                <a:latin typeface="Calibri"/>
+              </a:rPr>
+              <a:t>Validate answer correctness with humans</a:t>
+            </a:r>
+          </a:p>
+        </p:txBody>
+      </p:sp>
+      <p:sp>
+        <p:nvSpPr>
+          <p:cNvPr id="15" name="Rounded Rectangle 14"/>
+          <p:cNvSpPr/>
+          <p:nvPr/>
+        </p:nvSpPr>
+        <p:spPr>
+          <a:xfrm>
+            <a:off x="640080" y="3483864"/>
+            <a:ext cx="5303520" cy="777240"/>
+          </a:xfrm>
+          <a:prstGeom prst="roundRect">
+            <a:avLst/>
+          </a:prstGeom>
+          <a:solidFill>
+            <a:srgbClr val="F1EEFC"/>
+          </a:solidFill>
+          <a:ln>
+            <a:noFill/>
+          </a:ln>
+          <a:effectLst/>
+        </p:spPr>
+        <p:style>
+          <a:lnRef idx="1">
+            <a:schemeClr val="accent1"/>
+          </a:lnRef>
+          <a:fillRef idx="3">
+            <a:schemeClr val="accent1"/>
+          </a:fillRef>
+          <a:effectRef idx="2">
+            <a:schemeClr val="accent1"/>
+          </a:effectRef>
+          <a:fontRef idx="minor">
+            <a:schemeClr val="lt1"/>
+          </a:fontRef>
+        </p:style>
+        <p:txBody>
+          <a:bodyPr rtlCol="0" anchor="ctr"/>
+          <a:lstStyle/>
+          <a:p>
+            <a:pPr algn="ctr"/>
+          </a:p>
+        </p:txBody>
+      </p:sp>
+      <p:sp>
+        <p:nvSpPr>
+          <p:cNvPr id="16" name="Right Arrow 15"/>
+          <p:cNvSpPr/>
+          <p:nvPr/>
+        </p:nvSpPr>
+        <p:spPr>
+          <a:xfrm>
+            <a:off x="5989320" y="3666744"/>
+            <a:ext cx="457200" cy="411480"/>
+          </a:xfrm>
+          <a:prstGeom prst="rightArrow">
+            <a:avLst/>
+          </a:prstGeom>
+          <a:solidFill>
+            <a:srgbClr val="5B3FE0"/>
+          </a:solidFill>
+          <a:ln>
+            <a:noFill/>
+          </a:ln>
+          <a:effectLst/>
+        </p:spPr>
+        <p:style>
+          <a:lnRef idx="1">
+            <a:schemeClr val="accent1"/>
+          </a:lnRef>
+          <a:fillRef idx="3">
+            <a:schemeClr val="accent1"/>
+          </a:fillRef>
+          <a:effectRef idx="2">
+            <a:schemeClr val="accent1"/>
+          </a:effectRef>
+          <a:fontRef idx="minor">
+            <a:schemeClr val="lt1"/>
+          </a:fontRef>
+        </p:style>
+        <p:txBody>
+          <a:bodyPr rtlCol="0" anchor="ctr"/>
+          <a:lstStyle/>
+          <a:p>
+            <a:pPr algn="ctr"/>
+          </a:p>
+        </p:txBody>
+      </p:sp>
+      <p:sp>
+        <p:nvSpPr>
+          <p:cNvPr id="17" name="Rounded Rectangle 16"/>
+          <p:cNvSpPr/>
+          <p:nvPr/>
+        </p:nvSpPr>
+        <p:spPr>
+          <a:xfrm>
+            <a:off x="6537960" y="3483864"/>
+            <a:ext cx="5029200" cy="777240"/>
+          </a:xfrm>
+          <a:prstGeom prst="roundRect">
+            <a:avLst/>
+          </a:prstGeom>
+          <a:solidFill>
+            <a:srgbClr val="EAF6EE"/>
+          </a:solidFill>
+          <a:ln>
+            <a:noFill/>
+          </a:ln>
+          <a:effectLst/>
+        </p:spPr>
+        <p:style>
+          <a:lnRef idx="1">
+            <a:schemeClr val="accent1"/>
+          </a:lnRef>
+          <a:fillRef idx="3">
+            <a:schemeClr val="accent1"/>
+          </a:fillRef>
+          <a:effectRef idx="2">
+            <a:schemeClr val="accent1"/>
+          </a:effectRef>
+          <a:fontRef idx="minor">
+            <a:schemeClr val="lt1"/>
+          </a:fontRef>
+        </p:style>
+        <p:txBody>
+          <a:bodyPr rtlCol="0" anchor="ctr"/>
+          <a:lstStyle/>
+          <a:p>
+            <a:pPr algn="ctr"/>
+          </a:p>
+        </p:txBody>
+      </p:sp>
+      <p:sp>
+        <p:nvSpPr>
+          <p:cNvPr id="18" name="TextBox 17"/>
+          <p:cNvSpPr txBox="1"/>
+          <p:nvPr/>
+        </p:nvSpPr>
+        <p:spPr>
+          <a:xfrm>
+            <a:off x="822960" y="3520440"/>
+            <a:ext cx="5029200" cy="713232"/>
+          </a:xfrm>
+          <a:prstGeom prst="rect">
+            <a:avLst/>
+          </a:prstGeom>
+          <a:noFill/>
+        </p:spPr>
+        <p:txBody>
+          <a:bodyPr wrap="square" anchor="ctr">
+            <a:spAutoFit/>
+          </a:bodyPr>
+          <a:lstStyle/>
+          <a:p>
+            <a:pPr algn="l">
+              <a:spcAft>
+                <a:spcPts val="600"/>
+              </a:spcAft>
+            </a:pPr>
+            <a:r>
+              <a:rPr sz="1300" b="1" i="0">
+                <a:solidFill>
+                  <a:srgbClr val="1E1E28"/>
+                </a:solidFill>
+                <a:latin typeface="Calibri"/>
+              </a:rPr>
+              <a:t>Translation “looked weak” (chrF 28)</a:t>
+            </a:r>
+          </a:p>
+        </p:txBody>
+      </p:sp>
+      <p:sp>
+        <p:nvSpPr>
+          <p:cNvPr id="19" name="TextBox 18"/>
+          <p:cNvSpPr txBox="1"/>
+          <p:nvPr/>
+        </p:nvSpPr>
+        <p:spPr>
+          <a:xfrm>
+            <a:off x="6720840" y="3520440"/>
+            <a:ext cx="4754880" cy="713232"/>
+          </a:xfrm>
+          <a:prstGeom prst="rect">
+            <a:avLst/>
+          </a:prstGeom>
+          <a:noFill/>
+        </p:spPr>
+        <p:txBody>
+          <a:bodyPr wrap="square" anchor="ctr">
+            <a:spAutoFit/>
+          </a:bodyPr>
+          <a:lstStyle/>
+          <a:p>
+            <a:pPr algn="l">
+              <a:spcAft>
+                <a:spcPts val="600"/>
+              </a:spcAft>
+            </a:pPr>
+            <a:r>
+              <a:rPr sz="1300" b="1" i="0">
+                <a:solidFill>
+                  <a:srgbClr val="1E8E3E"/>
+                </a:solidFill>
+                <a:latin typeface="Calibri"/>
+              </a:rPr>
+              <a:t>Measurement bug — real chrF is 56</a:t>
+            </a:r>
+          </a:p>
+        </p:txBody>
+      </p:sp>
+      <p:sp>
+        <p:nvSpPr>
+          <p:cNvPr id="20" name="Rounded Rectangle 19"/>
+          <p:cNvSpPr/>
+          <p:nvPr/>
+        </p:nvSpPr>
+        <p:spPr>
+          <a:xfrm>
+            <a:off x="640080" y="4379976"/>
+            <a:ext cx="5303520" cy="777240"/>
+          </a:xfrm>
+          <a:prstGeom prst="roundRect">
+            <a:avLst/>
+          </a:prstGeom>
+          <a:solidFill>
+            <a:srgbClr val="F1EEFC"/>
+          </a:solidFill>
+          <a:ln>
+            <a:noFill/>
+          </a:ln>
+          <a:effectLst/>
+        </p:spPr>
+        <p:style>
+          <a:lnRef idx="1">
+            <a:schemeClr val="accent1"/>
+          </a:lnRef>
+          <a:fillRef idx="3">
+            <a:schemeClr val="accent1"/>
+          </a:fillRef>
+          <a:effectRef idx="2">
+            <a:schemeClr val="accent1"/>
+          </a:effectRef>
+          <a:fontRef idx="minor">
+            <a:schemeClr val="lt1"/>
+          </a:fontRef>
+        </p:style>
+        <p:txBody>
+          <a:bodyPr rtlCol="0" anchor="ctr"/>
+          <a:lstStyle/>
+          <a:p>
+            <a:pPr algn="ctr"/>
+          </a:p>
+        </p:txBody>
+      </p:sp>
+      <p:sp>
+        <p:nvSpPr>
+          <p:cNvPr id="21" name="Right Arrow 20"/>
+          <p:cNvSpPr/>
+          <p:nvPr/>
+        </p:nvSpPr>
+        <p:spPr>
+          <a:xfrm>
+            <a:off x="5989320" y="4562856"/>
+            <a:ext cx="457200" cy="411480"/>
+          </a:xfrm>
+          <a:prstGeom prst="rightArrow">
+            <a:avLst/>
+          </a:prstGeom>
+          <a:solidFill>
+            <a:srgbClr val="5B3FE0"/>
+          </a:solidFill>
+          <a:ln>
+            <a:noFill/>
+          </a:ln>
+          <a:effectLst/>
+        </p:spPr>
+        <p:style>
+          <a:lnRef idx="1">
+            <a:schemeClr val="accent1"/>
+          </a:lnRef>
+          <a:fillRef idx="3">
+            <a:schemeClr val="accent1"/>
+          </a:fillRef>
+          <a:effectRef idx="2">
+            <a:schemeClr val="accent1"/>
+          </a:effectRef>
+          <a:fontRef idx="minor">
+            <a:schemeClr val="lt1"/>
+          </a:fontRef>
+        </p:style>
+        <p:txBody>
+          <a:bodyPr rtlCol="0" anchor="ctr"/>
+          <a:lstStyle/>
+          <a:p>
+            <a:pPr algn="ctr"/>
+          </a:p>
+        </p:txBody>
+      </p:sp>
+      <p:sp>
+        <p:nvSpPr>
+          <p:cNvPr id="22" name="Rounded Rectangle 21"/>
+          <p:cNvSpPr/>
+          <p:nvPr/>
+        </p:nvSpPr>
+        <p:spPr>
+          <a:xfrm>
+            <a:off x="6537960" y="4379976"/>
+            <a:ext cx="5029200" cy="777240"/>
+          </a:xfrm>
+          <a:prstGeom prst="roundRect">
+            <a:avLst/>
+          </a:prstGeom>
+          <a:solidFill>
+            <a:srgbClr val="EAF6EE"/>
+          </a:solidFill>
+          <a:ln>
+            <a:noFill/>
+          </a:ln>
+          <a:effectLst/>
+        </p:spPr>
+        <p:style>
+          <a:lnRef idx="1">
+            <a:schemeClr val="accent1"/>
+          </a:lnRef>
+          <a:fillRef idx="3">
+            <a:schemeClr val="accent1"/>
+          </a:fillRef>
+          <a:effectRef idx="2">
+            <a:schemeClr val="accent1"/>
+          </a:effectRef>
+          <a:fontRef idx="minor">
+            <a:schemeClr val="lt1"/>
+          </a:fontRef>
+        </p:style>
+        <p:txBody>
+          <a:bodyPr rtlCol="0" anchor="ctr"/>
+          <a:lstStyle/>
+          <a:p>
+            <a:pPr algn="ctr"/>
+          </a:p>
+        </p:txBody>
+      </p:sp>
+      <p:sp>
+        <p:nvSpPr>
+          <p:cNvPr id="23" name="TextBox 22"/>
+          <p:cNvSpPr txBox="1"/>
+          <p:nvPr/>
+        </p:nvSpPr>
+        <p:spPr>
+          <a:xfrm>
+            <a:off x="822960" y="4416552"/>
+            <a:ext cx="5029200" cy="713232"/>
+          </a:xfrm>
+          <a:prstGeom prst="rect">
+            <a:avLst/>
+          </a:prstGeom>
+          <a:noFill/>
+        </p:spPr>
+        <p:txBody>
+          <a:bodyPr wrap="square" anchor="ctr">
+            <a:spAutoFit/>
+          </a:bodyPr>
+          <a:lstStyle/>
+          <a:p>
+            <a:pPr algn="l">
+              <a:spcAft>
+                <a:spcPts val="600"/>
+              </a:spcAft>
+            </a:pPr>
+            <a:r>
+              <a:rPr sz="1300" b="1" i="0">
+                <a:solidFill>
+                  <a:srgbClr val="1E1E28"/>
+                </a:solidFill>
+                <a:latin typeface="Calibri"/>
+              </a:rPr>
+              <a:t>Query translation degraded retrieval</a:t>
+            </a:r>
+          </a:p>
+        </p:txBody>
+      </p:sp>
+      <p:sp>
+        <p:nvSpPr>
+          <p:cNvPr id="24" name="TextBox 23"/>
+          <p:cNvSpPr txBox="1"/>
+          <p:nvPr/>
+        </p:nvSpPr>
+        <p:spPr>
+          <a:xfrm>
+            <a:off x="6720840" y="4416552"/>
+            <a:ext cx="4754880" cy="713232"/>
+          </a:xfrm>
+          <a:prstGeom prst="rect">
+            <a:avLst/>
+          </a:prstGeom>
+          <a:noFill/>
+        </p:spPr>
+        <p:txBody>
+          <a:bodyPr wrap="square" anchor="ctr">
+            <a:spAutoFit/>
+          </a:bodyPr>
+          <a:lstStyle/>
+          <a:p>
+            <a:pPr algn="l">
+              <a:spcAft>
+                <a:spcPts val="600"/>
+              </a:spcAft>
+            </a:pPr>
+            <a:r>
+              <a:rPr sz="1300" b="1" i="0">
+                <a:solidFill>
+                  <a:srgbClr val="1E8E3E"/>
+                </a:solidFill>
+                <a:latin typeface="Calibri"/>
+              </a:rPr>
+              <a:t>Cross-lingual retrieval (closed the bias gap)</a:t>
+            </a:r>
+          </a:p>
+        </p:txBody>
+      </p:sp>
+      <p:sp>
+        <p:nvSpPr>
+          <p:cNvPr id="25" name="Rounded Rectangle 24"/>
+          <p:cNvSpPr/>
+          <p:nvPr/>
+        </p:nvSpPr>
+        <p:spPr>
+          <a:xfrm>
+            <a:off x="640080" y="5276088"/>
+            <a:ext cx="5303520" cy="777240"/>
+          </a:xfrm>
+          <a:prstGeom prst="roundRect">
+            <a:avLst/>
+          </a:prstGeom>
+          <a:solidFill>
+            <a:srgbClr val="F1EEFC"/>
+          </a:solidFill>
+          <a:ln>
+            <a:noFill/>
+          </a:ln>
+          <a:effectLst/>
+        </p:spPr>
+        <p:style>
+          <a:lnRef idx="1">
+            <a:schemeClr val="accent1"/>
+          </a:lnRef>
+          <a:fillRef idx="3">
+            <a:schemeClr val="accent1"/>
+          </a:fillRef>
+          <a:effectRef idx="2">
+            <a:schemeClr val="accent1"/>
+          </a:effectRef>
+          <a:fontRef idx="minor">
+            <a:schemeClr val="lt1"/>
+          </a:fontRef>
+        </p:style>
+        <p:txBody>
+          <a:bodyPr rtlCol="0" anchor="ctr"/>
+          <a:lstStyle/>
+          <a:p>
+            <a:pPr algn="ctr"/>
+          </a:p>
+        </p:txBody>
+      </p:sp>
+      <p:sp>
+        <p:nvSpPr>
+          <p:cNvPr id="26" name="Right Arrow 25"/>
+          <p:cNvSpPr/>
+          <p:nvPr/>
+        </p:nvSpPr>
+        <p:spPr>
+          <a:xfrm>
+            <a:off x="5989320" y="5458968"/>
+            <a:ext cx="457200" cy="411480"/>
+          </a:xfrm>
+          <a:prstGeom prst="rightArrow">
+            <a:avLst/>
+          </a:prstGeom>
+          <a:solidFill>
+            <a:srgbClr val="5B3FE0"/>
+          </a:solidFill>
+          <a:ln>
+            <a:noFill/>
+          </a:ln>
+          <a:effectLst/>
+        </p:spPr>
+        <p:style>
+          <a:lnRef idx="1">
+            <a:schemeClr val="accent1"/>
+          </a:lnRef>
+          <a:fillRef idx="3">
+            <a:schemeClr val="accent1"/>
+          </a:fillRef>
+          <a:effectRef idx="2">
+            <a:schemeClr val="accent1"/>
+          </a:effectRef>
+          <a:fontRef idx="minor">
+            <a:schemeClr val="lt1"/>
+          </a:fontRef>
+        </p:style>
+        <p:txBody>
+          <a:bodyPr rtlCol="0" anchor="ctr"/>
+          <a:lstStyle/>
+          <a:p>
+            <a:pPr algn="ctr"/>
+          </a:p>
+        </p:txBody>
+      </p:sp>
+      <p:sp>
+        <p:nvSpPr>
+          <p:cNvPr id="27" name="Rounded Rectangle 26"/>
+          <p:cNvSpPr/>
+          <p:nvPr/>
+        </p:nvSpPr>
+        <p:spPr>
+          <a:xfrm>
+            <a:off x="6537960" y="5276088"/>
+            <a:ext cx="5029200" cy="777240"/>
+          </a:xfrm>
+          <a:prstGeom prst="roundRect">
+            <a:avLst/>
+          </a:prstGeom>
+          <a:solidFill>
+            <a:srgbClr val="EAF6EE"/>
+          </a:solidFill>
+          <a:ln>
+            <a:noFill/>
+          </a:ln>
+          <a:effectLst/>
+        </p:spPr>
+        <p:style>
+          <a:lnRef idx="1">
+            <a:schemeClr val="accent1"/>
+          </a:lnRef>
+          <a:fillRef idx="3">
+            <a:schemeClr val="accent1"/>
+          </a:fillRef>
+          <a:effectRef idx="2">
+            <a:schemeClr val="accent1"/>
+          </a:effectRef>
+          <a:fontRef idx="minor">
+            <a:schemeClr val="lt1"/>
+          </a:fontRef>
+        </p:style>
+        <p:txBody>
+          <a:bodyPr rtlCol="0" anchor="ctr"/>
+          <a:lstStyle/>
+          <a:p>
+            <a:pPr algn="ctr"/>
+          </a:p>
+        </p:txBody>
+      </p:sp>
+      <p:sp>
+        <p:nvSpPr>
+          <p:cNvPr id="28" name="TextBox 27"/>
+          <p:cNvSpPr txBox="1"/>
+          <p:nvPr/>
+        </p:nvSpPr>
+        <p:spPr>
+          <a:xfrm>
+            <a:off x="822960" y="5312664"/>
+            <a:ext cx="5029200" cy="713232"/>
+          </a:xfrm>
+          <a:prstGeom prst="rect">
+            <a:avLst/>
+          </a:prstGeom>
+          <a:noFill/>
+        </p:spPr>
+        <p:txBody>
+          <a:bodyPr wrap="square" anchor="ctr">
+            <a:spAutoFit/>
+          </a:bodyPr>
+          <a:lstStyle/>
+          <a:p>
+            <a:pPr algn="l">
+              <a:spcAft>
+                <a:spcPts val="600"/>
+              </a:spcAft>
+            </a:pPr>
+            <a:r>
+              <a:rPr sz="1300" b="1" i="0">
+                <a:solidFill>
+                  <a:srgbClr val="1E1E28"/>
+                </a:solidFill>
+                <a:latin typeface="Calibri"/>
+              </a:rPr>
+              <a:t>Memory pressure on a 4 GB Pi</a:t>
+            </a:r>
+          </a:p>
+        </p:txBody>
+      </p:sp>
+      <p:sp>
+        <p:nvSpPr>
+          <p:cNvPr id="29" name="TextBox 28"/>
+          <p:cNvSpPr txBox="1"/>
+          <p:nvPr/>
+        </p:nvSpPr>
+        <p:spPr>
+          <a:xfrm>
+            <a:off x="6720840" y="5312664"/>
+            <a:ext cx="4754880" cy="713232"/>
+          </a:xfrm>
+          <a:prstGeom prst="rect">
+            <a:avLst/>
+          </a:prstGeom>
+          <a:noFill/>
+        </p:spPr>
+        <p:txBody>
+          <a:bodyPr wrap="square" anchor="ctr">
+            <a:spAutoFit/>
+          </a:bodyPr>
+          <a:lstStyle/>
+          <a:p>
+            <a:pPr algn="l">
+              <a:spcAft>
+                <a:spcPts val="600"/>
+              </a:spcAft>
+            </a:pPr>
+            <a:r>
+              <a:rPr sz="1300" b="1" i="0">
+                <a:solidFill>
+                  <a:srgbClr val="1E8E3E"/>
+                </a:solidFill>
+                <a:latin typeface="Calibri"/>
+              </a:rPr>
+              <a:t>Admission queue + TTS offload + two-node split</a:t>
             </a:r>
           </a:p>
         </p:txBody>
@@ -3447,7 +4907,7 @@
         <p:spPr>
           <a:xfrm>
             <a:off x="0" y="0"/>
-            <a:ext cx="201168" cy="6858000"/>
+            <a:ext cx="164592" cy="6858000"/>
           </a:xfrm>
           <a:prstGeom prst="rect">
             <a:avLst/>
@@ -3458,6 +4918,7 @@
           <a:ln>
             <a:noFill/>
           </a:ln>
+          <a:effectLst/>
         </p:spPr>
         <p:style>
           <a:lnRef idx="1">
@@ -3489,8 +4950,8 @@
         </p:nvSpPr>
         <p:spPr>
           <a:xfrm>
-            <a:off x="548640" y="411480"/>
-            <a:ext cx="11155680" cy="914400"/>
+            <a:off x="548640" y="365760"/>
+            <a:ext cx="11338560" cy="1005840"/>
           </a:xfrm>
           <a:prstGeom prst="rect">
             <a:avLst/>
@@ -3498,509 +4959,467 @@
           <a:noFill/>
         </p:spPr>
         <p:txBody>
-          <a:bodyPr wrap="square">
+          <a:bodyPr wrap="square" anchor="t">
             <a:spAutoFit/>
           </a:bodyPr>
           <a:lstStyle/>
           <a:p>
-            <a:pPr algn="l"/>
+            <a:pPr algn="l">
+              <a:spcAft>
+                <a:spcPts val="200"/>
+              </a:spcAft>
+            </a:pPr>
+            <a:r>
+              <a:rPr sz="1300" b="1" i="0">
+                <a:solidFill>
+                  <a:srgbClr val="5B3FE0"/>
+                </a:solidFill>
+                <a:latin typeface="Calibri"/>
+              </a:rPr>
+              <a:t>ACCURACY &amp; EFFICIENCY METRICS</a:t>
+            </a:r>
+          </a:p>
+          <a:p>
+            <a:pPr algn="l">
+              <a:spcAft>
+                <a:spcPts val="600"/>
+              </a:spcAft>
+            </a:pPr>
             <a:r>
               <a:rPr sz="3000" b="1" i="0">
                 <a:solidFill>
+                  <a:srgbClr val="1E1E28"/>
+                </a:solidFill>
+                <a:latin typeface="Calibri"/>
+              </a:rPr>
+              <a:t>Measured, not claimed</a:t>
+            </a:r>
+          </a:p>
+        </p:txBody>
+      </p:sp>
+      <p:sp>
+        <p:nvSpPr>
+          <p:cNvPr id="4" name="TextBox 3"/>
+          <p:cNvSpPr txBox="1"/>
+          <p:nvPr/>
+        </p:nvSpPr>
+        <p:spPr>
+          <a:xfrm>
+            <a:off x="548640" y="6419088"/>
+            <a:ext cx="11064240" cy="365760"/>
+          </a:xfrm>
+          <a:prstGeom prst="rect">
+            <a:avLst/>
+          </a:prstGeom>
+          <a:noFill/>
+        </p:spPr>
+        <p:txBody>
+          <a:bodyPr wrap="square" anchor="t">
+            <a:spAutoFit/>
+          </a:bodyPr>
+          <a:lstStyle/>
+          <a:p>
+            <a:pPr algn="l">
+              <a:spcAft>
+                <a:spcPts val="600"/>
+              </a:spcAft>
+            </a:pPr>
+            <a:r>
+              <a:rPr sz="1000" b="0" i="0">
+                <a:solidFill>
+                  <a:srgbClr val="5A5A66"/>
+                </a:solidFill>
+                <a:latin typeface="Calibri"/>
+              </a:rPr>
+              <a:t>Edge — AI Education at the Last Mile   ·   UM-Gunners</a:t>
+            </a:r>
+          </a:p>
+        </p:txBody>
+      </p:sp>
+      <p:sp>
+        <p:nvSpPr>
+          <p:cNvPr id="5" name="Rounded Rectangle 4"/>
+          <p:cNvSpPr/>
+          <p:nvPr/>
+        </p:nvSpPr>
+        <p:spPr>
+          <a:xfrm>
+            <a:off x="640080" y="1554480"/>
+            <a:ext cx="2606040" cy="1737360"/>
+          </a:xfrm>
+          <a:prstGeom prst="roundRect">
+            <a:avLst/>
+          </a:prstGeom>
+          <a:solidFill>
+            <a:srgbClr val="F1EEFC"/>
+          </a:solidFill>
+          <a:ln>
+            <a:noFill/>
+          </a:ln>
+          <a:effectLst/>
+        </p:spPr>
+        <p:style>
+          <a:lnRef idx="1">
+            <a:schemeClr val="accent1"/>
+          </a:lnRef>
+          <a:fillRef idx="3">
+            <a:schemeClr val="accent1"/>
+          </a:fillRef>
+          <a:effectRef idx="2">
+            <a:schemeClr val="accent1"/>
+          </a:effectRef>
+          <a:fontRef idx="minor">
+            <a:schemeClr val="lt1"/>
+          </a:fontRef>
+        </p:style>
+        <p:txBody>
+          <a:bodyPr rtlCol="0" anchor="ctr" wrap="square" lIns="164592" rIns="164592" tIns="164592"/>
+          <a:lstStyle/>
+          <a:p>
+            <a:pPr algn="l">
+              <a:spcAft>
+                <a:spcPts val="200"/>
+              </a:spcAft>
+            </a:pPr>
+            <a:r>
+              <a:rPr sz="4000" b="1" i="0">
+                <a:solidFill>
                   <a:srgbClr val="5B3FE0"/>
                 </a:solidFill>
                 <a:latin typeface="Calibri"/>
               </a:rPr>
-              <a:t>Accuracy &amp; Efficiency Metrics</a:t>
-            </a:r>
-          </a:p>
-          <a:p>
-            <a:pPr algn="l"/>
-            <a:r>
-              <a:rPr sz="1500" b="0" i="1">
-                <a:solidFill>
-                  <a:srgbClr val="555560"/>
-                </a:solidFill>
-                <a:latin typeface="Calibri"/>
-              </a:rPr>
-              <a:t>Reproducible via the evaluation harness (tools/eval_*.py) — measured, not claimed</a:t>
+              <a:t>100%</a:t>
+            </a:r>
+          </a:p>
+          <a:p>
+            <a:pPr algn="l">
+              <a:spcAft>
+                <a:spcPts val="200"/>
+              </a:spcAft>
+            </a:pPr>
+            <a:r>
+              <a:rPr sz="1400" b="1" i="0">
+                <a:solidFill>
+                  <a:srgbClr val="1E1E28"/>
+                </a:solidFill>
+                <a:latin typeface="Calibri"/>
+              </a:rPr>
+              <a:t>Retrieval recall</a:t>
+            </a:r>
+          </a:p>
+          <a:p>
+            <a:pPr algn="l">
+              <a:spcAft>
+                <a:spcPts val="600"/>
+              </a:spcAft>
+            </a:pPr>
+            <a:r>
+              <a:rPr sz="1100" b="0" i="0">
+                <a:solidFill>
+                  <a:srgbClr val="5A5A66"/>
+                </a:solidFill>
+                <a:latin typeface="Calibri"/>
+              </a:rPr>
+              <a:t>right source always found</a:t>
+            </a:r>
+          </a:p>
+        </p:txBody>
+      </p:sp>
+      <p:sp>
+        <p:nvSpPr>
+          <p:cNvPr id="6" name="Rounded Rectangle 5"/>
+          <p:cNvSpPr/>
+          <p:nvPr/>
+        </p:nvSpPr>
+        <p:spPr>
+          <a:xfrm>
+            <a:off x="3429000" y="1554480"/>
+            <a:ext cx="2606040" cy="1737360"/>
+          </a:xfrm>
+          <a:prstGeom prst="roundRect">
+            <a:avLst/>
+          </a:prstGeom>
+          <a:solidFill>
+            <a:srgbClr val="F1EEFC"/>
+          </a:solidFill>
+          <a:ln>
+            <a:noFill/>
+          </a:ln>
+          <a:effectLst/>
+        </p:spPr>
+        <p:style>
+          <a:lnRef idx="1">
+            <a:schemeClr val="accent1"/>
+          </a:lnRef>
+          <a:fillRef idx="3">
+            <a:schemeClr val="accent1"/>
+          </a:fillRef>
+          <a:effectRef idx="2">
+            <a:schemeClr val="accent1"/>
+          </a:effectRef>
+          <a:fontRef idx="minor">
+            <a:schemeClr val="lt1"/>
+          </a:fontRef>
+        </p:style>
+        <p:txBody>
+          <a:bodyPr rtlCol="0" anchor="ctr" wrap="square" lIns="164592" rIns="164592" tIns="164592"/>
+          <a:lstStyle/>
+          <a:p>
+            <a:pPr algn="l">
+              <a:spcAft>
+                <a:spcPts val="200"/>
+              </a:spcAft>
+            </a:pPr>
+            <a:r>
+              <a:rPr sz="4000" b="1" i="0">
+                <a:solidFill>
+                  <a:srgbClr val="1E8E3E"/>
+                </a:solidFill>
+                <a:latin typeface="Calibri"/>
+              </a:rPr>
+              <a:t>0%</a:t>
+            </a:r>
+          </a:p>
+          <a:p>
+            <a:pPr algn="l">
+              <a:spcAft>
+                <a:spcPts val="200"/>
+              </a:spcAft>
+            </a:pPr>
+            <a:r>
+              <a:rPr sz="1400" b="1" i="0">
+                <a:solidFill>
+                  <a:srgbClr val="1E1E28"/>
+                </a:solidFill>
+                <a:latin typeface="Calibri"/>
+              </a:rPr>
+              <a:t>Hallucination</a:t>
+            </a:r>
+          </a:p>
+          <a:p>
+            <a:pPr algn="l">
+              <a:spcAft>
+                <a:spcPts val="600"/>
+              </a:spcAft>
+            </a:pPr>
+            <a:r>
+              <a:rPr sz="1100" b="0" i="0">
+                <a:solidFill>
+                  <a:srgbClr val="5A5A66"/>
+                </a:solidFill>
+                <a:latin typeface="Calibri"/>
+              </a:rPr>
+              <a:t>no false grounding</a:t>
+            </a:r>
+          </a:p>
+        </p:txBody>
+      </p:sp>
+      <p:sp>
+        <p:nvSpPr>
+          <p:cNvPr id="7" name="Rounded Rectangle 6"/>
+          <p:cNvSpPr/>
+          <p:nvPr/>
+        </p:nvSpPr>
+        <p:spPr>
+          <a:xfrm>
+            <a:off x="6217920" y="1554480"/>
+            <a:ext cx="2606040" cy="1737360"/>
+          </a:xfrm>
+          <a:prstGeom prst="roundRect">
+            <a:avLst/>
+          </a:prstGeom>
+          <a:solidFill>
+            <a:srgbClr val="F1EEFC"/>
+          </a:solidFill>
+          <a:ln>
+            <a:noFill/>
+          </a:ln>
+          <a:effectLst/>
+        </p:spPr>
+        <p:style>
+          <a:lnRef idx="1">
+            <a:schemeClr val="accent1"/>
+          </a:lnRef>
+          <a:fillRef idx="3">
+            <a:schemeClr val="accent1"/>
+          </a:fillRef>
+          <a:effectRef idx="2">
+            <a:schemeClr val="accent1"/>
+          </a:effectRef>
+          <a:fontRef idx="minor">
+            <a:schemeClr val="lt1"/>
+          </a:fontRef>
+        </p:style>
+        <p:txBody>
+          <a:bodyPr rtlCol="0" anchor="ctr" wrap="square" lIns="164592" rIns="164592" tIns="164592"/>
+          <a:lstStyle/>
+          <a:p>
+            <a:pPr algn="l">
+              <a:spcAft>
+                <a:spcPts val="200"/>
+              </a:spcAft>
+            </a:pPr>
+            <a:r>
+              <a:rPr sz="4000" b="1" i="0">
+                <a:solidFill>
+                  <a:srgbClr val="0E809B"/>
+                </a:solidFill>
+                <a:latin typeface="Calibri"/>
+              </a:rPr>
+              <a:t>~97%</a:t>
+            </a:r>
+          </a:p>
+          <a:p>
+            <a:pPr algn="l">
+              <a:spcAft>
+                <a:spcPts val="200"/>
+              </a:spcAft>
+            </a:pPr>
+            <a:r>
+              <a:rPr sz="1400" b="1" i="0">
+                <a:solidFill>
+                  <a:srgbClr val="1E1E28"/>
+                </a:solidFill>
+                <a:latin typeface="Calibri"/>
+              </a:rPr>
+              <a:t>Concept coverage</a:t>
+            </a:r>
+          </a:p>
+          <a:p>
+            <a:pPr algn="l">
+              <a:spcAft>
+                <a:spcPts val="600"/>
+              </a:spcAft>
+            </a:pPr>
+            <a:r>
+              <a:rPr sz="1100" b="0" i="0">
+                <a:solidFill>
+                  <a:srgbClr val="5A5A66"/>
+                </a:solidFill>
+                <a:latin typeface="Calibri"/>
+              </a:rPr>
+              <a:t>answers contain key facts</a:t>
+            </a:r>
+          </a:p>
+        </p:txBody>
+      </p:sp>
+      <p:sp>
+        <p:nvSpPr>
+          <p:cNvPr id="8" name="Rounded Rectangle 7"/>
+          <p:cNvSpPr/>
+          <p:nvPr/>
+        </p:nvSpPr>
+        <p:spPr>
+          <a:xfrm>
+            <a:off x="9006840" y="1554480"/>
+            <a:ext cx="2606040" cy="1737360"/>
+          </a:xfrm>
+          <a:prstGeom prst="roundRect">
+            <a:avLst/>
+          </a:prstGeom>
+          <a:solidFill>
+            <a:srgbClr val="F1EEFC"/>
+          </a:solidFill>
+          <a:ln>
+            <a:noFill/>
+          </a:ln>
+          <a:effectLst/>
+        </p:spPr>
+        <p:style>
+          <a:lnRef idx="1">
+            <a:schemeClr val="accent1"/>
+          </a:lnRef>
+          <a:fillRef idx="3">
+            <a:schemeClr val="accent1"/>
+          </a:fillRef>
+          <a:effectRef idx="2">
+            <a:schemeClr val="accent1"/>
+          </a:effectRef>
+          <a:fontRef idx="minor">
+            <a:schemeClr val="lt1"/>
+          </a:fontRef>
+        </p:style>
+        <p:txBody>
+          <a:bodyPr rtlCol="0" anchor="ctr" wrap="square" lIns="164592" rIns="164592" tIns="164592"/>
+          <a:lstStyle/>
+          <a:p>
+            <a:pPr algn="l">
+              <a:spcAft>
+                <a:spcPts val="200"/>
+              </a:spcAft>
+            </a:pPr>
+            <a:r>
+              <a:rPr sz="4000" b="1" i="0">
+                <a:solidFill>
+                  <a:srgbClr val="B06000"/>
+                </a:solidFill>
+                <a:latin typeface="Calibri"/>
+              </a:rPr>
+              <a:t>56</a:t>
+            </a:r>
+          </a:p>
+          <a:p>
+            <a:pPr algn="l">
+              <a:spcAft>
+                <a:spcPts val="200"/>
+              </a:spcAft>
+            </a:pPr>
+            <a:r>
+              <a:rPr sz="1400" b="1" i="0">
+                <a:solidFill>
+                  <a:srgbClr val="1E1E28"/>
+                </a:solidFill>
+                <a:latin typeface="Calibri"/>
+              </a:rPr>
+              <a:t>Iban chrF</a:t>
+            </a:r>
+          </a:p>
+          <a:p>
+            <a:pPr algn="l">
+              <a:spcAft>
+                <a:spcPts val="600"/>
+              </a:spcAft>
+            </a:pPr>
+            <a:r>
+              <a:rPr sz="1100" b="0" i="0">
+                <a:solidFill>
+                  <a:srgbClr val="5A5A66"/>
+                </a:solidFill>
+                <a:latin typeface="Calibri"/>
+              </a:rPr>
+              <a:t>decent; flywheel grows it</a:t>
             </a:r>
           </a:p>
         </p:txBody>
       </p:sp>
       <p:graphicFrame>
         <p:nvGraphicFramePr>
-          <p:cNvPr id="4" name="Table 3"/>
+          <p:cNvPr id="9" name="Chart 8"/>
           <p:cNvGraphicFramePr>
             <a:graphicFrameLocks noGrp="1"/>
           </p:cNvGraphicFramePr>
           <p:nvPr/>
         </p:nvGraphicFramePr>
         <p:xfrm>
-          <a:off x="640080" y="1737360"/>
-          <a:ext cx="10972800" cy="4023360"/>
+          <a:off x="640080" y="3520440"/>
+          <a:ext cx="5852160" cy="2468880"/>
         </p:xfrm>
         <a:graphic>
-          <a:graphicData uri="http://schemas.openxmlformats.org/drawingml/2006/table">
-            <a:tbl>
-              <a:tblPr firstRow="1" bandRow="1">
-                <a:tableStyleId>{5C22544A-7EE6-4342-B048-85BDC9FD1C3A}</a:tableStyleId>
-              </a:tblPr>
-              <a:tblGrid>
-                <a:gridCol w="3931920"/>
-                <a:gridCol w="1737360"/>
-                <a:gridCol w="5303520"/>
-              </a:tblGrid>
-              <a:tr h="502920">
-                <a:tc>
-                  <a:txBody>
-                    <a:bodyPr/>
-                    <a:lstStyle/>
-                    <a:p>
-                      <a:r>
-                        <a:rPr b="1" sz="1500">
-                          <a:solidFill>
-                            <a:srgbClr val="FFFFFF"/>
-                          </a:solidFill>
-                        </a:rPr>
-                        <a:t>Metric</a:t>
-                      </a:r>
-                    </a:p>
-                  </a:txBody>
-                  <a:tcPr>
-                    <a:solidFill>
-                      <a:srgbClr val="5B3FE0"/>
-                    </a:solidFill>
-                  </a:tcPr>
-                </a:tc>
-                <a:tc>
-                  <a:txBody>
-                    <a:bodyPr/>
-                    <a:lstStyle/>
-                    <a:p>
-                      <a:r>
-                        <a:rPr b="1" sz="1500">
-                          <a:solidFill>
-                            <a:srgbClr val="FFFFFF"/>
-                          </a:solidFill>
-                        </a:rPr>
-                        <a:t>Result</a:t>
-                      </a:r>
-                    </a:p>
-                  </a:txBody>
-                  <a:tcPr>
-                    <a:solidFill>
-                      <a:srgbClr val="5B3FE0"/>
-                    </a:solidFill>
-                  </a:tcPr>
-                </a:tc>
-                <a:tc>
-                  <a:txBody>
-                    <a:bodyPr/>
-                    <a:lstStyle/>
-                    <a:p>
-                      <a:r>
-                        <a:rPr b="1" sz="1500">
-                          <a:solidFill>
-                            <a:srgbClr val="FFFFFF"/>
-                          </a:solidFill>
-                        </a:rPr>
-                        <a:t>What it means</a:t>
-                      </a:r>
-                    </a:p>
-                  </a:txBody>
-                  <a:tcPr>
-                    <a:solidFill>
-                      <a:srgbClr val="5B3FE0"/>
-                    </a:solidFill>
-                  </a:tcPr>
-                </a:tc>
-              </a:tr>
-              <a:tr h="502920">
-                <a:tc>
-                  <a:txBody>
-                    <a:bodyPr/>
-                    <a:lstStyle/>
-                    <a:p>
-                      <a:r>
-                        <a:rPr sz="1300" b="0">
-                          <a:solidFill>
-                            <a:srgbClr val="202028"/>
-                          </a:solidFill>
-                        </a:rPr>
-                        <a:t>Retrieval recall@k</a:t>
-                      </a:r>
-                    </a:p>
-                  </a:txBody>
-                  <a:tcPr/>
-                </a:tc>
-                <a:tc>
-                  <a:txBody>
-                    <a:bodyPr/>
-                    <a:lstStyle/>
-                    <a:p>
-                      <a:r>
-                        <a:rPr sz="1300" b="1">
-                          <a:solidFill>
-                            <a:srgbClr val="1E8E3E"/>
-                          </a:solidFill>
-                        </a:rPr>
-                        <a:t>100%</a:t>
-                      </a:r>
-                    </a:p>
-                  </a:txBody>
-                  <a:tcPr/>
-                </a:tc>
-                <a:tc>
-                  <a:txBody>
-                    <a:bodyPr/>
-                    <a:lstStyle/>
-                    <a:p>
-                      <a:r>
-                        <a:rPr sz="1300" b="0">
-                          <a:solidFill>
-                            <a:srgbClr val="202028"/>
-                          </a:solidFill>
-                        </a:rPr>
-                        <a:t>Correct curriculum source always retrieved</a:t>
-                      </a:r>
-                    </a:p>
-                  </a:txBody>
-                  <a:tcPr/>
-                </a:tc>
-              </a:tr>
-              <a:tr h="502920">
-                <a:tc>
-                  <a:txBody>
-                    <a:bodyPr/>
-                    <a:lstStyle/>
-                    <a:p>
-                      <a:r>
-                        <a:rPr sz="1300" b="0">
-                          <a:solidFill>
-                            <a:srgbClr val="202028"/>
-                          </a:solidFill>
-                        </a:rPr>
-                        <a:t>Retrieval precision@k</a:t>
-                      </a:r>
-                    </a:p>
-                  </a:txBody>
-                  <a:tcPr/>
-                </a:tc>
-                <a:tc>
-                  <a:txBody>
-                    <a:bodyPr/>
-                    <a:lstStyle/>
-                    <a:p>
-                      <a:r>
-                        <a:rPr sz="1300" b="1">
-                          <a:solidFill>
-                            <a:srgbClr val="1E8E3E"/>
-                          </a:solidFill>
-                        </a:rPr>
-                        <a:t>79%</a:t>
-                      </a:r>
-                    </a:p>
-                  </a:txBody>
-                  <a:tcPr/>
-                </a:tc>
-                <a:tc>
-                  <a:txBody>
-                    <a:bodyPr/>
-                    <a:lstStyle/>
-                    <a:p>
-                      <a:r>
-                        <a:rPr sz="1300" b="0">
-                          <a:solidFill>
-                            <a:srgbClr val="202028"/>
-                          </a:solidFill>
-                        </a:rPr>
-                        <a:t>Chunks actually containing the answer's facts</a:t>
-                      </a:r>
-                    </a:p>
-                  </a:txBody>
-                  <a:tcPr/>
-                </a:tc>
-              </a:tr>
-              <a:tr h="502920">
-                <a:tc>
-                  <a:txBody>
-                    <a:bodyPr/>
-                    <a:lstStyle/>
-                    <a:p>
-                      <a:r>
-                        <a:rPr sz="1300" b="0">
-                          <a:solidFill>
-                            <a:srgbClr val="202028"/>
-                          </a:solidFill>
-                        </a:rPr>
-                        <a:t>Hallucination / false-grounding</a:t>
-                      </a:r>
-                    </a:p>
-                  </a:txBody>
-                  <a:tcPr/>
-                </a:tc>
-                <a:tc>
-                  <a:txBody>
-                    <a:bodyPr/>
-                    <a:lstStyle/>
-                    <a:p>
-                      <a:r>
-                        <a:rPr sz="1300" b="1">
-                          <a:solidFill>
-                            <a:srgbClr val="1E8E3E"/>
-                          </a:solidFill>
-                        </a:rPr>
-                        <a:t>0%</a:t>
-                      </a:r>
-                    </a:p>
-                  </a:txBody>
-                  <a:tcPr/>
-                </a:tc>
-                <a:tc>
-                  <a:txBody>
-                    <a:bodyPr/>
-                    <a:lstStyle/>
-                    <a:p>
-                      <a:r>
-                        <a:rPr sz="1300" b="0">
-                          <a:solidFill>
-                            <a:srgbClr val="202028"/>
-                          </a:solidFill>
-                        </a:rPr>
-                        <a:t>Off-curriculum never cited as grounded</a:t>
-                      </a:r>
-                    </a:p>
-                  </a:txBody>
-                  <a:tcPr/>
-                </a:tc>
-              </a:tr>
-              <a:tr h="502920">
-                <a:tc>
-                  <a:txBody>
-                    <a:bodyPr/>
-                    <a:lstStyle/>
-                    <a:p>
-                      <a:r>
-                        <a:rPr sz="1300" b="0">
-                          <a:solidFill>
-                            <a:srgbClr val="202028"/>
-                          </a:solidFill>
-                        </a:rPr>
-                        <a:t>Non-response (in-curriculum)</a:t>
-                      </a:r>
-                    </a:p>
-                  </a:txBody>
-                  <a:tcPr/>
-                </a:tc>
-                <a:tc>
-                  <a:txBody>
-                    <a:bodyPr/>
-                    <a:lstStyle/>
-                    <a:p>
-                      <a:r>
-                        <a:rPr sz="1300" b="1">
-                          <a:solidFill>
-                            <a:srgbClr val="1E8E3E"/>
-                          </a:solidFill>
-                        </a:rPr>
-                        <a:t>0%</a:t>
-                      </a:r>
-                    </a:p>
-                  </a:txBody>
-                  <a:tcPr/>
-                </a:tc>
-                <a:tc>
-                  <a:txBody>
-                    <a:bodyPr/>
-                    <a:lstStyle/>
-                    <a:p>
-                      <a:r>
-                        <a:rPr sz="1300" b="0">
-                          <a:solidFill>
-                            <a:srgbClr val="202028"/>
-                          </a:solidFill>
-                        </a:rPr>
-                        <a:t>No legitimate question left unanswered</a:t>
-                      </a:r>
-                    </a:p>
-                  </a:txBody>
-                  <a:tcPr/>
-                </a:tc>
-              </a:tr>
-              <a:tr h="502920">
-                <a:tc>
-                  <a:txBody>
-                    <a:bodyPr/>
-                    <a:lstStyle/>
-                    <a:p>
-                      <a:r>
-                        <a:rPr sz="1300" b="0">
-                          <a:solidFill>
-                            <a:srgbClr val="202028"/>
-                          </a:solidFill>
-                        </a:rPr>
-                        <a:t>Concept coverage</a:t>
-                      </a:r>
-                    </a:p>
-                  </a:txBody>
-                  <a:tcPr/>
-                </a:tc>
-                <a:tc>
-                  <a:txBody>
-                    <a:bodyPr/>
-                    <a:lstStyle/>
-                    <a:p>
-                      <a:r>
-                        <a:rPr sz="1300" b="1">
-                          <a:solidFill>
-                            <a:srgbClr val="1E8E3E"/>
-                          </a:solidFill>
-                        </a:rPr>
-                        <a:t>~97%</a:t>
-                      </a:r>
-                    </a:p>
-                  </a:txBody>
-                  <a:tcPr/>
-                </a:tc>
-                <a:tc>
-                  <a:txBody>
-                    <a:bodyPr/>
-                    <a:lstStyle/>
-                    <a:p>
-                      <a:r>
-                        <a:rPr sz="1300" b="0">
-                          <a:solidFill>
-                            <a:srgbClr val="202028"/>
-                          </a:solidFill>
-                        </a:rPr>
-                        <a:t>Answers contain the required key facts</a:t>
-                      </a:r>
-                    </a:p>
-                  </a:txBody>
-                  <a:tcPr/>
-                </a:tc>
-              </a:tr>
-              <a:tr h="502920">
-                <a:tc>
-                  <a:txBody>
-                    <a:bodyPr/>
-                    <a:lstStyle/>
-                    <a:p>
-                      <a:r>
-                        <a:rPr sz="1300" b="0">
-                          <a:solidFill>
-                            <a:srgbClr val="202028"/>
-                          </a:solidFill>
-                        </a:rPr>
-                        <a:t>Iban translation (chrF)</a:t>
-                      </a:r>
-                    </a:p>
-                  </a:txBody>
-                  <a:tcPr/>
-                </a:tc>
-                <a:tc>
-                  <a:txBody>
-                    <a:bodyPr/>
-                    <a:lstStyle/>
-                    <a:p>
-                      <a:r>
-                        <a:rPr sz="1300" b="1">
-                          <a:solidFill>
-                            <a:srgbClr val="1E8E3E"/>
-                          </a:solidFill>
-                        </a:rPr>
-                        <a:t>56</a:t>
-                      </a:r>
-                    </a:p>
-                  </a:txBody>
-                  <a:tcPr/>
-                </a:tc>
-                <a:tc>
-                  <a:txBody>
-                    <a:bodyPr/>
-                    <a:lstStyle/>
-                    <a:p>
-                      <a:r>
-                        <a:rPr sz="1300" b="0">
-                          <a:solidFill>
-                            <a:srgbClr val="202028"/>
-                          </a:solidFill>
-                        </a:rPr>
-                        <a:t>Decent for covered vocabulary; flywheel grows it</a:t>
-                      </a:r>
-                    </a:p>
-                  </a:txBody>
-                  <a:tcPr/>
-                </a:tc>
-              </a:tr>
-              <a:tr h="502920">
-                <a:tc>
-                  <a:txBody>
-                    <a:bodyPr/>
-                    <a:lstStyle/>
-                    <a:p>
-                      <a:r>
-                        <a:rPr sz="1300" b="0">
-                          <a:solidFill>
-                            <a:srgbClr val="202028"/>
-                          </a:solidFill>
-                        </a:rPr>
-                        <a:t>Load test (dev node)</a:t>
-                      </a:r>
-                    </a:p>
-                  </a:txBody>
-                  <a:tcPr/>
-                </a:tc>
-                <a:tc>
-                  <a:txBody>
-                    <a:bodyPr/>
-                    <a:lstStyle/>
-                    <a:p>
-                      <a:r>
-                        <a:rPr sz="1300" b="1">
-                          <a:solidFill>
-                            <a:srgbClr val="1E8E3E"/>
-                          </a:solidFill>
-                        </a:rPr>
-                        <a:t>0 errors</a:t>
-                      </a:r>
-                    </a:p>
-                  </a:txBody>
-                  <a:tcPr/>
-                </a:tc>
-                <a:tc>
-                  <a:txBody>
-                    <a:bodyPr/>
-                    <a:lstStyle/>
-                    <a:p>
-                      <a:r>
-                        <a:rPr sz="1300" b="0">
-                          <a:solidFill>
-                            <a:srgbClr val="202028"/>
-                          </a:solidFill>
-                        </a:rPr>
-                        <a:t>Admission queue holds; throughput ~11 req/min</a:t>
-                      </a:r>
-                    </a:p>
-                  </a:txBody>
-                  <a:tcPr/>
-                </a:tc>
-              </a:tr>
-            </a:tbl>
+          <a:graphicData uri="http://schemas.openxmlformats.org/drawingml/2006/chart">
+            <c:chart xmlns:c="http://schemas.openxmlformats.org/drawingml/2006/chart" r:id="rId2"/>
           </a:graphicData>
         </a:graphic>
       </p:graphicFrame>
       <p:sp>
         <p:nvSpPr>
-          <p:cNvPr id="5" name="TextBox 4"/>
+          <p:cNvPr id="10" name="TextBox 9"/>
           <p:cNvSpPr txBox="1"/>
           <p:nvPr/>
         </p:nvSpPr>
         <p:spPr>
           <a:xfrm>
-            <a:off x="640080" y="5897880"/>
-            <a:ext cx="10972800" cy="731520"/>
+            <a:off x="6766560" y="3611880"/>
+            <a:ext cx="4937760" cy="2377440"/>
           </a:xfrm>
           <a:prstGeom prst="rect">
             <a:avLst/>
@@ -4008,20 +5427,56 @@
           <a:noFill/>
         </p:spPr>
         <p:txBody>
-          <a:bodyPr wrap="square">
+          <a:bodyPr wrap="square" anchor="t">
             <a:spAutoFit/>
           </a:bodyPr>
           <a:lstStyle/>
           <a:p>
-            <a:pPr algn="l"/>
-            <a:r>
-              <a:rPr sz="1200" b="0" i="1">
-                <a:solidFill>
-                  <a:srgbClr val="555560"/>
-                </a:solidFill>
-                <a:latin typeface="Calibri"/>
-              </a:rPr>
-              <a:t>Honest note: we report concept coverage, not a single automated "accuracy %" — small LLM judges scored the same answers 3.4–97%, so answer correctness is being validated by human raters. On-Pi benchmarking is the next step.</a:t>
+            <a:pPr algn="l">
+              <a:spcAft>
+                <a:spcPts val="500"/>
+              </a:spcAft>
+            </a:pPr>
+            <a:r>
+              <a:rPr sz="1400" b="1" i="0">
+                <a:solidFill>
+                  <a:srgbClr val="B06000"/>
+                </a:solidFill>
+                <a:latin typeface="Calibri"/>
+              </a:rPr>
+              <a:t>Honest caveat</a:t>
+            </a:r>
+          </a:p>
+          <a:p>
+            <a:pPr algn="l">
+              <a:spcAft>
+                <a:spcPts val="800"/>
+              </a:spcAft>
+            </a:pPr>
+            <a:r>
+              <a:rPr sz="1300" b="0" i="0">
+                <a:solidFill>
+                  <a:srgbClr val="1E1E28"/>
+                </a:solidFill>
+                <a:latin typeface="Calibri"/>
+              </a:rPr>
+              <a:t>We report concept coverage, not a single automated “accuracy %”: small LLM judges scored the same answers 3.4–97%, so answer correctness is being validated by human raters.</a:t>
+            </a:r>
+          </a:p>
+          <a:p>
+            <a:pPr algn="l">
+              <a:spcAft>
+                <a:spcPts val="600"/>
+              </a:spcAft>
+            </a:pPr>
+            <a:r>
+              <a:rPr sz="1300" b="0" i="0">
+                <a:solidFill>
+                  <a:srgbClr val="5A5A66"/>
+                </a:solidFill>
+                <a:latin typeface="Calibri"/>
+              </a:rPr>
+              <a:t>Load test (dev node): 0 errors under the admission queue; throughput plateaus at the single-stream SLM rate. On-Pi benchmarking is the next step.</a:t>
             </a:r>
           </a:p>
         </p:txBody>
@@ -4061,7 +5516,7 @@
         <p:spPr>
           <a:xfrm>
             <a:off x="0" y="0"/>
-            <a:ext cx="201168" cy="6858000"/>
+            <a:ext cx="164592" cy="6858000"/>
           </a:xfrm>
           <a:prstGeom prst="rect">
             <a:avLst/>
@@ -4072,6 +5527,7 @@
           <a:ln>
             <a:noFill/>
           </a:ln>
+          <a:effectLst/>
         </p:spPr>
         <p:style>
           <a:lnRef idx="1">
@@ -4103,8 +5559,8 @@
         </p:nvSpPr>
         <p:spPr>
           <a:xfrm>
-            <a:off x="548640" y="411480"/>
-            <a:ext cx="11155680" cy="914400"/>
+            <a:off x="548640" y="365760"/>
+            <a:ext cx="11338560" cy="1005840"/>
           </a:xfrm>
           <a:prstGeom prst="rect">
             <a:avLst/>
@@ -4112,32 +5568,40 @@
           <a:noFill/>
         </p:spPr>
         <p:txBody>
-          <a:bodyPr wrap="square">
+          <a:bodyPr wrap="square" anchor="t">
             <a:spAutoFit/>
           </a:bodyPr>
           <a:lstStyle/>
           <a:p>
-            <a:pPr algn="l"/>
+            <a:pPr algn="l">
+              <a:spcAft>
+                <a:spcPts val="200"/>
+              </a:spcAft>
+            </a:pPr>
+            <a:r>
+              <a:rPr sz="1300" b="1" i="0">
+                <a:solidFill>
+                  <a:srgbClr val="5B3FE0"/>
+                </a:solidFill>
+                <a:latin typeface="Calibri"/>
+              </a:rPr>
+              <a:t>SCALABILITY ROADMAP</a:t>
+            </a:r>
+          </a:p>
+          <a:p>
+            <a:pPr algn="l">
+              <a:spcAft>
+                <a:spcPts val="600"/>
+              </a:spcAft>
+            </a:pPr>
             <a:r>
               <a:rPr sz="3000" b="1" i="0">
                 <a:solidFill>
-                  <a:srgbClr val="5B3FE0"/>
-                </a:solidFill>
-                <a:latin typeface="Calibri"/>
-              </a:rPr>
-              <a:t>Scalability Roadmap</a:t>
-            </a:r>
-          </a:p>
-          <a:p>
-            <a:pPr algn="l"/>
-            <a:r>
-              <a:rPr sz="1500" b="0" i="1">
-                <a:solidFill>
-                  <a:srgbClr val="555560"/>
-                </a:solidFill>
-                <a:latin typeface="Calibri"/>
-              </a:rPr>
-              <a:t>From one school to the ASEAN region</a:t>
+                  <a:srgbClr val="1E1E28"/>
+                </a:solidFill>
+                <a:latin typeface="Calibri"/>
+              </a:rPr>
+              <a:t>From one school to the region</a:t>
             </a:r>
           </a:p>
         </p:txBody>
@@ -4150,8 +5614,8 @@
         </p:nvSpPr>
         <p:spPr>
           <a:xfrm>
-            <a:off x="640080" y="1554480"/>
-            <a:ext cx="10972800" cy="4846320"/>
+            <a:off x="548640" y="6419088"/>
+            <a:ext cx="11064240" cy="365760"/>
           </a:xfrm>
           <a:prstGeom prst="rect">
             <a:avLst/>
@@ -4159,88 +5623,623 @@
           <a:noFill/>
         </p:spPr>
         <p:txBody>
-          <a:bodyPr wrap="square">
+          <a:bodyPr wrap="square" anchor="t">
             <a:spAutoFit/>
           </a:bodyPr>
           <a:lstStyle/>
           <a:p>
             <a:pPr algn="l">
               <a:spcAft>
-                <a:spcPts val="800"/>
-              </a:spcAft>
-            </a:pPr>
-            <a:r>
-              <a:rPr sz="1900" b="0" i="0">
-                <a:solidFill>
-                  <a:srgbClr val="202028"/>
-                </a:solidFill>
-                <a:latin typeface="Calibri"/>
-              </a:rPr>
-              <a:t>•  One hub → one school: ~50 connected students, admission-controlled (measured, 0 errors)</a:t>
-            </a:r>
-          </a:p>
-          <a:p>
-            <a:pPr algn="l">
-              <a:spcAft>
-                <a:spcPts val="800"/>
-              </a:spcAft>
-            </a:pPr>
-            <a:r>
-              <a:rPr sz="1900" b="0" i="0">
-                <a:solidFill>
-                  <a:srgbClr val="202028"/>
-                </a:solidFill>
-                <a:latin typeface="Calibri"/>
-              </a:rPr>
-              <a:t>•  Two-node split (inference + application) for higher concurrency on low-memory Pis</a:t>
-            </a:r>
-          </a:p>
-          <a:p>
-            <a:pPr algn="l">
-              <a:spcAft>
-                <a:spcPts val="800"/>
-              </a:spcAft>
-            </a:pPr>
-            <a:r>
-              <a:rPr sz="1900" b="0" i="0">
-                <a:solidFill>
-                  <a:srgbClr val="202028"/>
-                </a:solidFill>
-                <a:latin typeface="Calibri"/>
-              </a:rPr>
-              <a:t>•  Decentralized, versioned content manifest → ministries, NGOs, schools publish independently</a:t>
-            </a:r>
-          </a:p>
-          <a:p>
-            <a:pPr algn="l">
-              <a:spcAft>
-                <a:spcPts val="800"/>
-              </a:spcAft>
-            </a:pPr>
-            <a:r>
-              <a:rPr sz="1900" b="0" i="0">
-                <a:solidFill>
-                  <a:srgbClr val="202028"/>
-                </a:solidFill>
-                <a:latin typeface="Calibri"/>
-              </a:rPr>
-              <a:t>•  Encrypted USB sneakernet sync → update &amp; scale with no internet</a:t>
-            </a:r>
-          </a:p>
-          <a:p>
-            <a:pPr algn="l">
-              <a:spcAft>
-                <a:spcPts val="800"/>
-              </a:spcAft>
-            </a:pPr>
-            <a:r>
-              <a:rPr sz="1900" b="0" i="0">
-                <a:solidFill>
-                  <a:srgbClr val="202028"/>
-                </a:solidFill>
-                <a:latin typeface="Calibri"/>
-              </a:rPr>
-              <a:t>•  One region → ASEAN-wide via per-hub language configuration</a:t>
+                <a:spcPts val="600"/>
+              </a:spcAft>
+            </a:pPr>
+            <a:r>
+              <a:rPr sz="1000" b="0" i="0">
+                <a:solidFill>
+                  <a:srgbClr val="5A5A66"/>
+                </a:solidFill>
+                <a:latin typeface="Calibri"/>
+              </a:rPr>
+              <a:t>Edge — AI Education at the Last Mile   ·   UM-Gunners</a:t>
+            </a:r>
+          </a:p>
+        </p:txBody>
+      </p:sp>
+      <p:sp>
+        <p:nvSpPr>
+          <p:cNvPr id="5" name="Rounded Rectangle 4"/>
+          <p:cNvSpPr/>
+          <p:nvPr/>
+        </p:nvSpPr>
+        <p:spPr>
+          <a:xfrm>
+            <a:off x="640080" y="2011680"/>
+            <a:ext cx="2468880" cy="1737360"/>
+          </a:xfrm>
+          <a:prstGeom prst="roundRect">
+            <a:avLst/>
+          </a:prstGeom>
+          <a:solidFill>
+            <a:srgbClr val="F1EEFC"/>
+          </a:solidFill>
+          <a:ln>
+            <a:noFill/>
+          </a:ln>
+          <a:effectLst/>
+        </p:spPr>
+        <p:style>
+          <a:lnRef idx="1">
+            <a:schemeClr val="accent1"/>
+          </a:lnRef>
+          <a:fillRef idx="3">
+            <a:schemeClr val="accent1"/>
+          </a:fillRef>
+          <a:effectRef idx="2">
+            <a:schemeClr val="accent1"/>
+          </a:effectRef>
+          <a:fontRef idx="minor">
+            <a:schemeClr val="lt1"/>
+          </a:fontRef>
+        </p:style>
+        <p:txBody>
+          <a:bodyPr rtlCol="0" anchor="ctr"/>
+          <a:lstStyle/>
+          <a:p>
+            <a:pPr algn="ctr"/>
+          </a:p>
+        </p:txBody>
+      </p:sp>
+      <p:sp>
+        <p:nvSpPr>
+          <p:cNvPr id="6" name="TextBox 5"/>
+          <p:cNvSpPr txBox="1"/>
+          <p:nvPr/>
+        </p:nvSpPr>
+        <p:spPr>
+          <a:xfrm>
+            <a:off x="640080" y="2194560"/>
+            <a:ext cx="2468880" cy="1463040"/>
+          </a:xfrm>
+          <a:prstGeom prst="rect">
+            <a:avLst/>
+          </a:prstGeom>
+          <a:noFill/>
+        </p:spPr>
+        <p:txBody>
+          <a:bodyPr wrap="square" anchor="ctr">
+            <a:spAutoFit/>
+          </a:bodyPr>
+          <a:lstStyle/>
+          <a:p>
+            <a:pPr algn="ctr">
+              <a:spcAft>
+                <a:spcPts val="400"/>
+              </a:spcAft>
+            </a:pPr>
+            <a:r>
+              <a:rPr sz="2000" b="1" i="0">
+                <a:solidFill>
+                  <a:srgbClr val="5B3FE0"/>
+                </a:solidFill>
+                <a:latin typeface="Calibri"/>
+              </a:rPr>
+              <a:t>1 Hub</a:t>
+            </a:r>
+          </a:p>
+          <a:p>
+            <a:pPr algn="ctr">
+              <a:spcAft>
+                <a:spcPts val="600"/>
+              </a:spcAft>
+            </a:pPr>
+            <a:r>
+              <a:rPr sz="1200" b="0" i="0">
+                <a:solidFill>
+                  <a:srgbClr val="1E1E28"/>
+                </a:solidFill>
+                <a:latin typeface="Calibri"/>
+              </a:rPr>
+              <a:t>~50 connected students,</a:t>
+            </a:r>
+            <a:br/>
+            <a:r>
+              <a:t>admission-controlled</a:t>
+            </a:r>
+          </a:p>
+        </p:txBody>
+      </p:sp>
+      <p:sp>
+        <p:nvSpPr>
+          <p:cNvPr id="7" name="Right Arrow 6"/>
+          <p:cNvSpPr/>
+          <p:nvPr/>
+        </p:nvSpPr>
+        <p:spPr>
+          <a:xfrm>
+            <a:off x="3063240" y="2651760"/>
+            <a:ext cx="411480" cy="457200"/>
+          </a:xfrm>
+          <a:prstGeom prst="rightArrow">
+            <a:avLst/>
+          </a:prstGeom>
+          <a:solidFill>
+            <a:srgbClr val="5B3FE0"/>
+          </a:solidFill>
+          <a:ln>
+            <a:noFill/>
+          </a:ln>
+          <a:effectLst/>
+        </p:spPr>
+        <p:style>
+          <a:lnRef idx="1">
+            <a:schemeClr val="accent1"/>
+          </a:lnRef>
+          <a:fillRef idx="3">
+            <a:schemeClr val="accent1"/>
+          </a:fillRef>
+          <a:effectRef idx="2">
+            <a:schemeClr val="accent1"/>
+          </a:effectRef>
+          <a:fontRef idx="minor">
+            <a:schemeClr val="lt1"/>
+          </a:fontRef>
+        </p:style>
+        <p:txBody>
+          <a:bodyPr rtlCol="0" anchor="ctr"/>
+          <a:lstStyle/>
+          <a:p>
+            <a:pPr algn="ctr"/>
+          </a:p>
+        </p:txBody>
+      </p:sp>
+      <p:sp>
+        <p:nvSpPr>
+          <p:cNvPr id="8" name="Rounded Rectangle 7"/>
+          <p:cNvSpPr/>
+          <p:nvPr/>
+        </p:nvSpPr>
+        <p:spPr>
+          <a:xfrm>
+            <a:off x="3520440" y="2011680"/>
+            <a:ext cx="2468880" cy="1737360"/>
+          </a:xfrm>
+          <a:prstGeom prst="roundRect">
+            <a:avLst/>
+          </a:prstGeom>
+          <a:solidFill>
+            <a:srgbClr val="F1EEFC"/>
+          </a:solidFill>
+          <a:ln>
+            <a:noFill/>
+          </a:ln>
+          <a:effectLst/>
+        </p:spPr>
+        <p:style>
+          <a:lnRef idx="1">
+            <a:schemeClr val="accent1"/>
+          </a:lnRef>
+          <a:fillRef idx="3">
+            <a:schemeClr val="accent1"/>
+          </a:fillRef>
+          <a:effectRef idx="2">
+            <a:schemeClr val="accent1"/>
+          </a:effectRef>
+          <a:fontRef idx="minor">
+            <a:schemeClr val="lt1"/>
+          </a:fontRef>
+        </p:style>
+        <p:txBody>
+          <a:bodyPr rtlCol="0" anchor="ctr"/>
+          <a:lstStyle/>
+          <a:p>
+            <a:pPr algn="ctr"/>
+          </a:p>
+        </p:txBody>
+      </p:sp>
+      <p:sp>
+        <p:nvSpPr>
+          <p:cNvPr id="9" name="TextBox 8"/>
+          <p:cNvSpPr txBox="1"/>
+          <p:nvPr/>
+        </p:nvSpPr>
+        <p:spPr>
+          <a:xfrm>
+            <a:off x="3520440" y="2194560"/>
+            <a:ext cx="2468880" cy="1463040"/>
+          </a:xfrm>
+          <a:prstGeom prst="rect">
+            <a:avLst/>
+          </a:prstGeom>
+          <a:noFill/>
+        </p:spPr>
+        <p:txBody>
+          <a:bodyPr wrap="square" anchor="ctr">
+            <a:spAutoFit/>
+          </a:bodyPr>
+          <a:lstStyle/>
+          <a:p>
+            <a:pPr algn="ctr">
+              <a:spcAft>
+                <a:spcPts val="400"/>
+              </a:spcAft>
+            </a:pPr>
+            <a:r>
+              <a:rPr sz="2000" b="1" i="0">
+                <a:solidFill>
+                  <a:srgbClr val="5B3FE0"/>
+                </a:solidFill>
+                <a:latin typeface="Calibri"/>
+              </a:rPr>
+              <a:t>1 School</a:t>
+            </a:r>
+          </a:p>
+          <a:p>
+            <a:pPr algn="ctr">
+              <a:spcAft>
+                <a:spcPts val="600"/>
+              </a:spcAft>
+            </a:pPr>
+            <a:r>
+              <a:rPr sz="1200" b="0" i="0">
+                <a:solidFill>
+                  <a:srgbClr val="1E1E28"/>
+                </a:solidFill>
+                <a:latin typeface="Calibri"/>
+              </a:rPr>
+              <a:t>two-node split for</a:t>
+            </a:r>
+            <a:br/>
+            <a:r>
+              <a:t>higher concurrency</a:t>
+            </a:r>
+          </a:p>
+        </p:txBody>
+      </p:sp>
+      <p:sp>
+        <p:nvSpPr>
+          <p:cNvPr id="10" name="Right Arrow 9"/>
+          <p:cNvSpPr/>
+          <p:nvPr/>
+        </p:nvSpPr>
+        <p:spPr>
+          <a:xfrm>
+            <a:off x="5943600" y="2651760"/>
+            <a:ext cx="411480" cy="457200"/>
+          </a:xfrm>
+          <a:prstGeom prst="rightArrow">
+            <a:avLst/>
+          </a:prstGeom>
+          <a:solidFill>
+            <a:srgbClr val="5B3FE0"/>
+          </a:solidFill>
+          <a:ln>
+            <a:noFill/>
+          </a:ln>
+          <a:effectLst/>
+        </p:spPr>
+        <p:style>
+          <a:lnRef idx="1">
+            <a:schemeClr val="accent1"/>
+          </a:lnRef>
+          <a:fillRef idx="3">
+            <a:schemeClr val="accent1"/>
+          </a:fillRef>
+          <a:effectRef idx="2">
+            <a:schemeClr val="accent1"/>
+          </a:effectRef>
+          <a:fontRef idx="minor">
+            <a:schemeClr val="lt1"/>
+          </a:fontRef>
+        </p:style>
+        <p:txBody>
+          <a:bodyPr rtlCol="0" anchor="ctr"/>
+          <a:lstStyle/>
+          <a:p>
+            <a:pPr algn="ctr"/>
+          </a:p>
+        </p:txBody>
+      </p:sp>
+      <p:sp>
+        <p:nvSpPr>
+          <p:cNvPr id="11" name="Rounded Rectangle 10"/>
+          <p:cNvSpPr/>
+          <p:nvPr/>
+        </p:nvSpPr>
+        <p:spPr>
+          <a:xfrm>
+            <a:off x="6400800" y="2011680"/>
+            <a:ext cx="2468880" cy="1737360"/>
+          </a:xfrm>
+          <a:prstGeom prst="roundRect">
+            <a:avLst/>
+          </a:prstGeom>
+          <a:solidFill>
+            <a:srgbClr val="F1EEFC"/>
+          </a:solidFill>
+          <a:ln>
+            <a:noFill/>
+          </a:ln>
+          <a:effectLst/>
+        </p:spPr>
+        <p:style>
+          <a:lnRef idx="1">
+            <a:schemeClr val="accent1"/>
+          </a:lnRef>
+          <a:fillRef idx="3">
+            <a:schemeClr val="accent1"/>
+          </a:fillRef>
+          <a:effectRef idx="2">
+            <a:schemeClr val="accent1"/>
+          </a:effectRef>
+          <a:fontRef idx="minor">
+            <a:schemeClr val="lt1"/>
+          </a:fontRef>
+        </p:style>
+        <p:txBody>
+          <a:bodyPr rtlCol="0" anchor="ctr"/>
+          <a:lstStyle/>
+          <a:p>
+            <a:pPr algn="ctr"/>
+          </a:p>
+        </p:txBody>
+      </p:sp>
+      <p:sp>
+        <p:nvSpPr>
+          <p:cNvPr id="12" name="TextBox 11"/>
+          <p:cNvSpPr txBox="1"/>
+          <p:nvPr/>
+        </p:nvSpPr>
+        <p:spPr>
+          <a:xfrm>
+            <a:off x="6400800" y="2194560"/>
+            <a:ext cx="2468880" cy="1463040"/>
+          </a:xfrm>
+          <a:prstGeom prst="rect">
+            <a:avLst/>
+          </a:prstGeom>
+          <a:noFill/>
+        </p:spPr>
+        <p:txBody>
+          <a:bodyPr wrap="square" anchor="ctr">
+            <a:spAutoFit/>
+          </a:bodyPr>
+          <a:lstStyle/>
+          <a:p>
+            <a:pPr algn="ctr">
+              <a:spcAft>
+                <a:spcPts val="400"/>
+              </a:spcAft>
+            </a:pPr>
+            <a:r>
+              <a:rPr sz="2000" b="1" i="0">
+                <a:solidFill>
+                  <a:srgbClr val="5B3FE0"/>
+                </a:solidFill>
+                <a:latin typeface="Calibri"/>
+              </a:rPr>
+              <a:t>Many Schools</a:t>
+            </a:r>
+          </a:p>
+          <a:p>
+            <a:pPr algn="ctr">
+              <a:spcAft>
+                <a:spcPts val="600"/>
+              </a:spcAft>
+            </a:pPr>
+            <a:r>
+              <a:rPr sz="1200" b="0" i="0">
+                <a:solidFill>
+                  <a:srgbClr val="1E1E28"/>
+                </a:solidFill>
+                <a:latin typeface="Calibri"/>
+              </a:rPr>
+              <a:t>decentralised content</a:t>
+            </a:r>
+            <a:br/>
+            <a:r>
+              <a:t>manifest + USB sync</a:t>
+            </a:r>
+          </a:p>
+        </p:txBody>
+      </p:sp>
+      <p:sp>
+        <p:nvSpPr>
+          <p:cNvPr id="13" name="Right Arrow 12"/>
+          <p:cNvSpPr/>
+          <p:nvPr/>
+        </p:nvSpPr>
+        <p:spPr>
+          <a:xfrm>
+            <a:off x="8823960" y="2651760"/>
+            <a:ext cx="411480" cy="457200"/>
+          </a:xfrm>
+          <a:prstGeom prst="rightArrow">
+            <a:avLst/>
+          </a:prstGeom>
+          <a:solidFill>
+            <a:srgbClr val="5B3FE0"/>
+          </a:solidFill>
+          <a:ln>
+            <a:noFill/>
+          </a:ln>
+          <a:effectLst/>
+        </p:spPr>
+        <p:style>
+          <a:lnRef idx="1">
+            <a:schemeClr val="accent1"/>
+          </a:lnRef>
+          <a:fillRef idx="3">
+            <a:schemeClr val="accent1"/>
+          </a:fillRef>
+          <a:effectRef idx="2">
+            <a:schemeClr val="accent1"/>
+          </a:effectRef>
+          <a:fontRef idx="minor">
+            <a:schemeClr val="lt1"/>
+          </a:fontRef>
+        </p:style>
+        <p:txBody>
+          <a:bodyPr rtlCol="0" anchor="ctr"/>
+          <a:lstStyle/>
+          <a:p>
+            <a:pPr algn="ctr"/>
+          </a:p>
+        </p:txBody>
+      </p:sp>
+      <p:sp>
+        <p:nvSpPr>
+          <p:cNvPr id="14" name="Rounded Rectangle 13"/>
+          <p:cNvSpPr/>
+          <p:nvPr/>
+        </p:nvSpPr>
+        <p:spPr>
+          <a:xfrm>
+            <a:off x="9281160" y="2011680"/>
+            <a:ext cx="2468880" cy="1737360"/>
+          </a:xfrm>
+          <a:prstGeom prst="roundRect">
+            <a:avLst/>
+          </a:prstGeom>
+          <a:solidFill>
+            <a:srgbClr val="F1EEFC"/>
+          </a:solidFill>
+          <a:ln>
+            <a:noFill/>
+          </a:ln>
+          <a:effectLst/>
+        </p:spPr>
+        <p:style>
+          <a:lnRef idx="1">
+            <a:schemeClr val="accent1"/>
+          </a:lnRef>
+          <a:fillRef idx="3">
+            <a:schemeClr val="accent1"/>
+          </a:fillRef>
+          <a:effectRef idx="2">
+            <a:schemeClr val="accent1"/>
+          </a:effectRef>
+          <a:fontRef idx="minor">
+            <a:schemeClr val="lt1"/>
+          </a:fontRef>
+        </p:style>
+        <p:txBody>
+          <a:bodyPr rtlCol="0" anchor="ctr"/>
+          <a:lstStyle/>
+          <a:p>
+            <a:pPr algn="ctr"/>
+          </a:p>
+        </p:txBody>
+      </p:sp>
+      <p:sp>
+        <p:nvSpPr>
+          <p:cNvPr id="15" name="TextBox 14"/>
+          <p:cNvSpPr txBox="1"/>
+          <p:nvPr/>
+        </p:nvSpPr>
+        <p:spPr>
+          <a:xfrm>
+            <a:off x="9281160" y="2194560"/>
+            <a:ext cx="2468880" cy="1463040"/>
+          </a:xfrm>
+          <a:prstGeom prst="rect">
+            <a:avLst/>
+          </a:prstGeom>
+          <a:noFill/>
+        </p:spPr>
+        <p:txBody>
+          <a:bodyPr wrap="square" anchor="ctr">
+            <a:spAutoFit/>
+          </a:bodyPr>
+          <a:lstStyle/>
+          <a:p>
+            <a:pPr algn="ctr">
+              <a:spcAft>
+                <a:spcPts val="400"/>
+              </a:spcAft>
+            </a:pPr>
+            <a:r>
+              <a:rPr sz="2000" b="1" i="0">
+                <a:solidFill>
+                  <a:srgbClr val="5B3FE0"/>
+                </a:solidFill>
+                <a:latin typeface="Calibri"/>
+              </a:rPr>
+              <a:t>ASEAN-wide</a:t>
+            </a:r>
+          </a:p>
+          <a:p>
+            <a:pPr algn="ctr">
+              <a:spcAft>
+                <a:spcPts val="600"/>
+              </a:spcAft>
+            </a:pPr>
+            <a:r>
+              <a:rPr sz="1200" b="0" i="0">
+                <a:solidFill>
+                  <a:srgbClr val="1E1E28"/>
+                </a:solidFill>
+                <a:latin typeface="Calibri"/>
+              </a:rPr>
+              <a:t>per-hub language</a:t>
+            </a:r>
+            <a:br/>
+            <a:r>
+              <a:t>configuration</a:t>
+            </a:r>
+          </a:p>
+        </p:txBody>
+      </p:sp>
+      <p:sp>
+        <p:nvSpPr>
+          <p:cNvPr id="16" name="TextBox 15"/>
+          <p:cNvSpPr txBox="1"/>
+          <p:nvPr/>
+        </p:nvSpPr>
+        <p:spPr>
+          <a:xfrm>
+            <a:off x="640080" y="4206240"/>
+            <a:ext cx="10972800" cy="1645920"/>
+          </a:xfrm>
+          <a:prstGeom prst="rect">
+            <a:avLst/>
+          </a:prstGeom>
+          <a:noFill/>
+        </p:spPr>
+        <p:txBody>
+          <a:bodyPr wrap="square" anchor="t">
+            <a:spAutoFit/>
+          </a:bodyPr>
+          <a:lstStyle/>
+          <a:p>
+            <a:pPr algn="l">
+              <a:spcAft>
+                <a:spcPts val="900"/>
+              </a:spcAft>
+            </a:pPr>
+            <a:r>
+              <a:rPr sz="1500" b="0" i="0">
+                <a:solidFill>
+                  <a:srgbClr val="1E1E28"/>
+                </a:solidFill>
+                <a:latin typeface="Calibri"/>
+              </a:rPr>
+              <a:t>•  No internet needed to update or scale — encrypted USB sneakernet deploys content &amp; DB updates</a:t>
+            </a:r>
+          </a:p>
+          <a:p>
+            <a:pPr algn="l">
+              <a:spcAft>
+                <a:spcPts val="900"/>
+              </a:spcAft>
+            </a:pPr>
+            <a:r>
+              <a:rPr sz="1500" b="0" i="0">
+                <a:solidFill>
+                  <a:srgbClr val="1E1E28"/>
+                </a:solidFill>
+                <a:latin typeface="Calibri"/>
+              </a:rPr>
+              <a:t>•  Ministries, NGOs, schools and teachers publish curriculum independently (provenance-tracked)</a:t>
             </a:r>
           </a:p>
         </p:txBody>
@@ -4280,7 +6279,7 @@
         <p:spPr>
           <a:xfrm>
             <a:off x="0" y="0"/>
-            <a:ext cx="201168" cy="6858000"/>
+            <a:ext cx="164592" cy="6858000"/>
           </a:xfrm>
           <a:prstGeom prst="rect">
             <a:avLst/>
@@ -4291,6 +6290,7 @@
           <a:ln>
             <a:noFill/>
           </a:ln>
+          <a:effectLst/>
         </p:spPr>
         <p:style>
           <a:lnRef idx="1">
@@ -4322,8 +6322,8 @@
         </p:nvSpPr>
         <p:spPr>
           <a:xfrm>
-            <a:off x="548640" y="411480"/>
-            <a:ext cx="11155680" cy="914400"/>
+            <a:off x="548640" y="365760"/>
+            <a:ext cx="11338560" cy="1005840"/>
           </a:xfrm>
           <a:prstGeom prst="rect">
             <a:avLst/>
@@ -4331,32 +6331,40 @@
           <a:noFill/>
         </p:spPr>
         <p:txBody>
-          <a:bodyPr wrap="square">
+          <a:bodyPr wrap="square" anchor="t">
             <a:spAutoFit/>
           </a:bodyPr>
           <a:lstStyle/>
           <a:p>
-            <a:pPr algn="l"/>
+            <a:pPr algn="l">
+              <a:spcAft>
+                <a:spcPts val="200"/>
+              </a:spcAft>
+            </a:pPr>
+            <a:r>
+              <a:rPr sz="1300" b="1" i="0">
+                <a:solidFill>
+                  <a:srgbClr val="5B3FE0"/>
+                </a:solidFill>
+                <a:latin typeface="Calibri"/>
+              </a:rPr>
+              <a:t>IMPACT ASSESSMENT</a:t>
+            </a:r>
+          </a:p>
+          <a:p>
+            <a:pPr algn="l">
+              <a:spcAft>
+                <a:spcPts val="600"/>
+              </a:spcAft>
+            </a:pPr>
             <a:r>
               <a:rPr sz="3000" b="1" i="0">
                 <a:solidFill>
-                  <a:srgbClr val="5B3FE0"/>
-                </a:solidFill>
-                <a:latin typeface="Calibri"/>
-              </a:rPr>
-              <a:t>Impact Assessment</a:t>
-            </a:r>
-          </a:p>
-          <a:p>
-            <a:pPr algn="l"/>
-            <a:r>
-              <a:rPr sz="1500" b="0" i="1">
-                <a:solidFill>
-                  <a:srgbClr val="555560"/>
-                </a:solidFill>
-                <a:latin typeface="Calibri"/>
-              </a:rPr>
-              <a:t>Alignment with UN SDGs &amp; regional resilience</a:t>
+                  <a:srgbClr val="1E1E28"/>
+                </a:solidFill>
+                <a:latin typeface="Calibri"/>
+              </a:rPr>
+              <a:t>Aligned with the UN SDGs</a:t>
             </a:r>
           </a:p>
         </p:txBody>
@@ -4369,8 +6377,8 @@
         </p:nvSpPr>
         <p:spPr>
           <a:xfrm>
-            <a:off x="640080" y="1554480"/>
-            <a:ext cx="10972800" cy="4846320"/>
+            <a:off x="548640" y="6419088"/>
+            <a:ext cx="11064240" cy="365760"/>
           </a:xfrm>
           <a:prstGeom prst="rect">
             <a:avLst/>
@@ -4378,72 +6386,408 @@
           <a:noFill/>
         </p:spPr>
         <p:txBody>
-          <a:bodyPr wrap="square">
+          <a:bodyPr wrap="square" anchor="t">
             <a:spAutoFit/>
           </a:bodyPr>
           <a:lstStyle/>
           <a:p>
             <a:pPr algn="l">
               <a:spcAft>
-                <a:spcPts val="800"/>
-              </a:spcAft>
-            </a:pPr>
-            <a:r>
-              <a:rPr sz="1900" b="0" i="0">
-                <a:solidFill>
-                  <a:srgbClr val="202028"/>
-                </a:solidFill>
-                <a:latin typeface="Calibri"/>
-              </a:rPr>
-              <a:t>•  SDG 4 (Quality Education) — curriculum-grounded tutoring at the last mile</a:t>
-            </a:r>
-          </a:p>
-          <a:p>
-            <a:pPr algn="l">
-              <a:spcAft>
-                <a:spcPts val="800"/>
-              </a:spcAft>
-            </a:pPr>
-            <a:r>
-              <a:rPr sz="1900" b="0" i="0">
-                <a:solidFill>
-                  <a:srgbClr val="202028"/>
-                </a:solidFill>
-                <a:latin typeface="Calibri"/>
-              </a:rPr>
-              <a:t>•  SDG 10 (Reduced Inequalities) — mother-tongue access for underserved &amp; minority-language learners</a:t>
-            </a:r>
-          </a:p>
-          <a:p>
-            <a:pPr algn="l">
-              <a:spcAft>
-                <a:spcPts val="800"/>
-              </a:spcAft>
-            </a:pPr>
-            <a:r>
-              <a:rPr sz="1900" b="0" i="0">
-                <a:solidFill>
-                  <a:srgbClr val="202028"/>
-                </a:solidFill>
-                <a:latin typeface="Calibri"/>
-              </a:rPr>
-              <a:t>•  SDG 9 (Infrastructure &amp; Innovation) — resilient, off-grid education infrastructure</a:t>
-            </a:r>
-          </a:p>
-          <a:p>
-            <a:pPr algn="l">
-              <a:spcAft>
-                <a:spcPts val="800"/>
-              </a:spcAft>
-            </a:pPr>
-            <a:r>
-              <a:rPr sz="1900" b="0" i="0">
-                <a:solidFill>
-                  <a:srgbClr val="202028"/>
-                </a:solidFill>
-                <a:latin typeface="Calibri"/>
-              </a:rPr>
-              <a:t>•  Regional resilience: learning continuity off-grid and in crises; minority-language preservation</a:t>
+                <a:spcPts val="600"/>
+              </a:spcAft>
+            </a:pPr>
+            <a:r>
+              <a:rPr sz="1000" b="0" i="0">
+                <a:solidFill>
+                  <a:srgbClr val="5A5A66"/>
+                </a:solidFill>
+                <a:latin typeface="Calibri"/>
+              </a:rPr>
+              <a:t>Edge — AI Education at the Last Mile   ·   UM-Gunners</a:t>
+            </a:r>
+          </a:p>
+        </p:txBody>
+      </p:sp>
+      <p:sp>
+        <p:nvSpPr>
+          <p:cNvPr id="5" name="Rounded Rectangle 4"/>
+          <p:cNvSpPr/>
+          <p:nvPr/>
+        </p:nvSpPr>
+        <p:spPr>
+          <a:xfrm>
+            <a:off x="640080" y="1828800"/>
+            <a:ext cx="3520440" cy="2377440"/>
+          </a:xfrm>
+          <a:prstGeom prst="roundRect">
+            <a:avLst/>
+          </a:prstGeom>
+          <a:solidFill>
+            <a:srgbClr val="F1EEFC"/>
+          </a:solidFill>
+          <a:ln>
+            <a:noFill/>
+          </a:ln>
+          <a:effectLst/>
+        </p:spPr>
+        <p:style>
+          <a:lnRef idx="1">
+            <a:schemeClr val="accent1"/>
+          </a:lnRef>
+          <a:fillRef idx="3">
+            <a:schemeClr val="accent1"/>
+          </a:fillRef>
+          <a:effectRef idx="2">
+            <a:schemeClr val="accent1"/>
+          </a:effectRef>
+          <a:fontRef idx="minor">
+            <a:schemeClr val="lt1"/>
+          </a:fontRef>
+        </p:style>
+        <p:txBody>
+          <a:bodyPr rtlCol="0" anchor="ctr"/>
+          <a:lstStyle/>
+          <a:p>
+            <a:pPr algn="ctr"/>
+          </a:p>
+        </p:txBody>
+      </p:sp>
+      <p:sp>
+        <p:nvSpPr>
+          <p:cNvPr id="6" name="TextBox 5"/>
+          <p:cNvSpPr txBox="1"/>
+          <p:nvPr/>
+        </p:nvSpPr>
+        <p:spPr>
+          <a:xfrm>
+            <a:off x="868680" y="2057400"/>
+            <a:ext cx="3108960" cy="2011680"/>
+          </a:xfrm>
+          <a:prstGeom prst="rect">
+            <a:avLst/>
+          </a:prstGeom>
+          <a:noFill/>
+        </p:spPr>
+        <p:txBody>
+          <a:bodyPr wrap="square" anchor="t">
+            <a:spAutoFit/>
+          </a:bodyPr>
+          <a:lstStyle/>
+          <a:p>
+            <a:pPr algn="l">
+              <a:spcAft>
+                <a:spcPts val="200"/>
+              </a:spcAft>
+            </a:pPr>
+            <a:r>
+              <a:rPr sz="3000" b="1" i="0">
+                <a:solidFill>
+                  <a:srgbClr val="5B3FE0"/>
+                </a:solidFill>
+                <a:latin typeface="Calibri"/>
+              </a:rPr>
+              <a:t>SDG 4</a:t>
+            </a:r>
+          </a:p>
+          <a:p>
+            <a:pPr algn="l">
+              <a:spcAft>
+                <a:spcPts val="600"/>
+              </a:spcAft>
+            </a:pPr>
+            <a:r>
+              <a:rPr sz="1600" b="1" i="0">
+                <a:solidFill>
+                  <a:srgbClr val="1E1E28"/>
+                </a:solidFill>
+                <a:latin typeface="Calibri"/>
+              </a:rPr>
+              <a:t>Quality Education</a:t>
+            </a:r>
+          </a:p>
+          <a:p>
+            <a:pPr algn="l">
+              <a:spcAft>
+                <a:spcPts val="600"/>
+              </a:spcAft>
+            </a:pPr>
+            <a:r>
+              <a:rPr sz="1300" b="0" i="0">
+                <a:solidFill>
+                  <a:srgbClr val="5A5A66"/>
+                </a:solidFill>
+                <a:latin typeface="Calibri"/>
+              </a:rPr>
+              <a:t>curriculum-grounded tutoring at the last mile</a:t>
+            </a:r>
+          </a:p>
+        </p:txBody>
+      </p:sp>
+      <p:sp>
+        <p:nvSpPr>
+          <p:cNvPr id="7" name="Rounded Rectangle 6"/>
+          <p:cNvSpPr/>
+          <p:nvPr/>
+        </p:nvSpPr>
+        <p:spPr>
+          <a:xfrm>
+            <a:off x="4343400" y="1828800"/>
+            <a:ext cx="3520440" cy="2377440"/>
+          </a:xfrm>
+          <a:prstGeom prst="roundRect">
+            <a:avLst/>
+          </a:prstGeom>
+          <a:solidFill>
+            <a:srgbClr val="F1EEFC"/>
+          </a:solidFill>
+          <a:ln>
+            <a:noFill/>
+          </a:ln>
+          <a:effectLst/>
+        </p:spPr>
+        <p:style>
+          <a:lnRef idx="1">
+            <a:schemeClr val="accent1"/>
+          </a:lnRef>
+          <a:fillRef idx="3">
+            <a:schemeClr val="accent1"/>
+          </a:fillRef>
+          <a:effectRef idx="2">
+            <a:schemeClr val="accent1"/>
+          </a:effectRef>
+          <a:fontRef idx="minor">
+            <a:schemeClr val="lt1"/>
+          </a:fontRef>
+        </p:style>
+        <p:txBody>
+          <a:bodyPr rtlCol="0" anchor="ctr"/>
+          <a:lstStyle/>
+          <a:p>
+            <a:pPr algn="ctr"/>
+          </a:p>
+        </p:txBody>
+      </p:sp>
+      <p:sp>
+        <p:nvSpPr>
+          <p:cNvPr id="8" name="TextBox 7"/>
+          <p:cNvSpPr txBox="1"/>
+          <p:nvPr/>
+        </p:nvSpPr>
+        <p:spPr>
+          <a:xfrm>
+            <a:off x="4572000" y="2057400"/>
+            <a:ext cx="3108960" cy="2011680"/>
+          </a:xfrm>
+          <a:prstGeom prst="rect">
+            <a:avLst/>
+          </a:prstGeom>
+          <a:noFill/>
+        </p:spPr>
+        <p:txBody>
+          <a:bodyPr wrap="square" anchor="t">
+            <a:spAutoFit/>
+          </a:bodyPr>
+          <a:lstStyle/>
+          <a:p>
+            <a:pPr algn="l">
+              <a:spcAft>
+                <a:spcPts val="200"/>
+              </a:spcAft>
+            </a:pPr>
+            <a:r>
+              <a:rPr sz="3000" b="1" i="0">
+                <a:solidFill>
+                  <a:srgbClr val="0E809B"/>
+                </a:solidFill>
+                <a:latin typeface="Calibri"/>
+              </a:rPr>
+              <a:t>SDG 10</a:t>
+            </a:r>
+          </a:p>
+          <a:p>
+            <a:pPr algn="l">
+              <a:spcAft>
+                <a:spcPts val="600"/>
+              </a:spcAft>
+            </a:pPr>
+            <a:r>
+              <a:rPr sz="1600" b="1" i="0">
+                <a:solidFill>
+                  <a:srgbClr val="1E1E28"/>
+                </a:solidFill>
+                <a:latin typeface="Calibri"/>
+              </a:rPr>
+              <a:t>Reduced Inequalities</a:t>
+            </a:r>
+          </a:p>
+          <a:p>
+            <a:pPr algn="l">
+              <a:spcAft>
+                <a:spcPts val="600"/>
+              </a:spcAft>
+            </a:pPr>
+            <a:r>
+              <a:rPr sz="1300" b="0" i="0">
+                <a:solidFill>
+                  <a:srgbClr val="5A5A66"/>
+                </a:solidFill>
+                <a:latin typeface="Calibri"/>
+              </a:rPr>
+              <a:t>mother-tongue access for underserved learners</a:t>
+            </a:r>
+          </a:p>
+        </p:txBody>
+      </p:sp>
+      <p:sp>
+        <p:nvSpPr>
+          <p:cNvPr id="9" name="Rounded Rectangle 8"/>
+          <p:cNvSpPr/>
+          <p:nvPr/>
+        </p:nvSpPr>
+        <p:spPr>
+          <a:xfrm>
+            <a:off x="8046720" y="1828800"/>
+            <a:ext cx="3520440" cy="2377440"/>
+          </a:xfrm>
+          <a:prstGeom prst="roundRect">
+            <a:avLst/>
+          </a:prstGeom>
+          <a:solidFill>
+            <a:srgbClr val="F1EEFC"/>
+          </a:solidFill>
+          <a:ln>
+            <a:noFill/>
+          </a:ln>
+          <a:effectLst/>
+        </p:spPr>
+        <p:style>
+          <a:lnRef idx="1">
+            <a:schemeClr val="accent1"/>
+          </a:lnRef>
+          <a:fillRef idx="3">
+            <a:schemeClr val="accent1"/>
+          </a:fillRef>
+          <a:effectRef idx="2">
+            <a:schemeClr val="accent1"/>
+          </a:effectRef>
+          <a:fontRef idx="minor">
+            <a:schemeClr val="lt1"/>
+          </a:fontRef>
+        </p:style>
+        <p:txBody>
+          <a:bodyPr rtlCol="0" anchor="ctr"/>
+          <a:lstStyle/>
+          <a:p>
+            <a:pPr algn="ctr"/>
+          </a:p>
+        </p:txBody>
+      </p:sp>
+      <p:sp>
+        <p:nvSpPr>
+          <p:cNvPr id="10" name="TextBox 9"/>
+          <p:cNvSpPr txBox="1"/>
+          <p:nvPr/>
+        </p:nvSpPr>
+        <p:spPr>
+          <a:xfrm>
+            <a:off x="8275320" y="2057400"/>
+            <a:ext cx="3108960" cy="2011680"/>
+          </a:xfrm>
+          <a:prstGeom prst="rect">
+            <a:avLst/>
+          </a:prstGeom>
+          <a:noFill/>
+        </p:spPr>
+        <p:txBody>
+          <a:bodyPr wrap="square" anchor="t">
+            <a:spAutoFit/>
+          </a:bodyPr>
+          <a:lstStyle/>
+          <a:p>
+            <a:pPr algn="l">
+              <a:spcAft>
+                <a:spcPts val="200"/>
+              </a:spcAft>
+            </a:pPr>
+            <a:r>
+              <a:rPr sz="3000" b="1" i="0">
+                <a:solidFill>
+                  <a:srgbClr val="1E8E3E"/>
+                </a:solidFill>
+                <a:latin typeface="Calibri"/>
+              </a:rPr>
+              <a:t>SDG 9</a:t>
+            </a:r>
+          </a:p>
+          <a:p>
+            <a:pPr algn="l">
+              <a:spcAft>
+                <a:spcPts val="600"/>
+              </a:spcAft>
+            </a:pPr>
+            <a:r>
+              <a:rPr sz="1600" b="1" i="0">
+                <a:solidFill>
+                  <a:srgbClr val="1E1E28"/>
+                </a:solidFill>
+                <a:latin typeface="Calibri"/>
+              </a:rPr>
+              <a:t>Infrastructure &amp; Innovation</a:t>
+            </a:r>
+          </a:p>
+          <a:p>
+            <a:pPr algn="l">
+              <a:spcAft>
+                <a:spcPts val="600"/>
+              </a:spcAft>
+            </a:pPr>
+            <a:r>
+              <a:rPr sz="1300" b="0" i="0">
+                <a:solidFill>
+                  <a:srgbClr val="5A5A66"/>
+                </a:solidFill>
+                <a:latin typeface="Calibri"/>
+              </a:rPr>
+              <a:t>resilient off-grid education infrastructure</a:t>
+            </a:r>
+          </a:p>
+        </p:txBody>
+      </p:sp>
+      <p:sp>
+        <p:nvSpPr>
+          <p:cNvPr id="11" name="TextBox 10"/>
+          <p:cNvSpPr txBox="1"/>
+          <p:nvPr/>
+        </p:nvSpPr>
+        <p:spPr>
+          <a:xfrm>
+            <a:off x="640080" y="4572000"/>
+            <a:ext cx="10972800" cy="1280160"/>
+          </a:xfrm>
+          <a:prstGeom prst="rect">
+            <a:avLst/>
+          </a:prstGeom>
+          <a:noFill/>
+        </p:spPr>
+        <p:txBody>
+          <a:bodyPr wrap="square" anchor="t">
+            <a:spAutoFit/>
+          </a:bodyPr>
+          <a:lstStyle/>
+          <a:p>
+            <a:pPr algn="l">
+              <a:spcAft>
+                <a:spcPts val="600"/>
+              </a:spcAft>
+            </a:pPr>
+            <a:r>
+              <a:rPr sz="1500" b="0" i="0">
+                <a:solidFill>
+                  <a:srgbClr val="1E1E28"/>
+                </a:solidFill>
+                <a:latin typeface="Calibri"/>
+              </a:rPr>
+              <a:t>Regional resilience: learning continuity off-grid and in crises; preservation of minority languages via the ASEAN Dialect Flywheel — a public good of minority-language AI infrastructure.</a:t>
             </a:r>
           </a:p>
         </p:txBody>
@@ -4483,7 +6827,7 @@
         <p:spPr>
           <a:xfrm>
             <a:off x="0" y="0"/>
-            <a:ext cx="201168" cy="6858000"/>
+            <a:ext cx="164592" cy="6858000"/>
           </a:xfrm>
           <a:prstGeom prst="rect">
             <a:avLst/>
@@ -4494,6 +6838,7 @@
           <a:ln>
             <a:noFill/>
           </a:ln>
+          <a:effectLst/>
         </p:spPr>
         <p:style>
           <a:lnRef idx="1">
@@ -4525,8 +6870,8 @@
         </p:nvSpPr>
         <p:spPr>
           <a:xfrm>
-            <a:off x="548640" y="411480"/>
-            <a:ext cx="11155680" cy="914400"/>
+            <a:off x="548640" y="365760"/>
+            <a:ext cx="11338560" cy="1005840"/>
           </a:xfrm>
           <a:prstGeom prst="rect">
             <a:avLst/>
@@ -4534,28 +6879,36 @@
           <a:noFill/>
         </p:spPr>
         <p:txBody>
-          <a:bodyPr wrap="square">
+          <a:bodyPr wrap="square" anchor="t">
             <a:spAutoFit/>
           </a:bodyPr>
           <a:lstStyle/>
           <a:p>
-            <a:pPr algn="l"/>
+            <a:pPr algn="l">
+              <a:spcAft>
+                <a:spcPts val="200"/>
+              </a:spcAft>
+            </a:pPr>
+            <a:r>
+              <a:rPr sz="1300" b="1" i="0">
+                <a:solidFill>
+                  <a:srgbClr val="5B3FE0"/>
+                </a:solidFill>
+                <a:latin typeface="Calibri"/>
+              </a:rPr>
+              <a:t>FUTURE ROADMAP</a:t>
+            </a:r>
+          </a:p>
+          <a:p>
+            <a:pPr algn="l">
+              <a:spcAft>
+                <a:spcPts val="600"/>
+              </a:spcAft>
+            </a:pPr>
             <a:r>
               <a:rPr sz="3000" b="1" i="0">
                 <a:solidFill>
-                  <a:srgbClr val="5B3FE0"/>
-                </a:solidFill>
-                <a:latin typeface="Calibri"/>
-              </a:rPr>
-              <a:t>Future Roadmap</a:t>
-            </a:r>
-          </a:p>
-          <a:p>
-            <a:pPr algn="l"/>
-            <a:r>
-              <a:rPr sz="1500" b="0" i="1">
-                <a:solidFill>
-                  <a:srgbClr val="555560"/>
+                  <a:srgbClr val="1E1E28"/>
                 </a:solidFill>
                 <a:latin typeface="Calibri"/>
               </a:rPr>
@@ -4572,8 +6925,8 @@
         </p:nvSpPr>
         <p:spPr>
           <a:xfrm>
-            <a:off x="640080" y="1554480"/>
-            <a:ext cx="10972800" cy="4846320"/>
+            <a:off x="548640" y="6419088"/>
+            <a:ext cx="11064240" cy="365760"/>
           </a:xfrm>
           <a:prstGeom prst="rect">
             <a:avLst/>
@@ -4581,20 +6934,59 @@
           <a:noFill/>
         </p:spPr>
         <p:txBody>
-          <a:bodyPr wrap="square">
+          <a:bodyPr wrap="square" anchor="t">
             <a:spAutoFit/>
           </a:bodyPr>
           <a:lstStyle/>
           <a:p>
             <a:pPr algn="l">
               <a:spcAft>
-                <a:spcPts val="800"/>
-              </a:spcAft>
-            </a:pPr>
-            <a:r>
-              <a:rPr sz="1900" b="0" i="0">
-                <a:solidFill>
-                  <a:srgbClr val="202028"/>
+                <a:spcPts val="600"/>
+              </a:spcAft>
+            </a:pPr>
+            <a:r>
+              <a:rPr sz="1000" b="0" i="0">
+                <a:solidFill>
+                  <a:srgbClr val="5A5A66"/>
+                </a:solidFill>
+                <a:latin typeface="Calibri"/>
+              </a:rPr>
+              <a:t>Edge — AI Education at the Last Mile   ·   UM-Gunners</a:t>
+            </a:r>
+          </a:p>
+        </p:txBody>
+      </p:sp>
+      <p:sp>
+        <p:nvSpPr>
+          <p:cNvPr id="5" name="TextBox 4"/>
+          <p:cNvSpPr txBox="1"/>
+          <p:nvPr/>
+        </p:nvSpPr>
+        <p:spPr>
+          <a:xfrm>
+            <a:off x="640080" y="1737360"/>
+            <a:ext cx="10972800" cy="4206240"/>
+          </a:xfrm>
+          <a:prstGeom prst="rect">
+            <a:avLst/>
+          </a:prstGeom>
+          <a:noFill/>
+        </p:spPr>
+        <p:txBody>
+          <a:bodyPr wrap="square" anchor="t">
+            <a:spAutoFit/>
+          </a:bodyPr>
+          <a:lstStyle/>
+          <a:p>
+            <a:pPr algn="l">
+              <a:spcAft>
+                <a:spcPts val="900"/>
+              </a:spcAft>
+            </a:pPr>
+            <a:r>
+              <a:rPr sz="1800" b="0" i="0">
+                <a:solidFill>
+                  <a:srgbClr val="1E1E28"/>
                 </a:solidFill>
                 <a:latin typeface="Calibri"/>
               </a:rPr>
@@ -4604,13 +6996,13 @@
           <a:p>
             <a:pPr algn="l">
               <a:spcAft>
-                <a:spcPts val="800"/>
-              </a:spcAft>
-            </a:pPr>
-            <a:r>
-              <a:rPr sz="1900" b="0" i="0">
-                <a:solidFill>
-                  <a:srgbClr val="202028"/>
+                <a:spcPts val="900"/>
+              </a:spcAft>
+            </a:pPr>
+            <a:r>
+              <a:rPr sz="1800" b="0" i="0">
+                <a:solidFill>
+                  <a:srgbClr val="1E1E28"/>
                 </a:solidFill>
                 <a:latin typeface="Calibri"/>
               </a:rPr>
@@ -4620,13 +7012,13 @@
           <a:p>
             <a:pPr algn="l">
               <a:spcAft>
-                <a:spcPts val="800"/>
-              </a:spcAft>
-            </a:pPr>
-            <a:r>
-              <a:rPr sz="1900" b="0" i="0">
-                <a:solidFill>
-                  <a:srgbClr val="202028"/>
+                <a:spcPts val="900"/>
+              </a:spcAft>
+            </a:pPr>
+            <a:r>
+              <a:rPr sz="1800" b="0" i="0">
+                <a:solidFill>
+                  <a:srgbClr val="1E1E28"/>
                 </a:solidFill>
                 <a:latin typeface="Calibri"/>
               </a:rPr>
@@ -4636,29 +7028,29 @@
           <a:p>
             <a:pPr algn="l">
               <a:spcAft>
-                <a:spcPts val="800"/>
-              </a:spcAft>
-            </a:pPr>
-            <a:r>
-              <a:rPr sz="1900" b="0" i="0">
-                <a:solidFill>
-                  <a:srgbClr val="202028"/>
-                </a:solidFill>
-                <a:latin typeface="Calibri"/>
-              </a:rPr>
-              <a:t>•  Stronger embedder / fine-tuned MT as verified data accrues</a:t>
-            </a:r>
-          </a:p>
-          <a:p>
-            <a:pPr algn="l">
-              <a:spcAft>
-                <a:spcPts val="800"/>
-              </a:spcAft>
-            </a:pPr>
-            <a:r>
-              <a:rPr sz="1900" b="0" i="0">
-                <a:solidFill>
-                  <a:srgbClr val="202028"/>
+                <a:spcPts val="900"/>
+              </a:spcAft>
+            </a:pPr>
+            <a:r>
+              <a:rPr sz="1800" b="0" i="0">
+                <a:solidFill>
+                  <a:srgbClr val="1E1E28"/>
+                </a:solidFill>
+                <a:latin typeface="Calibri"/>
+              </a:rPr>
+              <a:t>•  Stronger embedder / fine-tuned MT as teacher-verified data accrues</a:t>
+            </a:r>
+          </a:p>
+          <a:p>
+            <a:pPr algn="l">
+              <a:spcAft>
+                <a:spcPts val="900"/>
+              </a:spcAft>
+            </a:pPr>
+            <a:r>
+              <a:rPr sz="1800" b="0" i="0">
+                <a:solidFill>
+                  <a:srgbClr val="1E1E28"/>
                 </a:solidFill>
                 <a:latin typeface="Calibri"/>
               </a:rPr>
@@ -4681,7 +7073,7 @@
     <p:bg>
       <p:bgPr>
         <a:solidFill>
-          <a:srgbClr val="FFFFFF"/>
+          <a:srgbClr val="5B3FE0"/>
         </a:solidFill>
         <a:effectLst/>
       </p:bgPr>
@@ -4695,24 +7087,80 @@
       <p:grpSpPr/>
       <p:sp>
         <p:nvSpPr>
-          <p:cNvPr id="2" name="Rectangle 1"/>
+          <p:cNvPr id="2" name="TextBox 1"/>
+          <p:cNvSpPr txBox="1"/>
+          <p:nvPr/>
+        </p:nvSpPr>
+        <p:spPr>
+          <a:xfrm>
+            <a:off x="822960" y="640080"/>
+            <a:ext cx="10515600" cy="1097280"/>
+          </a:xfrm>
+          <a:prstGeom prst="rect">
+            <a:avLst/>
+          </a:prstGeom>
+          <a:noFill/>
+        </p:spPr>
+        <p:txBody>
+          <a:bodyPr wrap="square" anchor="t">
+            <a:spAutoFit/>
+          </a:bodyPr>
+          <a:lstStyle/>
+          <a:p>
+            <a:pPr algn="l">
+              <a:spcAft>
+                <a:spcPts val="200"/>
+              </a:spcAft>
+            </a:pPr>
+            <a:r>
+              <a:rPr sz="3400" b="1" i="0">
+                <a:solidFill>
+                  <a:srgbClr val="FFFFFF"/>
+                </a:solidFill>
+                <a:latin typeface="Calibri"/>
+              </a:rPr>
+              <a:t>Team &amp; Contact</a:t>
+            </a:r>
+          </a:p>
+          <a:p>
+            <a:pPr algn="l">
+              <a:spcAft>
+                <a:spcPts val="600"/>
+              </a:spcAft>
+            </a:pPr>
+            <a:r>
+              <a:rPr sz="1800" b="0" i="0">
+                <a:solidFill>
+                  <a:srgbClr val="E0D8FF"/>
+                </a:solidFill>
+                <a:latin typeface="Calibri"/>
+              </a:rPr>
+              <a:t>UM – Gunners · University of Malaya · Malaysia</a:t>
+            </a:r>
+          </a:p>
+        </p:txBody>
+      </p:sp>
+      <p:sp>
+        <p:nvSpPr>
+          <p:cNvPr id="3" name="Rounded Rectangle 2"/>
           <p:cNvSpPr/>
           <p:nvPr/>
         </p:nvSpPr>
         <p:spPr>
           <a:xfrm>
-            <a:off x="0" y="0"/>
-            <a:ext cx="201168" cy="6858000"/>
-          </a:xfrm>
-          <a:prstGeom prst="rect">
+            <a:off x="822960" y="2194560"/>
+            <a:ext cx="3383280" cy="2377440"/>
+          </a:xfrm>
+          <a:prstGeom prst="roundRect">
             <a:avLst/>
           </a:prstGeom>
           <a:solidFill>
-            <a:srgbClr val="5B3FE0"/>
+            <a:srgbClr val="FFFFFF"/>
           </a:solidFill>
           <a:ln>
             <a:noFill/>
           </a:ln>
+          <a:effectLst/>
         </p:spPr>
         <p:style>
           <a:lnRef idx="1">
@@ -4738,14 +7186,14 @@
       </p:sp>
       <p:sp>
         <p:nvSpPr>
-          <p:cNvPr id="3" name="TextBox 2"/>
+          <p:cNvPr id="4" name="TextBox 3"/>
           <p:cNvSpPr txBox="1"/>
           <p:nvPr/>
         </p:nvSpPr>
         <p:spPr>
           <a:xfrm>
-            <a:off x="548640" y="411480"/>
-            <a:ext cx="11155680" cy="914400"/>
+            <a:off x="1051560" y="2423160"/>
+            <a:ext cx="2926080" cy="1920240"/>
           </a:xfrm>
           <a:prstGeom prst="rect">
             <a:avLst/>
@@ -4753,46 +7201,98 @@
           <a:noFill/>
         </p:spPr>
         <p:txBody>
-          <a:bodyPr wrap="square">
+          <a:bodyPr wrap="square" anchor="t">
             <a:spAutoFit/>
           </a:bodyPr>
           <a:lstStyle/>
           <a:p>
-            <a:pPr algn="l"/>
-            <a:r>
-              <a:rPr sz="3000" b="1" i="0">
+            <a:pPr algn="l">
+              <a:spcAft>
+                <a:spcPts val="400"/>
+              </a:spcAft>
+            </a:pPr>
+            <a:r>
+              <a:rPr sz="1800" b="1" i="0">
                 <a:solidFill>
                   <a:srgbClr val="5B3FE0"/>
                 </a:solidFill>
                 <a:latin typeface="Calibri"/>
               </a:rPr>
-              <a:t>Team &amp; Contact</a:t>
-            </a:r>
-          </a:p>
-          <a:p>
-            <a:pPr algn="l"/>
-            <a:r>
-              <a:rPr sz="1500" b="0" i="1">
-                <a:solidFill>
-                  <a:srgbClr val="555560"/>
-                </a:solidFill>
-                <a:latin typeface="Calibri"/>
-              </a:rPr>
-              <a:t>Add 3–5 short member bios + university logo</a:t>
-            </a:r>
-          </a:p>
-        </p:txBody>
-      </p:sp>
-      <p:sp>
-        <p:nvSpPr>
-          <p:cNvPr id="4" name="TextBox 3"/>
+              <a:t>[ Member 1 ]</a:t>
+            </a:r>
+          </a:p>
+          <a:p>
+            <a:pPr algn="l">
+              <a:spcAft>
+                <a:spcPts val="600"/>
+              </a:spcAft>
+            </a:pPr>
+            <a:r>
+              <a:rPr sz="1300" b="0" i="0">
+                <a:solidFill>
+                  <a:srgbClr val="5A5A66"/>
+                </a:solidFill>
+                <a:latin typeface="Calibri"/>
+              </a:rPr>
+              <a:t>Role / contribution</a:t>
+            </a:r>
+          </a:p>
+        </p:txBody>
+      </p:sp>
+      <p:sp>
+        <p:nvSpPr>
+          <p:cNvPr id="5" name="Rounded Rectangle 4"/>
+          <p:cNvSpPr/>
+          <p:nvPr/>
+        </p:nvSpPr>
+        <p:spPr>
+          <a:xfrm>
+            <a:off x="4434840" y="2194560"/>
+            <a:ext cx="3383280" cy="2377440"/>
+          </a:xfrm>
+          <a:prstGeom prst="roundRect">
+            <a:avLst/>
+          </a:prstGeom>
+          <a:solidFill>
+            <a:srgbClr val="FFFFFF"/>
+          </a:solidFill>
+          <a:ln>
+            <a:noFill/>
+          </a:ln>
+          <a:effectLst/>
+        </p:spPr>
+        <p:style>
+          <a:lnRef idx="1">
+            <a:schemeClr val="accent1"/>
+          </a:lnRef>
+          <a:fillRef idx="3">
+            <a:schemeClr val="accent1"/>
+          </a:fillRef>
+          <a:effectRef idx="2">
+            <a:schemeClr val="accent1"/>
+          </a:effectRef>
+          <a:fontRef idx="minor">
+            <a:schemeClr val="lt1"/>
+          </a:fontRef>
+        </p:style>
+        <p:txBody>
+          <a:bodyPr rtlCol="0" anchor="ctr"/>
+          <a:lstStyle/>
+          <a:p>
+            <a:pPr algn="ctr"/>
+          </a:p>
+        </p:txBody>
+      </p:sp>
+      <p:sp>
+        <p:nvSpPr>
+          <p:cNvPr id="6" name="TextBox 5"/>
           <p:cNvSpPr txBox="1"/>
           <p:nvPr/>
         </p:nvSpPr>
         <p:spPr>
           <a:xfrm>
-            <a:off x="640080" y="1554480"/>
-            <a:ext cx="10972800" cy="4846320"/>
+            <a:off x="4663440" y="2423160"/>
+            <a:ext cx="2926080" cy="1920240"/>
           </a:xfrm>
           <a:prstGeom prst="rect">
             <a:avLst/>
@@ -4800,88 +7300,194 @@
           <a:noFill/>
         </p:spPr>
         <p:txBody>
-          <a:bodyPr wrap="square">
+          <a:bodyPr wrap="square" anchor="t">
             <a:spAutoFit/>
           </a:bodyPr>
           <a:lstStyle/>
           <a:p>
             <a:pPr algn="l">
               <a:spcAft>
-                <a:spcPts val="800"/>
-              </a:spcAft>
-            </a:pPr>
-            <a:r>
-              <a:rPr sz="1900" b="0" i="0">
-                <a:solidFill>
-                  <a:srgbClr val="202028"/>
-                </a:solidFill>
-                <a:latin typeface="Calibri"/>
-              </a:rPr>
-              <a:t>•  UM – Gunners · University of Malaya · Malaysia</a:t>
-            </a:r>
-          </a:p>
-          <a:p>
-            <a:pPr algn="l">
-              <a:spcAft>
-                <a:spcPts val="800"/>
-              </a:spcAft>
-            </a:pPr>
-            <a:r>
-              <a:rPr sz="1900" b="0" i="0">
-                <a:solidFill>
-                  <a:srgbClr val="202028"/>
-                </a:solidFill>
-                <a:latin typeface="Calibri"/>
-              </a:rPr>
-              <a:t>•  [Member 1] — role / contribution</a:t>
-            </a:r>
-          </a:p>
-          <a:p>
-            <a:pPr algn="l">
-              <a:spcAft>
-                <a:spcPts val="800"/>
-              </a:spcAft>
-            </a:pPr>
-            <a:r>
-              <a:rPr sz="1900" b="0" i="0">
-                <a:solidFill>
-                  <a:srgbClr val="202028"/>
-                </a:solidFill>
-                <a:latin typeface="Calibri"/>
-              </a:rPr>
-              <a:t>•  [Member 2] — role / contribution</a:t>
-            </a:r>
-          </a:p>
-          <a:p>
-            <a:pPr algn="l">
-              <a:spcAft>
-                <a:spcPts val="800"/>
-              </a:spcAft>
-            </a:pPr>
-            <a:r>
-              <a:rPr sz="1900" b="0" i="0">
-                <a:solidFill>
-                  <a:srgbClr val="202028"/>
-                </a:solidFill>
-                <a:latin typeface="Calibri"/>
-              </a:rPr>
-              <a:t>•  [Member 3] — role / contribution</a:t>
-            </a:r>
-          </a:p>
-          <a:p>
-            <a:pPr algn="l">
-              <a:spcAft>
-                <a:spcPts val="800"/>
-              </a:spcAft>
-            </a:pPr>
-            <a:r>
-              <a:rPr sz="1900" b="0" i="0">
-                <a:solidFill>
-                  <a:srgbClr val="202028"/>
-                </a:solidFill>
-                <a:latin typeface="Calibri"/>
-              </a:rPr>
-              <a:t>•  Repository: https://github.com/fciacia/EduNode.git   ·   Demo: https://youtu.be/Ms_y6FUbKwU</a:t>
+                <a:spcPts val="400"/>
+              </a:spcAft>
+            </a:pPr>
+            <a:r>
+              <a:rPr sz="1800" b="1" i="0">
+                <a:solidFill>
+                  <a:srgbClr val="5B3FE0"/>
+                </a:solidFill>
+                <a:latin typeface="Calibri"/>
+              </a:rPr>
+              <a:t>[ Member 2 ]</a:t>
+            </a:r>
+          </a:p>
+          <a:p>
+            <a:pPr algn="l">
+              <a:spcAft>
+                <a:spcPts val="600"/>
+              </a:spcAft>
+            </a:pPr>
+            <a:r>
+              <a:rPr sz="1300" b="0" i="0">
+                <a:solidFill>
+                  <a:srgbClr val="5A5A66"/>
+                </a:solidFill>
+                <a:latin typeface="Calibri"/>
+              </a:rPr>
+              <a:t>Role / contribution</a:t>
+            </a:r>
+          </a:p>
+        </p:txBody>
+      </p:sp>
+      <p:sp>
+        <p:nvSpPr>
+          <p:cNvPr id="7" name="Rounded Rectangle 6"/>
+          <p:cNvSpPr/>
+          <p:nvPr/>
+        </p:nvSpPr>
+        <p:spPr>
+          <a:xfrm>
+            <a:off x="8046720" y="2194560"/>
+            <a:ext cx="3383280" cy="2377440"/>
+          </a:xfrm>
+          <a:prstGeom prst="roundRect">
+            <a:avLst/>
+          </a:prstGeom>
+          <a:solidFill>
+            <a:srgbClr val="FFFFFF"/>
+          </a:solidFill>
+          <a:ln>
+            <a:noFill/>
+          </a:ln>
+          <a:effectLst/>
+        </p:spPr>
+        <p:style>
+          <a:lnRef idx="1">
+            <a:schemeClr val="accent1"/>
+          </a:lnRef>
+          <a:fillRef idx="3">
+            <a:schemeClr val="accent1"/>
+          </a:fillRef>
+          <a:effectRef idx="2">
+            <a:schemeClr val="accent1"/>
+          </a:effectRef>
+          <a:fontRef idx="minor">
+            <a:schemeClr val="lt1"/>
+          </a:fontRef>
+        </p:style>
+        <p:txBody>
+          <a:bodyPr rtlCol="0" anchor="ctr"/>
+          <a:lstStyle/>
+          <a:p>
+            <a:pPr algn="ctr"/>
+          </a:p>
+        </p:txBody>
+      </p:sp>
+      <p:sp>
+        <p:nvSpPr>
+          <p:cNvPr id="8" name="TextBox 7"/>
+          <p:cNvSpPr txBox="1"/>
+          <p:nvPr/>
+        </p:nvSpPr>
+        <p:spPr>
+          <a:xfrm>
+            <a:off x="8275320" y="2423160"/>
+            <a:ext cx="2926080" cy="1920240"/>
+          </a:xfrm>
+          <a:prstGeom prst="rect">
+            <a:avLst/>
+          </a:prstGeom>
+          <a:noFill/>
+        </p:spPr>
+        <p:txBody>
+          <a:bodyPr wrap="square" anchor="t">
+            <a:spAutoFit/>
+          </a:bodyPr>
+          <a:lstStyle/>
+          <a:p>
+            <a:pPr algn="l">
+              <a:spcAft>
+                <a:spcPts val="400"/>
+              </a:spcAft>
+            </a:pPr>
+            <a:r>
+              <a:rPr sz="1800" b="1" i="0">
+                <a:solidFill>
+                  <a:srgbClr val="5B3FE0"/>
+                </a:solidFill>
+                <a:latin typeface="Calibri"/>
+              </a:rPr>
+              <a:t>[ Member 3 ]</a:t>
+            </a:r>
+          </a:p>
+          <a:p>
+            <a:pPr algn="l">
+              <a:spcAft>
+                <a:spcPts val="600"/>
+              </a:spcAft>
+            </a:pPr>
+            <a:r>
+              <a:rPr sz="1300" b="0" i="0">
+                <a:solidFill>
+                  <a:srgbClr val="5A5A66"/>
+                </a:solidFill>
+                <a:latin typeface="Calibri"/>
+              </a:rPr>
+              <a:t>Role / contribution</a:t>
+            </a:r>
+          </a:p>
+        </p:txBody>
+      </p:sp>
+      <p:sp>
+        <p:nvSpPr>
+          <p:cNvPr id="9" name="TextBox 8"/>
+          <p:cNvSpPr txBox="1"/>
+          <p:nvPr/>
+        </p:nvSpPr>
+        <p:spPr>
+          <a:xfrm>
+            <a:off x="822960" y="5120640"/>
+            <a:ext cx="10515600" cy="914400"/>
+          </a:xfrm>
+          <a:prstGeom prst="rect">
+            <a:avLst/>
+          </a:prstGeom>
+          <a:noFill/>
+        </p:spPr>
+        <p:txBody>
+          <a:bodyPr wrap="square" anchor="t">
+            <a:spAutoFit/>
+          </a:bodyPr>
+          <a:lstStyle/>
+          <a:p>
+            <a:pPr algn="l">
+              <a:spcAft>
+                <a:spcPts val="300"/>
+              </a:spcAft>
+            </a:pPr>
+            <a:r>
+              <a:rPr sz="1600" b="1" i="0">
+                <a:solidFill>
+                  <a:srgbClr val="FFFFFF"/>
+                </a:solidFill>
+                <a:latin typeface="Calibri"/>
+              </a:rPr>
+              <a:t>Repository:  github.com/fciacia/EduNode</a:t>
+            </a:r>
+          </a:p>
+          <a:p>
+            <a:pPr algn="l">
+              <a:spcAft>
+                <a:spcPts val="600"/>
+              </a:spcAft>
+            </a:pPr>
+            <a:r>
+              <a:rPr sz="1400" b="0" i="0">
+                <a:solidFill>
+                  <a:srgbClr val="E0D8FF"/>
+                </a:solidFill>
+                <a:latin typeface="Calibri"/>
+              </a:rPr>
+              <a:t>Demo:  youtu.be/Ms_y6FUbKwU   ·   [ add university logo ]</a:t>
             </a:r>
           </a:p>
         </p:txBody>
@@ -4921,7 +7527,7 @@
         <p:spPr>
           <a:xfrm>
             <a:off x="0" y="0"/>
-            <a:ext cx="201168" cy="6858000"/>
+            <a:ext cx="164592" cy="6858000"/>
           </a:xfrm>
           <a:prstGeom prst="rect">
             <a:avLst/>
@@ -4932,6 +7538,7 @@
           <a:ln>
             <a:noFill/>
           </a:ln>
+          <a:effectLst/>
         </p:spPr>
         <p:style>
           <a:lnRef idx="1">
@@ -4963,8 +7570,8 @@
         </p:nvSpPr>
         <p:spPr>
           <a:xfrm>
-            <a:off x="548640" y="411480"/>
-            <a:ext cx="11155680" cy="914400"/>
+            <a:off x="548640" y="365760"/>
+            <a:ext cx="11338560" cy="1005840"/>
           </a:xfrm>
           <a:prstGeom prst="rect">
             <a:avLst/>
@@ -4972,32 +7579,40 @@
           <a:noFill/>
         </p:spPr>
         <p:txBody>
-          <a:bodyPr wrap="square">
+          <a:bodyPr wrap="square" anchor="t">
             <a:spAutoFit/>
           </a:bodyPr>
           <a:lstStyle/>
           <a:p>
-            <a:pPr algn="l"/>
+            <a:pPr algn="l">
+              <a:spcAft>
+                <a:spcPts val="200"/>
+              </a:spcAft>
+            </a:pPr>
+            <a:r>
+              <a:rPr sz="1300" b="1" i="0">
+                <a:solidFill>
+                  <a:srgbClr val="5B3FE0"/>
+                </a:solidFill>
+                <a:latin typeface="Calibri"/>
+              </a:rPr>
+              <a:t>THE CHALLENGE</a:t>
+            </a:r>
+          </a:p>
+          <a:p>
+            <a:pPr algn="l">
+              <a:spcAft>
+                <a:spcPts val="600"/>
+              </a:spcAft>
+            </a:pPr>
             <a:r>
               <a:rPr sz="3000" b="1" i="0">
                 <a:solidFill>
-                  <a:srgbClr val="5B3FE0"/>
-                </a:solidFill>
-                <a:latin typeface="Calibri"/>
-              </a:rPr>
-              <a:t>Problem Statement</a:t>
-            </a:r>
-          </a:p>
-          <a:p>
-            <a:pPr algn="l"/>
-            <a:r>
-              <a:rPr sz="1500" b="0" i="1">
-                <a:solidFill>
-                  <a:srgbClr val="555560"/>
-                </a:solidFill>
-                <a:latin typeface="Calibri"/>
-              </a:rPr>
-              <a:t>Why it matters — with data</a:t>
+                  <a:srgbClr val="1E1E28"/>
+                </a:solidFill>
+                <a:latin typeface="Calibri"/>
+              </a:rPr>
+              <a:t>60M+ rural learners, left offline</a:t>
             </a:r>
           </a:p>
         </p:txBody>
@@ -5010,8 +7625,8 @@
         </p:nvSpPr>
         <p:spPr>
           <a:xfrm>
-            <a:off x="640080" y="1554480"/>
-            <a:ext cx="10972800" cy="4846320"/>
+            <a:off x="548640" y="6419088"/>
+            <a:ext cx="11064240" cy="365760"/>
           </a:xfrm>
           <a:prstGeom prst="rect">
             <a:avLst/>
@@ -5019,72 +7634,362 @@
           <a:noFill/>
         </p:spPr>
         <p:txBody>
-          <a:bodyPr wrap="square">
+          <a:bodyPr wrap="square" anchor="t">
             <a:spAutoFit/>
           </a:bodyPr>
           <a:lstStyle/>
           <a:p>
             <a:pPr algn="l">
               <a:spcAft>
-                <a:spcPts val="800"/>
-              </a:spcAft>
-            </a:pPr>
-            <a:r>
-              <a:rPr sz="1900" b="0" i="0">
-                <a:solidFill>
-                  <a:srgbClr val="202028"/>
-                </a:solidFill>
-                <a:latin typeface="Calibri"/>
-              </a:rPr>
-              <a:t>•  60M+ rural ASEAN learners excluded by a triple divide: no internet, no grid power, no mother-tongue AI</a:t>
-            </a:r>
-          </a:p>
-          <a:p>
-            <a:pPr algn="l">
-              <a:spcAft>
-                <a:spcPts val="800"/>
-              </a:spcAft>
-            </a:pPr>
-            <a:r>
-              <a:rPr sz="1900" b="0" i="0">
-                <a:solidFill>
-                  <a:srgbClr val="202028"/>
-                </a:solidFill>
-                <a:latin typeface="Calibri"/>
-              </a:rPr>
-              <a:t>•  55% of Filipino 15-year-olds score below the PISA minimum in maths; only 30% of Cambodian Grade-5 students meet basic reading (UNICEF SEA-PLM, 2019)</a:t>
-            </a:r>
-          </a:p>
-          <a:p>
-            <a:pPr algn="l">
-              <a:spcAft>
-                <a:spcPts val="800"/>
-              </a:spcAft>
-            </a:pPr>
-            <a:r>
-              <a:rPr sz="1900" b="0" i="0">
-                <a:solidFill>
-                  <a:srgbClr val="202028"/>
-                </a:solidFill>
-                <a:latin typeface="Calibri"/>
-              </a:rPr>
-              <a:t>•  Rural internet penetration: 18% Timor-Leste, 25% Myanmar, 28% Laos (ITU, 2023)</a:t>
-            </a:r>
-          </a:p>
-          <a:p>
-            <a:pPr algn="l">
-              <a:spcAft>
-                <a:spcPts val="800"/>
-              </a:spcAft>
-            </a:pPr>
-            <a:r>
-              <a:rPr sz="1900" b="0" i="0">
-                <a:solidFill>
-                  <a:srgbClr val="202028"/>
+                <a:spcPts val="600"/>
+              </a:spcAft>
+            </a:pPr>
+            <a:r>
+              <a:rPr sz="1000" b="0" i="0">
+                <a:solidFill>
+                  <a:srgbClr val="5A5A66"/>
+                </a:solidFill>
+                <a:latin typeface="Calibri"/>
+              </a:rPr>
+              <a:t>Edge — AI Education at the Last Mile   ·   UM-Gunners</a:t>
+            </a:r>
+          </a:p>
+        </p:txBody>
+      </p:sp>
+      <p:sp>
+        <p:nvSpPr>
+          <p:cNvPr id="5" name="Rounded Rectangle 4"/>
+          <p:cNvSpPr/>
+          <p:nvPr/>
+        </p:nvSpPr>
+        <p:spPr>
+          <a:xfrm>
+            <a:off x="640080" y="1554480"/>
+            <a:ext cx="3474720" cy="1737360"/>
+          </a:xfrm>
+          <a:prstGeom prst="roundRect">
+            <a:avLst/>
+          </a:prstGeom>
+          <a:solidFill>
+            <a:srgbClr val="F1EEFC"/>
+          </a:solidFill>
+          <a:ln>
+            <a:noFill/>
+          </a:ln>
+          <a:effectLst/>
+        </p:spPr>
+        <p:style>
+          <a:lnRef idx="1">
+            <a:schemeClr val="accent1"/>
+          </a:lnRef>
+          <a:fillRef idx="3">
+            <a:schemeClr val="accent1"/>
+          </a:fillRef>
+          <a:effectRef idx="2">
+            <a:schemeClr val="accent1"/>
+          </a:effectRef>
+          <a:fontRef idx="minor">
+            <a:schemeClr val="lt1"/>
+          </a:fontRef>
+        </p:style>
+        <p:txBody>
+          <a:bodyPr rtlCol="0" anchor="ctr" wrap="square" lIns="164592" rIns="164592" tIns="164592"/>
+          <a:lstStyle/>
+          <a:p>
+            <a:pPr algn="l">
+              <a:spcAft>
+                <a:spcPts val="200"/>
+              </a:spcAft>
+            </a:pPr>
+            <a:r>
+              <a:rPr sz="4000" b="1" i="0">
+                <a:solidFill>
+                  <a:srgbClr val="5B3FE0"/>
+                </a:solidFill>
+                <a:latin typeface="Calibri"/>
+              </a:rPr>
+              <a:t>60M+</a:t>
+            </a:r>
+          </a:p>
+          <a:p>
+            <a:pPr algn="l">
+              <a:spcAft>
+                <a:spcPts val="200"/>
+              </a:spcAft>
+            </a:pPr>
+            <a:r>
+              <a:rPr sz="1400" b="1" i="0">
+                <a:solidFill>
+                  <a:srgbClr val="1E1E28"/>
+                </a:solidFill>
+                <a:latin typeface="Calibri"/>
+              </a:rPr>
+              <a:t>rural ASEAN learners excluded</a:t>
+            </a:r>
+          </a:p>
+          <a:p>
+            <a:pPr algn="l">
+              <a:spcAft>
+                <a:spcPts val="600"/>
+              </a:spcAft>
+            </a:pPr>
+            <a:r>
+              <a:rPr sz="1100" b="0" i="0">
+                <a:solidFill>
+                  <a:srgbClr val="5A5A66"/>
+                </a:solidFill>
+                <a:latin typeface="Calibri"/>
+              </a:rPr>
+              <a:t>no internet · no grid · no mother-tongue AI</a:t>
+            </a:r>
+          </a:p>
+        </p:txBody>
+      </p:sp>
+      <p:sp>
+        <p:nvSpPr>
+          <p:cNvPr id="6" name="Rounded Rectangle 5"/>
+          <p:cNvSpPr/>
+          <p:nvPr/>
+        </p:nvSpPr>
+        <p:spPr>
+          <a:xfrm>
+            <a:off x="4343400" y="1554480"/>
+            <a:ext cx="3474720" cy="1737360"/>
+          </a:xfrm>
+          <a:prstGeom prst="roundRect">
+            <a:avLst/>
+          </a:prstGeom>
+          <a:solidFill>
+            <a:srgbClr val="F1EEFC"/>
+          </a:solidFill>
+          <a:ln>
+            <a:noFill/>
+          </a:ln>
+          <a:effectLst/>
+        </p:spPr>
+        <p:style>
+          <a:lnRef idx="1">
+            <a:schemeClr val="accent1"/>
+          </a:lnRef>
+          <a:fillRef idx="3">
+            <a:schemeClr val="accent1"/>
+          </a:fillRef>
+          <a:effectRef idx="2">
+            <a:schemeClr val="accent1"/>
+          </a:effectRef>
+          <a:fontRef idx="minor">
+            <a:schemeClr val="lt1"/>
+          </a:fontRef>
+        </p:style>
+        <p:txBody>
+          <a:bodyPr rtlCol="0" anchor="ctr" wrap="square" lIns="164592" rIns="164592" tIns="164592"/>
+          <a:lstStyle/>
+          <a:p>
+            <a:pPr algn="l">
+              <a:spcAft>
+                <a:spcPts val="200"/>
+              </a:spcAft>
+            </a:pPr>
+            <a:r>
+              <a:rPr sz="4000" b="1" i="0">
+                <a:solidFill>
+                  <a:srgbClr val="0E809B"/>
+                </a:solidFill>
+                <a:latin typeface="Calibri"/>
+              </a:rPr>
+              <a:t>18%</a:t>
+            </a:r>
+          </a:p>
+          <a:p>
+            <a:pPr algn="l">
+              <a:spcAft>
+                <a:spcPts val="200"/>
+              </a:spcAft>
+            </a:pPr>
+            <a:r>
+              <a:rPr sz="1400" b="1" i="0">
+                <a:solidFill>
+                  <a:srgbClr val="1E1E28"/>
+                </a:solidFill>
+                <a:latin typeface="Calibri"/>
+              </a:rPr>
+              <a:t>rural internet (Timor-Leste)</a:t>
+            </a:r>
+          </a:p>
+          <a:p>
+            <a:pPr algn="l">
+              <a:spcAft>
+                <a:spcPts val="600"/>
+              </a:spcAft>
+            </a:pPr>
+            <a:r>
+              <a:rPr sz="1100" b="0" i="0">
+                <a:solidFill>
+                  <a:srgbClr val="5A5A66"/>
+                </a:solidFill>
+                <a:latin typeface="Calibri"/>
+              </a:rPr>
+              <a:t>25% Myanmar · 28% Laos (ITU 2023)</a:t>
+            </a:r>
+          </a:p>
+        </p:txBody>
+      </p:sp>
+      <p:sp>
+        <p:nvSpPr>
+          <p:cNvPr id="7" name="Rounded Rectangle 6"/>
+          <p:cNvSpPr/>
+          <p:nvPr/>
+        </p:nvSpPr>
+        <p:spPr>
+          <a:xfrm>
+            <a:off x="8046720" y="1554480"/>
+            <a:ext cx="3474720" cy="1737360"/>
+          </a:xfrm>
+          <a:prstGeom prst="roundRect">
+            <a:avLst/>
+          </a:prstGeom>
+          <a:solidFill>
+            <a:srgbClr val="F1EEFC"/>
+          </a:solidFill>
+          <a:ln>
+            <a:noFill/>
+          </a:ln>
+          <a:effectLst/>
+        </p:spPr>
+        <p:style>
+          <a:lnRef idx="1">
+            <a:schemeClr val="accent1"/>
+          </a:lnRef>
+          <a:fillRef idx="3">
+            <a:schemeClr val="accent1"/>
+          </a:fillRef>
+          <a:effectRef idx="2">
+            <a:schemeClr val="accent1"/>
+          </a:effectRef>
+          <a:fontRef idx="minor">
+            <a:schemeClr val="lt1"/>
+          </a:fontRef>
+        </p:style>
+        <p:txBody>
+          <a:bodyPr rtlCol="0" anchor="ctr" wrap="square" lIns="164592" rIns="164592" tIns="164592"/>
+          <a:lstStyle/>
+          <a:p>
+            <a:pPr algn="l">
+              <a:spcAft>
+                <a:spcPts val="200"/>
+              </a:spcAft>
+            </a:pPr>
+            <a:r>
+              <a:rPr sz="4000" b="1" i="0">
+                <a:solidFill>
+                  <a:srgbClr val="B06000"/>
+                </a:solidFill>
+                <a:latin typeface="Calibri"/>
+              </a:rPr>
+              <a:t>55%</a:t>
+            </a:r>
+          </a:p>
+          <a:p>
+            <a:pPr algn="l">
+              <a:spcAft>
+                <a:spcPts val="200"/>
+              </a:spcAft>
+            </a:pPr>
+            <a:r>
+              <a:rPr sz="1400" b="1" i="0">
+                <a:solidFill>
+                  <a:srgbClr val="1E1E28"/>
+                </a:solidFill>
+                <a:latin typeface="Calibri"/>
+              </a:rPr>
+              <a:t>Filipino 15-yos below PISA maths</a:t>
+            </a:r>
+          </a:p>
+          <a:p>
+            <a:pPr algn="l">
+              <a:spcAft>
+                <a:spcPts val="600"/>
+              </a:spcAft>
+            </a:pPr>
+            <a:r>
+              <a:rPr sz="1100" b="0" i="0">
+                <a:solidFill>
+                  <a:srgbClr val="5A5A66"/>
+                </a:solidFill>
+                <a:latin typeface="Calibri"/>
+              </a:rPr>
+              <a:t>30% Cambodian G5 read (UNICEF 2019)</a:t>
+            </a:r>
+          </a:p>
+        </p:txBody>
+      </p:sp>
+      <p:sp>
+        <p:nvSpPr>
+          <p:cNvPr id="8" name="TextBox 7"/>
+          <p:cNvSpPr txBox="1"/>
+          <p:nvPr/>
+        </p:nvSpPr>
+        <p:spPr>
+          <a:xfrm>
+            <a:off x="640080" y="3657600"/>
+            <a:ext cx="10972800" cy="2377440"/>
+          </a:xfrm>
+          <a:prstGeom prst="rect">
+            <a:avLst/>
+          </a:prstGeom>
+          <a:noFill/>
+        </p:spPr>
+        <p:txBody>
+          <a:bodyPr wrap="square" anchor="t">
+            <a:spAutoFit/>
+          </a:bodyPr>
+          <a:lstStyle/>
+          <a:p>
+            <a:pPr algn="l">
+              <a:spcAft>
+                <a:spcPts val="900"/>
+              </a:spcAft>
+            </a:pPr>
+            <a:r>
+              <a:rPr sz="1800" b="0" i="0">
+                <a:solidFill>
+                  <a:srgbClr val="1E1E28"/>
                 </a:solidFill>
                 <a:latin typeface="Calibri"/>
               </a:rPr>
               <a:t>•  Cloud AI (ChatGPT, etc.) is built for the connected world and fails entirely off-grid</a:t>
+            </a:r>
+          </a:p>
+          <a:p>
+            <a:pPr algn="l">
+              <a:spcAft>
+                <a:spcPts val="900"/>
+              </a:spcAft>
+            </a:pPr>
+            <a:r>
+              <a:rPr sz="1800" b="0" i="0">
+                <a:solidFill>
+                  <a:srgbClr val="1E1E28"/>
+                </a:solidFill>
+                <a:latin typeface="Calibri"/>
+              </a:rPr>
+              <a:t>•  The communities with the least connectivity have the least access to quality tutoring</a:t>
+            </a:r>
+          </a:p>
+          <a:p>
+            <a:pPr algn="l">
+              <a:spcAft>
+                <a:spcPts val="900"/>
+              </a:spcAft>
+            </a:pPr>
+            <a:r>
+              <a:rPr sz="1800" b="0" i="0">
+                <a:solidFill>
+                  <a:srgbClr val="1E1E28"/>
+                </a:solidFill>
+                <a:latin typeface="Calibri"/>
+              </a:rPr>
+              <a:t>•  Mother-tongue and minority-language learners are unserved by dominant-language models</a:t>
             </a:r>
           </a:p>
         </p:txBody>
@@ -5124,7 +8029,7 @@
         <p:spPr>
           <a:xfrm>
             <a:off x="0" y="0"/>
-            <a:ext cx="201168" cy="6858000"/>
+            <a:ext cx="164592" cy="6858000"/>
           </a:xfrm>
           <a:prstGeom prst="rect">
             <a:avLst/>
@@ -5135,6 +8040,7 @@
           <a:ln>
             <a:noFill/>
           </a:ln>
+          <a:effectLst/>
         </p:spPr>
         <p:style>
           <a:lnRef idx="1">
@@ -5166,8 +8072,8 @@
         </p:nvSpPr>
         <p:spPr>
           <a:xfrm>
-            <a:off x="548640" y="411480"/>
-            <a:ext cx="11155680" cy="914400"/>
+            <a:off x="548640" y="365760"/>
+            <a:ext cx="11338560" cy="1005840"/>
           </a:xfrm>
           <a:prstGeom prst="rect">
             <a:avLst/>
@@ -5175,32 +8081,40 @@
           <a:noFill/>
         </p:spPr>
         <p:txBody>
-          <a:bodyPr wrap="square">
+          <a:bodyPr wrap="square" anchor="t">
             <a:spAutoFit/>
           </a:bodyPr>
           <a:lstStyle/>
           <a:p>
-            <a:pPr algn="l"/>
+            <a:pPr algn="l">
+              <a:spcAft>
+                <a:spcPts val="200"/>
+              </a:spcAft>
+            </a:pPr>
+            <a:r>
+              <a:rPr sz="1300" b="1" i="0">
+                <a:solidFill>
+                  <a:srgbClr val="5B3FE0"/>
+                </a:solidFill>
+                <a:latin typeface="Calibri"/>
+              </a:rPr>
+              <a:t>THE SOLUTION</a:t>
+            </a:r>
+          </a:p>
+          <a:p>
+            <a:pPr algn="l">
+              <a:spcAft>
+                <a:spcPts val="600"/>
+              </a:spcAft>
+            </a:pPr>
             <a:r>
               <a:rPr sz="3000" b="1" i="0">
                 <a:solidFill>
-                  <a:srgbClr val="5B3FE0"/>
-                </a:solidFill>
-                <a:latin typeface="Calibri"/>
-              </a:rPr>
-              <a:t>The AI Solution</a:t>
-            </a:r>
-          </a:p>
-          <a:p>
-            <a:pPr algn="l"/>
-            <a:r>
-              <a:rPr sz="1500" b="0" i="1">
-                <a:solidFill>
-                  <a:srgbClr val="555560"/>
-                </a:solidFill>
-                <a:latin typeface="Calibri"/>
-              </a:rPr>
-              <a:t>The elevator pitch</a:t>
+                  <a:srgbClr val="1E1E28"/>
+                </a:solidFill>
+                <a:latin typeface="Calibri"/>
+              </a:rPr>
+              <a:t>An offline AI tutor on a $220 solar hub</a:t>
             </a:r>
           </a:p>
         </p:txBody>
@@ -5213,8 +8127,8 @@
         </p:nvSpPr>
         <p:spPr>
           <a:xfrm>
-            <a:off x="640080" y="1554480"/>
-            <a:ext cx="10972800" cy="4846320"/>
+            <a:off x="548640" y="6419088"/>
+            <a:ext cx="11064240" cy="365760"/>
           </a:xfrm>
           <a:prstGeom prst="rect">
             <a:avLst/>
@@ -5222,72 +8136,387 @@
           <a:noFill/>
         </p:spPr>
         <p:txBody>
-          <a:bodyPr wrap="square">
+          <a:bodyPr wrap="square" anchor="t">
             <a:spAutoFit/>
           </a:bodyPr>
           <a:lstStyle/>
           <a:p>
             <a:pPr algn="l">
               <a:spcAft>
-                <a:spcPts val="800"/>
-              </a:spcAft>
-            </a:pPr>
-            <a:r>
-              <a:rPr sz="1900" b="0" i="0">
-                <a:solidFill>
-                  <a:srgbClr val="202028"/>
-                </a:solidFill>
-                <a:latin typeface="Calibri"/>
-              </a:rPr>
-              <a:t>•  Edge: a fully offline, solar-powered AI tutoring hub on a Raspberry Pi</a:t>
-            </a:r>
-          </a:p>
-          <a:p>
-            <a:pPr algn="l">
-              <a:spcAft>
-                <a:spcPts val="800"/>
-              </a:spcAft>
-            </a:pPr>
-            <a:r>
-              <a:rPr sz="1900" b="0" i="0">
-                <a:solidFill>
-                  <a:srgbClr val="202028"/>
-                </a:solidFill>
-                <a:latin typeface="Calibri"/>
-              </a:rPr>
-              <a:t>•  Broadcasts a local Wi-Fi network — students connect from their own phones, no internet</a:t>
-            </a:r>
-          </a:p>
-          <a:p>
-            <a:pPr algn="l">
-              <a:spcAft>
-                <a:spcPts val="800"/>
-              </a:spcAft>
-            </a:pPr>
-            <a:r>
-              <a:rPr sz="1900" b="0" i="0">
-                <a:solidFill>
-                  <a:srgbClr val="202028"/>
-                </a:solidFill>
-                <a:latin typeface="Calibri"/>
-              </a:rPr>
-              <a:t>•  An Agentic RAG pipeline delivers curriculum-grounded answers, adaptive quizzes, voice interaction and PDF microcredentials — in the student's mother tongue</a:t>
-            </a:r>
-          </a:p>
-          <a:p>
-            <a:pPr algn="l">
-              <a:spcAft>
-                <a:spcPts val="800"/>
-              </a:spcAft>
-            </a:pPr>
-            <a:r>
-              <a:rPr sz="1900" b="0" i="0">
-                <a:solidFill>
-                  <a:srgbClr val="202028"/>
-                </a:solidFill>
-                <a:latin typeface="Calibri"/>
-              </a:rPr>
-              <a:t>•  ≈ USD 0.60 per student per year; ≈ USD 220 solar hardware, no recurring cloud cost</a:t>
+                <a:spcPts val="600"/>
+              </a:spcAft>
+            </a:pPr>
+            <a:r>
+              <a:rPr sz="1000" b="0" i="0">
+                <a:solidFill>
+                  <a:srgbClr val="5A5A66"/>
+                </a:solidFill>
+                <a:latin typeface="Calibri"/>
+              </a:rPr>
+              <a:t>Edge — AI Education at the Last Mile   ·   UM-Gunners</a:t>
+            </a:r>
+          </a:p>
+        </p:txBody>
+      </p:sp>
+      <p:sp>
+        <p:nvSpPr>
+          <p:cNvPr id="5" name="TextBox 4"/>
+          <p:cNvSpPr txBox="1"/>
+          <p:nvPr/>
+        </p:nvSpPr>
+        <p:spPr>
+          <a:xfrm>
+            <a:off x="640080" y="1600200"/>
+            <a:ext cx="11155680" cy="1828800"/>
+          </a:xfrm>
+          <a:prstGeom prst="rect">
+            <a:avLst/>
+          </a:prstGeom>
+          <a:noFill/>
+        </p:spPr>
+        <p:txBody>
+          <a:bodyPr wrap="square" anchor="t">
+            <a:spAutoFit/>
+          </a:bodyPr>
+          <a:lstStyle/>
+          <a:p>
+            <a:pPr algn="l">
+              <a:spcAft>
+                <a:spcPts val="900"/>
+              </a:spcAft>
+            </a:pPr>
+            <a:r>
+              <a:rPr sz="1700" b="0" i="0">
+                <a:solidFill>
+                  <a:srgbClr val="1E1E28"/>
+                </a:solidFill>
+                <a:latin typeface="Calibri"/>
+              </a:rPr>
+              <a:t>•  A fully offline, solar-powered AI tutoring hub on a Raspberry Pi — broadcasts local Wi-Fi</a:t>
+            </a:r>
+          </a:p>
+          <a:p>
+            <a:pPr algn="l">
+              <a:spcAft>
+                <a:spcPts val="900"/>
+              </a:spcAft>
+            </a:pPr>
+            <a:r>
+              <a:rPr sz="1700" b="0" i="0">
+                <a:solidFill>
+                  <a:srgbClr val="1E1E28"/>
+                </a:solidFill>
+                <a:latin typeface="Calibri"/>
+              </a:rPr>
+              <a:t>•  Students connect from their own phones, no internet; an Agentic RAG pipeline answers in their mother tongue</a:t>
+            </a:r>
+          </a:p>
+          <a:p>
+            <a:pPr algn="l">
+              <a:spcAft>
+                <a:spcPts val="900"/>
+              </a:spcAft>
+            </a:pPr>
+            <a:r>
+              <a:rPr sz="1700" b="0" i="0">
+                <a:solidFill>
+                  <a:srgbClr val="1E1E28"/>
+                </a:solidFill>
+                <a:latin typeface="Calibri"/>
+              </a:rPr>
+              <a:t>•  Curriculum-grounded answers, adaptive quizzes, voice interaction, PDF microcredentials</a:t>
+            </a:r>
+          </a:p>
+        </p:txBody>
+      </p:sp>
+      <p:sp>
+        <p:nvSpPr>
+          <p:cNvPr id="6" name="Rounded Rectangle 5"/>
+          <p:cNvSpPr/>
+          <p:nvPr/>
+        </p:nvSpPr>
+        <p:spPr>
+          <a:xfrm>
+            <a:off x="640080" y="3977639"/>
+            <a:ext cx="2697480" cy="1554480"/>
+          </a:xfrm>
+          <a:prstGeom prst="roundRect">
+            <a:avLst/>
+          </a:prstGeom>
+          <a:solidFill>
+            <a:srgbClr val="F1EEFC"/>
+          </a:solidFill>
+          <a:ln>
+            <a:noFill/>
+          </a:ln>
+          <a:effectLst/>
+        </p:spPr>
+        <p:style>
+          <a:lnRef idx="1">
+            <a:schemeClr val="accent1"/>
+          </a:lnRef>
+          <a:fillRef idx="3">
+            <a:schemeClr val="accent1"/>
+          </a:fillRef>
+          <a:effectRef idx="2">
+            <a:schemeClr val="accent1"/>
+          </a:effectRef>
+          <a:fontRef idx="minor">
+            <a:schemeClr val="lt1"/>
+          </a:fontRef>
+        </p:style>
+        <p:txBody>
+          <a:bodyPr rtlCol="0" anchor="ctr" wrap="square" tIns="182880" lIns="146304"/>
+          <a:lstStyle/>
+          <a:p>
+            <a:pPr algn="l">
+              <a:spcAft>
+                <a:spcPts val="300"/>
+              </a:spcAft>
+            </a:pPr>
+            <a:r>
+              <a:rPr sz="1800" b="1" i="0">
+                <a:solidFill>
+                  <a:srgbClr val="5B3FE0"/>
+                </a:solidFill>
+                <a:latin typeface="Calibri"/>
+              </a:rPr>
+              <a:t>100% Offline</a:t>
+            </a:r>
+          </a:p>
+          <a:p>
+            <a:pPr algn="l">
+              <a:spcAft>
+                <a:spcPts val="600"/>
+              </a:spcAft>
+            </a:pPr>
+            <a:r>
+              <a:rPr sz="1200" b="0" i="0">
+                <a:solidFill>
+                  <a:srgbClr val="5A5A66"/>
+                </a:solidFill>
+                <a:latin typeface="Calibri"/>
+              </a:rPr>
+              <a:t>no internet, ever</a:t>
+            </a:r>
+          </a:p>
+        </p:txBody>
+      </p:sp>
+      <p:sp>
+        <p:nvSpPr>
+          <p:cNvPr id="7" name="Rounded Rectangle 6"/>
+          <p:cNvSpPr/>
+          <p:nvPr/>
+        </p:nvSpPr>
+        <p:spPr>
+          <a:xfrm>
+            <a:off x="3456432" y="3977639"/>
+            <a:ext cx="2697480" cy="1554480"/>
+          </a:xfrm>
+          <a:prstGeom prst="roundRect">
+            <a:avLst/>
+          </a:prstGeom>
+          <a:solidFill>
+            <a:srgbClr val="F1EEFC"/>
+          </a:solidFill>
+          <a:ln>
+            <a:noFill/>
+          </a:ln>
+          <a:effectLst/>
+        </p:spPr>
+        <p:style>
+          <a:lnRef idx="1">
+            <a:schemeClr val="accent1"/>
+          </a:lnRef>
+          <a:fillRef idx="3">
+            <a:schemeClr val="accent1"/>
+          </a:fillRef>
+          <a:effectRef idx="2">
+            <a:schemeClr val="accent1"/>
+          </a:effectRef>
+          <a:fontRef idx="minor">
+            <a:schemeClr val="lt1"/>
+          </a:fontRef>
+        </p:style>
+        <p:txBody>
+          <a:bodyPr rtlCol="0" anchor="ctr" wrap="square" tIns="182880" lIns="146304"/>
+          <a:lstStyle/>
+          <a:p>
+            <a:pPr algn="l">
+              <a:spcAft>
+                <a:spcPts val="300"/>
+              </a:spcAft>
+            </a:pPr>
+            <a:r>
+              <a:rPr sz="1800" b="1" i="0">
+                <a:solidFill>
+                  <a:srgbClr val="0E809B"/>
+                </a:solidFill>
+                <a:latin typeface="Calibri"/>
+              </a:rPr>
+              <a:t>Mother-tongue</a:t>
+            </a:r>
+          </a:p>
+          <a:p>
+            <a:pPr algn="l">
+              <a:spcAft>
+                <a:spcPts val="600"/>
+              </a:spcAft>
+            </a:pPr>
+            <a:r>
+              <a:rPr sz="1200" b="0" i="0">
+                <a:solidFill>
+                  <a:srgbClr val="5A5A66"/>
+                </a:solidFill>
+                <a:latin typeface="Calibri"/>
+              </a:rPr>
+              <a:t>incl. Iban, Cebuano</a:t>
+            </a:r>
+          </a:p>
+        </p:txBody>
+      </p:sp>
+      <p:sp>
+        <p:nvSpPr>
+          <p:cNvPr id="8" name="Rounded Rectangle 7"/>
+          <p:cNvSpPr/>
+          <p:nvPr/>
+        </p:nvSpPr>
+        <p:spPr>
+          <a:xfrm>
+            <a:off x="6272784" y="3977639"/>
+            <a:ext cx="2697480" cy="1554480"/>
+          </a:xfrm>
+          <a:prstGeom prst="roundRect">
+            <a:avLst/>
+          </a:prstGeom>
+          <a:solidFill>
+            <a:srgbClr val="F1EEFC"/>
+          </a:solidFill>
+          <a:ln>
+            <a:noFill/>
+          </a:ln>
+          <a:effectLst/>
+        </p:spPr>
+        <p:style>
+          <a:lnRef idx="1">
+            <a:schemeClr val="accent1"/>
+          </a:lnRef>
+          <a:fillRef idx="3">
+            <a:schemeClr val="accent1"/>
+          </a:fillRef>
+          <a:effectRef idx="2">
+            <a:schemeClr val="accent1"/>
+          </a:effectRef>
+          <a:fontRef idx="minor">
+            <a:schemeClr val="lt1"/>
+          </a:fontRef>
+        </p:style>
+        <p:txBody>
+          <a:bodyPr rtlCol="0" anchor="ctr" wrap="square" tIns="182880" lIns="146304"/>
+          <a:lstStyle/>
+          <a:p>
+            <a:pPr algn="l">
+              <a:spcAft>
+                <a:spcPts val="300"/>
+              </a:spcAft>
+            </a:pPr>
+            <a:r>
+              <a:rPr sz="1800" b="1" i="0">
+                <a:solidFill>
+                  <a:srgbClr val="1E8E3E"/>
+                </a:solidFill>
+                <a:latin typeface="Calibri"/>
+              </a:rPr>
+              <a:t>Grounded</a:t>
+            </a:r>
+          </a:p>
+          <a:p>
+            <a:pPr algn="l">
+              <a:spcAft>
+                <a:spcPts val="600"/>
+              </a:spcAft>
+            </a:pPr>
+            <a:r>
+              <a:rPr sz="1200" b="0" i="0">
+                <a:solidFill>
+                  <a:srgbClr val="5A5A66"/>
+                </a:solidFill>
+                <a:latin typeface="Calibri"/>
+              </a:rPr>
+              <a:t>0% hallucination</a:t>
+            </a:r>
+          </a:p>
+        </p:txBody>
+      </p:sp>
+      <p:sp>
+        <p:nvSpPr>
+          <p:cNvPr id="9" name="Rounded Rectangle 8"/>
+          <p:cNvSpPr/>
+          <p:nvPr/>
+        </p:nvSpPr>
+        <p:spPr>
+          <a:xfrm>
+            <a:off x="9089136" y="3977639"/>
+            <a:ext cx="2697480" cy="1554480"/>
+          </a:xfrm>
+          <a:prstGeom prst="roundRect">
+            <a:avLst/>
+          </a:prstGeom>
+          <a:solidFill>
+            <a:srgbClr val="F1EEFC"/>
+          </a:solidFill>
+          <a:ln>
+            <a:noFill/>
+          </a:ln>
+          <a:effectLst/>
+        </p:spPr>
+        <p:style>
+          <a:lnRef idx="1">
+            <a:schemeClr val="accent1"/>
+          </a:lnRef>
+          <a:fillRef idx="3">
+            <a:schemeClr val="accent1"/>
+          </a:fillRef>
+          <a:effectRef idx="2">
+            <a:schemeClr val="accent1"/>
+          </a:effectRef>
+          <a:fontRef idx="minor">
+            <a:schemeClr val="lt1"/>
+          </a:fontRef>
+        </p:style>
+        <p:txBody>
+          <a:bodyPr rtlCol="0" anchor="ctr" wrap="square" tIns="182880" lIns="146304"/>
+          <a:lstStyle/>
+          <a:p>
+            <a:pPr algn="l">
+              <a:spcAft>
+                <a:spcPts val="300"/>
+              </a:spcAft>
+            </a:pPr>
+            <a:r>
+              <a:rPr sz="1800" b="1" i="0">
+                <a:solidFill>
+                  <a:srgbClr val="B06000"/>
+                </a:solidFill>
+                <a:latin typeface="Calibri"/>
+              </a:rPr>
+              <a:t>$0.60 / student / yr</a:t>
+            </a:r>
+          </a:p>
+          <a:p>
+            <a:pPr algn="l">
+              <a:spcAft>
+                <a:spcPts val="600"/>
+              </a:spcAft>
+            </a:pPr>
+            <a:r>
+              <a:rPr sz="1200" b="0" i="0">
+                <a:solidFill>
+                  <a:srgbClr val="5A5A66"/>
+                </a:solidFill>
+                <a:latin typeface="Calibri"/>
+              </a:rPr>
+              <a:t>solar, no cloud fees</a:t>
             </a:r>
           </a:p>
         </p:txBody>
@@ -5327,7 +8556,7 @@
         <p:spPr>
           <a:xfrm>
             <a:off x="0" y="0"/>
-            <a:ext cx="201168" cy="6858000"/>
+            <a:ext cx="164592" cy="6858000"/>
           </a:xfrm>
           <a:prstGeom prst="rect">
             <a:avLst/>
@@ -5338,6 +8567,7 @@
           <a:ln>
             <a:noFill/>
           </a:ln>
+          <a:effectLst/>
         </p:spPr>
         <p:style>
           <a:lnRef idx="1">
@@ -5369,8 +8599,8 @@
         </p:nvSpPr>
         <p:spPr>
           <a:xfrm>
-            <a:off x="548640" y="411480"/>
-            <a:ext cx="11155680" cy="914400"/>
+            <a:off x="548640" y="365760"/>
+            <a:ext cx="11338560" cy="1005840"/>
           </a:xfrm>
           <a:prstGeom prst="rect">
             <a:avLst/>
@@ -5378,32 +8608,40 @@
           <a:noFill/>
         </p:spPr>
         <p:txBody>
-          <a:bodyPr wrap="square">
+          <a:bodyPr wrap="square" anchor="t">
             <a:spAutoFit/>
           </a:bodyPr>
           <a:lstStyle/>
           <a:p>
-            <a:pPr algn="l"/>
+            <a:pPr algn="l">
+              <a:spcAft>
+                <a:spcPts val="200"/>
+              </a:spcAft>
+            </a:pPr>
+            <a:r>
+              <a:rPr sz="1300" b="1" i="0">
+                <a:solidFill>
+                  <a:srgbClr val="5B3FE0"/>
+                </a:solidFill>
+                <a:latin typeface="Calibri"/>
+              </a:rPr>
+              <a:t>COMPETITIVE ADVANTAGE</a:t>
+            </a:r>
+          </a:p>
+          <a:p>
+            <a:pPr algn="l">
+              <a:spcAft>
+                <a:spcPts val="600"/>
+              </a:spcAft>
+            </a:pPr>
             <a:r>
               <a:rPr sz="3000" b="1" i="0">
                 <a:solidFill>
-                  <a:srgbClr val="5B3FE0"/>
-                </a:solidFill>
-                <a:latin typeface="Calibri"/>
-              </a:rPr>
-              <a:t>Competitive Advantage</a:t>
-            </a:r>
-          </a:p>
-          <a:p>
-            <a:pPr algn="l"/>
-            <a:r>
-              <a:rPr sz="1500" b="0" i="1">
-                <a:solidFill>
-                  <a:srgbClr val="555560"/>
-                </a:solidFill>
-                <a:latin typeface="Calibri"/>
-              </a:rPr>
-              <a:t>What makes Edge unique</a:t>
+                  <a:srgbClr val="1E1E28"/>
+                </a:solidFill>
+                <a:latin typeface="Calibri"/>
+              </a:rPr>
+              <a:t>Why Edge, not the cloud</a:t>
             </a:r>
           </a:p>
         </p:txBody>
@@ -5416,8 +8654,8 @@
         </p:nvSpPr>
         <p:spPr>
           <a:xfrm>
-            <a:off x="640080" y="1554480"/>
-            <a:ext cx="10972800" cy="4846320"/>
+            <a:off x="548640" y="6419088"/>
+            <a:ext cx="11064240" cy="365760"/>
           </a:xfrm>
           <a:prstGeom prst="rect">
             <a:avLst/>
@@ -5425,24 +8663,167 @@
           <a:noFill/>
         </p:spPr>
         <p:txBody>
-          <a:bodyPr wrap="square">
+          <a:bodyPr wrap="square" anchor="t">
             <a:spAutoFit/>
           </a:bodyPr>
           <a:lstStyle/>
           <a:p>
             <a:pPr algn="l">
               <a:spcAft>
+                <a:spcPts val="600"/>
+              </a:spcAft>
+            </a:pPr>
+            <a:r>
+              <a:rPr sz="1000" b="0" i="0">
+                <a:solidFill>
+                  <a:srgbClr val="5A5A66"/>
+                </a:solidFill>
+                <a:latin typeface="Calibri"/>
+              </a:rPr>
+              <a:t>Edge — AI Education at the Last Mile   ·   UM-Gunners</a:t>
+            </a:r>
+          </a:p>
+        </p:txBody>
+      </p:sp>
+      <p:sp>
+        <p:nvSpPr>
+          <p:cNvPr id="5" name="Rounded Rectangle 4"/>
+          <p:cNvSpPr/>
+          <p:nvPr/>
+        </p:nvSpPr>
+        <p:spPr>
+          <a:xfrm>
+            <a:off x="640080" y="1645920"/>
+            <a:ext cx="5349240" cy="4297680"/>
+          </a:xfrm>
+          <a:prstGeom prst="roundRect">
+            <a:avLst/>
+          </a:prstGeom>
+          <a:solidFill>
+            <a:srgbClr val="F1EEFC"/>
+          </a:solidFill>
+          <a:ln>
+            <a:noFill/>
+          </a:ln>
+          <a:effectLst/>
+        </p:spPr>
+        <p:style>
+          <a:lnRef idx="1">
+            <a:schemeClr val="accent1"/>
+          </a:lnRef>
+          <a:fillRef idx="3">
+            <a:schemeClr val="accent1"/>
+          </a:fillRef>
+          <a:effectRef idx="2">
+            <a:schemeClr val="accent1"/>
+          </a:effectRef>
+          <a:fontRef idx="minor">
+            <a:schemeClr val="lt1"/>
+          </a:fontRef>
+        </p:style>
+        <p:txBody>
+          <a:bodyPr rtlCol="0" anchor="ctr"/>
+          <a:lstStyle/>
+          <a:p>
+            <a:pPr algn="ctr"/>
+          </a:p>
+        </p:txBody>
+      </p:sp>
+      <p:sp>
+        <p:nvSpPr>
+          <p:cNvPr id="6" name="Rounded Rectangle 5"/>
+          <p:cNvSpPr/>
+          <p:nvPr/>
+        </p:nvSpPr>
+        <p:spPr>
+          <a:xfrm>
+            <a:off x="6217920" y="1645920"/>
+            <a:ext cx="5349240" cy="4297680"/>
+          </a:xfrm>
+          <a:prstGeom prst="roundRect">
+            <a:avLst/>
+          </a:prstGeom>
+          <a:solidFill>
+            <a:srgbClr val="EAF6EE"/>
+          </a:solidFill>
+          <a:ln>
+            <a:noFill/>
+          </a:ln>
+          <a:effectLst/>
+        </p:spPr>
+        <p:style>
+          <a:lnRef idx="1">
+            <a:schemeClr val="accent1"/>
+          </a:lnRef>
+          <a:fillRef idx="3">
+            <a:schemeClr val="accent1"/>
+          </a:fillRef>
+          <a:effectRef idx="2">
+            <a:schemeClr val="accent1"/>
+          </a:effectRef>
+          <a:fontRef idx="minor">
+            <a:schemeClr val="lt1"/>
+          </a:fontRef>
+        </p:style>
+        <p:txBody>
+          <a:bodyPr rtlCol="0" anchor="ctr"/>
+          <a:lstStyle/>
+          <a:p>
+            <a:pPr algn="ctr"/>
+          </a:p>
+        </p:txBody>
+      </p:sp>
+      <p:sp>
+        <p:nvSpPr>
+          <p:cNvPr id="7" name="TextBox 6"/>
+          <p:cNvSpPr txBox="1"/>
+          <p:nvPr/>
+        </p:nvSpPr>
+        <p:spPr>
+          <a:xfrm>
+            <a:off x="868680" y="1828800"/>
+            <a:ext cx="4937760" cy="3931920"/>
+          </a:xfrm>
+          <a:prstGeom prst="rect">
+            <a:avLst/>
+          </a:prstGeom>
+          <a:noFill/>
+        </p:spPr>
+        <p:txBody>
+          <a:bodyPr wrap="square" anchor="t">
+            <a:spAutoFit/>
+          </a:bodyPr>
+          <a:lstStyle/>
+          <a:p>
+            <a:pPr algn="l">
+              <a:spcAft>
+                <a:spcPts val="1000"/>
+              </a:spcAft>
+            </a:pPr>
+            <a:r>
+              <a:rPr sz="1800" b="1" i="0">
+                <a:solidFill>
+                  <a:srgbClr val="5A5A66"/>
+                </a:solidFill>
+                <a:latin typeface="Calibri"/>
+              </a:rPr>
+              <a:t>Cloud AI (ChatGPT…)</a:t>
+            </a:r>
+          </a:p>
+          <a:p>
+            <a:pPr algn="l">
+              <a:spcAft>
                 <a:spcPts val="800"/>
               </a:spcAft>
             </a:pPr>
             <a:r>
-              <a:rPr sz="1900" b="0" i="0">
-                <a:solidFill>
-                  <a:srgbClr val="202028"/>
-                </a:solidFill>
-                <a:latin typeface="Calibri"/>
-              </a:rPr>
-              <a:t>•  100% offline — works where cloud LLMs cannot</a:t>
+              <a:rPr sz="1400" b="0" i="0">
+                <a:solidFill>
+                  <a:srgbClr val="5A5A66"/>
+                </a:solidFill>
+                <a:latin typeface="Calibri"/>
+              </a:rPr>
+              <a:t>✕  Needs constant internet</a:t>
             </a:r>
           </a:p>
           <a:p>
@@ -5452,13 +8833,13 @@
               </a:spcAft>
             </a:pPr>
             <a:r>
-              <a:rPr sz="1900" b="0" i="0">
-                <a:solidFill>
-                  <a:srgbClr val="202028"/>
-                </a:solidFill>
-                <a:latin typeface="Calibri"/>
-              </a:rPr>
-              <a:t>•  Mother-tongue incl. low-resource languages (Iban, Cebuano) excluded from mainstream models</a:t>
+              <a:rPr sz="1400" b="0" i="0">
+                <a:solidFill>
+                  <a:srgbClr val="5A5A66"/>
+                </a:solidFill>
+                <a:latin typeface="Calibri"/>
+              </a:rPr>
+              <a:t>✕  Recurring subscription cost</a:t>
             </a:r>
           </a:p>
           <a:p>
@@ -5468,13 +8849,13 @@
               </a:spcAft>
             </a:pPr>
             <a:r>
-              <a:rPr sz="1900" b="0" i="0">
-                <a:solidFill>
-                  <a:srgbClr val="202028"/>
-                </a:solidFill>
-                <a:latin typeface="Calibri"/>
-              </a:rPr>
-              <a:t>•  Curriculum-grounded → measured 0% hallucination / false-grounding</a:t>
+              <a:rPr sz="1400" b="0" i="0">
+                <a:solidFill>
+                  <a:srgbClr val="5A5A66"/>
+                </a:solidFill>
+                <a:latin typeface="Calibri"/>
+              </a:rPr>
+              <a:t>✕  Dominant languages only</a:t>
             </a:r>
           </a:p>
           <a:p>
@@ -5484,13 +8865,13 @@
               </a:spcAft>
             </a:pPr>
             <a:r>
-              <a:rPr sz="1900" b="0" i="0">
-                <a:solidFill>
-                  <a:srgbClr val="202028"/>
-                </a:solidFill>
-                <a:latin typeface="Calibri"/>
-              </a:rPr>
-              <a:t>•  Tiered response + confidence transparency — usable without over-restricting</a:t>
+              <a:rPr sz="1400" b="0" i="0">
+                <a:solidFill>
+                  <a:srgbClr val="5A5A66"/>
+                </a:solidFill>
+                <a:latin typeface="Calibri"/>
+              </a:rPr>
+              <a:t>✕  Ungrounded — hallucinates</a:t>
             </a:r>
           </a:p>
           <a:p>
@@ -5500,13 +8881,132 @@
               </a:spcAft>
             </a:pPr>
             <a:r>
-              <a:rPr sz="1900" b="0" i="0">
-                <a:solidFill>
-                  <a:srgbClr val="202028"/>
-                </a:solidFill>
-                <a:latin typeface="Calibri"/>
-              </a:rPr>
-              <a:t>•  Solar-powered, low-cost hardware, zero recurring fees</a:t>
+              <a:rPr sz="1400" b="0" i="0">
+                <a:solidFill>
+                  <a:srgbClr val="5A5A66"/>
+                </a:solidFill>
+                <a:latin typeface="Calibri"/>
+              </a:rPr>
+              <a:t>✕  No teacher analytics / governance</a:t>
+            </a:r>
+          </a:p>
+        </p:txBody>
+      </p:sp>
+      <p:sp>
+        <p:nvSpPr>
+          <p:cNvPr id="8" name="TextBox 7"/>
+          <p:cNvSpPr txBox="1"/>
+          <p:nvPr/>
+        </p:nvSpPr>
+        <p:spPr>
+          <a:xfrm>
+            <a:off x="6446520" y="1828800"/>
+            <a:ext cx="4937760" cy="3931920"/>
+          </a:xfrm>
+          <a:prstGeom prst="rect">
+            <a:avLst/>
+          </a:prstGeom>
+          <a:noFill/>
+        </p:spPr>
+        <p:txBody>
+          <a:bodyPr wrap="square" anchor="t">
+            <a:spAutoFit/>
+          </a:bodyPr>
+          <a:lstStyle/>
+          <a:p>
+            <a:pPr algn="l">
+              <a:spcAft>
+                <a:spcPts val="1000"/>
+              </a:spcAft>
+            </a:pPr>
+            <a:r>
+              <a:rPr sz="1800" b="1" i="0">
+                <a:solidFill>
+                  <a:srgbClr val="1E8E3E"/>
+                </a:solidFill>
+                <a:latin typeface="Calibri"/>
+              </a:rPr>
+              <a:t>Edge</a:t>
+            </a:r>
+          </a:p>
+          <a:p>
+            <a:pPr algn="l">
+              <a:spcAft>
+                <a:spcPts val="800"/>
+              </a:spcAft>
+            </a:pPr>
+            <a:r>
+              <a:rPr sz="1400" b="0" i="0">
+                <a:solidFill>
+                  <a:srgbClr val="1E1E28"/>
+                </a:solidFill>
+                <a:latin typeface="Calibri"/>
+              </a:rPr>
+              <a:t>✓  Runs 100% offline on solar</a:t>
+            </a:r>
+          </a:p>
+          <a:p>
+            <a:pPr algn="l">
+              <a:spcAft>
+                <a:spcPts val="800"/>
+              </a:spcAft>
+            </a:pPr>
+            <a:r>
+              <a:rPr sz="1400" b="0" i="0">
+                <a:solidFill>
+                  <a:srgbClr val="1E1E28"/>
+                </a:solidFill>
+                <a:latin typeface="Calibri"/>
+              </a:rPr>
+              <a:t>✓  ≈$0.60/student/yr, no fees</a:t>
+            </a:r>
+          </a:p>
+          <a:p>
+            <a:pPr algn="l">
+              <a:spcAft>
+                <a:spcPts val="800"/>
+              </a:spcAft>
+            </a:pPr>
+            <a:r>
+              <a:rPr sz="1400" b="0" i="0">
+                <a:solidFill>
+                  <a:srgbClr val="1E1E28"/>
+                </a:solidFill>
+                <a:latin typeface="Calibri"/>
+              </a:rPr>
+              <a:t>✓  Mother-tongue incl. low-resource</a:t>
+            </a:r>
+          </a:p>
+          <a:p>
+            <a:pPr algn="l">
+              <a:spcAft>
+                <a:spcPts val="800"/>
+              </a:spcAft>
+            </a:pPr>
+            <a:r>
+              <a:rPr sz="1400" b="0" i="0">
+                <a:solidFill>
+                  <a:srgbClr val="1E1E28"/>
+                </a:solidFill>
+                <a:latin typeface="Calibri"/>
+              </a:rPr>
+              <a:t>✓  Curriculum-grounded, 0% false-grounding</a:t>
+            </a:r>
+          </a:p>
+          <a:p>
+            <a:pPr algn="l">
+              <a:spcAft>
+                <a:spcPts val="800"/>
+              </a:spcAft>
+            </a:pPr>
+            <a:r>
+              <a:rPr sz="1400" b="0" i="0">
+                <a:solidFill>
+                  <a:srgbClr val="1E1E28"/>
+                </a:solidFill>
+                <a:latin typeface="Calibri"/>
+              </a:rPr>
+              <a:t>✓  Teacher dashboard + full governance</a:t>
             </a:r>
           </a:p>
         </p:txBody>
@@ -5546,7 +9046,7 @@
         <p:spPr>
           <a:xfrm>
             <a:off x="0" y="0"/>
-            <a:ext cx="201168" cy="6858000"/>
+            <a:ext cx="164592" cy="6858000"/>
           </a:xfrm>
           <a:prstGeom prst="rect">
             <a:avLst/>
@@ -5557,6 +9057,7 @@
           <a:ln>
             <a:noFill/>
           </a:ln>
+          <a:effectLst/>
         </p:spPr>
         <p:style>
           <a:lnRef idx="1">
@@ -5588,8 +9089,8 @@
         </p:nvSpPr>
         <p:spPr>
           <a:xfrm>
-            <a:off x="548640" y="411480"/>
-            <a:ext cx="11155680" cy="914400"/>
+            <a:off x="548640" y="365760"/>
+            <a:ext cx="11338560" cy="1005840"/>
           </a:xfrm>
           <a:prstGeom prst="rect">
             <a:avLst/>
@@ -5597,32 +9098,40 @@
           <a:noFill/>
         </p:spPr>
         <p:txBody>
-          <a:bodyPr wrap="square">
+          <a:bodyPr wrap="square" anchor="t">
             <a:spAutoFit/>
           </a:bodyPr>
           <a:lstStyle/>
           <a:p>
-            <a:pPr algn="l"/>
+            <a:pPr algn="l">
+              <a:spcAft>
+                <a:spcPts val="200"/>
+              </a:spcAft>
+            </a:pPr>
+            <a:r>
+              <a:rPr sz="1300" b="1" i="0">
+                <a:solidFill>
+                  <a:srgbClr val="5B3FE0"/>
+                </a:solidFill>
+                <a:latin typeface="Calibri"/>
+              </a:rPr>
+              <a:t>TECHNICAL ARCHITECTURE</a:t>
+            </a:r>
+          </a:p>
+          <a:p>
+            <a:pPr algn="l">
+              <a:spcAft>
+                <a:spcPts val="600"/>
+              </a:spcAft>
+            </a:pPr>
             <a:r>
               <a:rPr sz="3000" b="1" i="0">
                 <a:solidFill>
-                  <a:srgbClr val="5B3FE0"/>
-                </a:solidFill>
-                <a:latin typeface="Calibri"/>
-              </a:rPr>
-              <a:t>Technical Architecture</a:t>
-            </a:r>
-          </a:p>
-          <a:p>
-            <a:pPr algn="l"/>
-            <a:r>
-              <a:rPr sz="1500" b="0" i="1">
-                <a:solidFill>
-                  <a:srgbClr val="555560"/>
-                </a:solidFill>
-                <a:latin typeface="Calibri"/>
-              </a:rPr>
-              <a:t>Inputs → AI processing → outputs (see diagram)</a:t>
+                  <a:srgbClr val="1E1E28"/>
+                </a:solidFill>
+                <a:latin typeface="Calibri"/>
+              </a:rPr>
+              <a:t>A 4-agent offline Agentic RAG pipeline</a:t>
             </a:r>
           </a:p>
         </p:txBody>
@@ -5635,8 +9144,8 @@
         </p:nvSpPr>
         <p:spPr>
           <a:xfrm>
-            <a:off x="640080" y="1554480"/>
-            <a:ext cx="10972800" cy="4846320"/>
+            <a:off x="548640" y="6419088"/>
+            <a:ext cx="11064240" cy="365760"/>
           </a:xfrm>
           <a:prstGeom prst="rect">
             <a:avLst/>
@@ -5644,72 +9153,896 @@
           <a:noFill/>
         </p:spPr>
         <p:txBody>
-          <a:bodyPr wrap="square">
+          <a:bodyPr wrap="square" anchor="t">
             <a:spAutoFit/>
           </a:bodyPr>
           <a:lstStyle/>
           <a:p>
             <a:pPr algn="l">
               <a:spcAft>
-                <a:spcPts val="800"/>
-              </a:spcAft>
-            </a:pPr>
-            <a:r>
-              <a:rPr sz="1900" b="0" i="0">
-                <a:solidFill>
-                  <a:srgbClr val="202028"/>
-                </a:solidFill>
-                <a:latin typeface="Calibri"/>
-              </a:rPr>
-              <a:t>•  Inputs: voice/text queries (English + dialects), curriculum vector store, student profiles</a:t>
-            </a:r>
-          </a:p>
-          <a:p>
-            <a:pPr algn="l">
-              <a:spcAft>
-                <a:spcPts val="800"/>
-              </a:spcAft>
-            </a:pPr>
-            <a:r>
-              <a:rPr sz="1900" b="0" i="0">
-                <a:solidFill>
-                  <a:srgbClr val="202028"/>
-                </a:solidFill>
-                <a:latin typeface="Calibri"/>
-              </a:rPr>
-              <a:t>•  Processing (100% offline): 4-agent Agentic RAG — Translation, Personalised Context, Pedagogical Reasoning, Verification — with cross-lingual retrieval</a:t>
-            </a:r>
-          </a:p>
-          <a:p>
-            <a:pPr algn="l">
-              <a:spcAft>
-                <a:spcPts val="800"/>
-              </a:spcAft>
-            </a:pPr>
-            <a:r>
-              <a:rPr sz="1900" b="0" i="0">
-                <a:solidFill>
-                  <a:srgbClr val="202028"/>
-                </a:solidFill>
-                <a:latin typeface="Calibri"/>
-              </a:rPr>
-              <a:t>•  Outputs: mother-tongue answers with page-level citations, adaptive quizzes, confidence-coded UI</a:t>
-            </a:r>
-          </a:p>
-          <a:p>
-            <a:pPr algn="l">
-              <a:spcAft>
-                <a:spcPts val="800"/>
-              </a:spcAft>
-            </a:pPr>
-            <a:r>
-              <a:rPr sz="1900" b="0" i="0">
-                <a:solidFill>
-                  <a:srgbClr val="202028"/>
-                </a:solidFill>
-                <a:latin typeface="Calibri"/>
-              </a:rPr>
-              <a:t>•  Hardware: Raspberry Pi + solar + battery + router; two-node split (inference + app) for memory-constrained deployments</a:t>
+                <a:spcPts val="600"/>
+              </a:spcAft>
+            </a:pPr>
+            <a:r>
+              <a:rPr sz="1000" b="0" i="0">
+                <a:solidFill>
+                  <a:srgbClr val="5A5A66"/>
+                </a:solidFill>
+                <a:latin typeface="Calibri"/>
+              </a:rPr>
+              <a:t>Edge — AI Education at the Last Mile   ·   UM-Gunners</a:t>
+            </a:r>
+          </a:p>
+        </p:txBody>
+      </p:sp>
+      <p:sp>
+        <p:nvSpPr>
+          <p:cNvPr id="5" name="Rounded Rectangle 4"/>
+          <p:cNvSpPr/>
+          <p:nvPr/>
+        </p:nvSpPr>
+        <p:spPr>
+          <a:xfrm>
+            <a:off x="640080" y="2377440"/>
+            <a:ext cx="1737360" cy="1463040"/>
+          </a:xfrm>
+          <a:prstGeom prst="roundRect">
+            <a:avLst/>
+          </a:prstGeom>
+          <a:solidFill>
+            <a:srgbClr val="0E809B"/>
+          </a:solidFill>
+          <a:ln>
+            <a:noFill/>
+          </a:ln>
+          <a:effectLst/>
+        </p:spPr>
+        <p:style>
+          <a:lnRef idx="1">
+            <a:schemeClr val="accent1"/>
+          </a:lnRef>
+          <a:fillRef idx="3">
+            <a:schemeClr val="accent1"/>
+          </a:fillRef>
+          <a:effectRef idx="2">
+            <a:schemeClr val="accent1"/>
+          </a:effectRef>
+          <a:fontRef idx="minor">
+            <a:schemeClr val="lt1"/>
+          </a:fontRef>
+        </p:style>
+        <p:txBody>
+          <a:bodyPr rtlCol="0" anchor="ctr"/>
+          <a:lstStyle/>
+          <a:p>
+            <a:pPr algn="ctr"/>
+          </a:p>
+        </p:txBody>
+      </p:sp>
+      <p:sp>
+        <p:nvSpPr>
+          <p:cNvPr id="6" name="TextBox 5"/>
+          <p:cNvSpPr txBox="1"/>
+          <p:nvPr/>
+        </p:nvSpPr>
+        <p:spPr>
+          <a:xfrm>
+            <a:off x="685800" y="2468880"/>
+            <a:ext cx="1645920" cy="1280160"/>
+          </a:xfrm>
+          <a:prstGeom prst="rect">
+            <a:avLst/>
+          </a:prstGeom>
+          <a:noFill/>
+        </p:spPr>
+        <p:txBody>
+          <a:bodyPr wrap="square" anchor="ctr">
+            <a:spAutoFit/>
+          </a:bodyPr>
+          <a:lstStyle/>
+          <a:p>
+            <a:pPr algn="ctr">
+              <a:spcAft>
+                <a:spcPts val="600"/>
+              </a:spcAft>
+            </a:pPr>
+            <a:r>
+              <a:rPr sz="1200" b="1" i="0">
+                <a:solidFill>
+                  <a:srgbClr val="FFFFFF"/>
+                </a:solidFill>
+                <a:latin typeface="Calibri"/>
+              </a:rPr>
+              <a:t>Voice / text</a:t>
+            </a:r>
+            <a:br/>
+            <a:r>
+              <a:t>query</a:t>
+            </a:r>
+            <a:br/>
+            <a:r>
+              <a:t>(dialect)</a:t>
+            </a:r>
+          </a:p>
+        </p:txBody>
+      </p:sp>
+      <p:sp>
+        <p:nvSpPr>
+          <p:cNvPr id="7" name="Right Arrow 6"/>
+          <p:cNvSpPr/>
+          <p:nvPr/>
+        </p:nvSpPr>
+        <p:spPr>
+          <a:xfrm>
+            <a:off x="2359152" y="2880360"/>
+            <a:ext cx="365760" cy="457200"/>
+          </a:xfrm>
+          <a:prstGeom prst="rightArrow">
+            <a:avLst/>
+          </a:prstGeom>
+          <a:solidFill>
+            <a:srgbClr val="5B3FE0"/>
+          </a:solidFill>
+          <a:ln>
+            <a:noFill/>
+          </a:ln>
+          <a:effectLst/>
+        </p:spPr>
+        <p:style>
+          <a:lnRef idx="1">
+            <a:schemeClr val="accent1"/>
+          </a:lnRef>
+          <a:fillRef idx="3">
+            <a:schemeClr val="accent1"/>
+          </a:fillRef>
+          <a:effectRef idx="2">
+            <a:schemeClr val="accent1"/>
+          </a:effectRef>
+          <a:fontRef idx="minor">
+            <a:schemeClr val="lt1"/>
+          </a:fontRef>
+        </p:style>
+        <p:txBody>
+          <a:bodyPr rtlCol="0" anchor="ctr"/>
+          <a:lstStyle/>
+          <a:p>
+            <a:pPr algn="ctr"/>
+          </a:p>
+        </p:txBody>
+      </p:sp>
+      <p:sp>
+        <p:nvSpPr>
+          <p:cNvPr id="8" name="Rounded Rectangle 7"/>
+          <p:cNvSpPr/>
+          <p:nvPr/>
+        </p:nvSpPr>
+        <p:spPr>
+          <a:xfrm>
+            <a:off x="2743200" y="2377440"/>
+            <a:ext cx="1600200" cy="1463040"/>
+          </a:xfrm>
+          <a:prstGeom prst="roundRect">
+            <a:avLst/>
+          </a:prstGeom>
+          <a:solidFill>
+            <a:srgbClr val="5B3FE0"/>
+          </a:solidFill>
+          <a:ln>
+            <a:noFill/>
+          </a:ln>
+          <a:effectLst/>
+        </p:spPr>
+        <p:style>
+          <a:lnRef idx="1">
+            <a:schemeClr val="accent1"/>
+          </a:lnRef>
+          <a:fillRef idx="3">
+            <a:schemeClr val="accent1"/>
+          </a:fillRef>
+          <a:effectRef idx="2">
+            <a:schemeClr val="accent1"/>
+          </a:effectRef>
+          <a:fontRef idx="minor">
+            <a:schemeClr val="lt1"/>
+          </a:fontRef>
+        </p:style>
+        <p:txBody>
+          <a:bodyPr rtlCol="0" anchor="ctr"/>
+          <a:lstStyle/>
+          <a:p>
+            <a:pPr algn="ctr"/>
+          </a:p>
+        </p:txBody>
+      </p:sp>
+      <p:sp>
+        <p:nvSpPr>
+          <p:cNvPr id="9" name="TextBox 8"/>
+          <p:cNvSpPr txBox="1"/>
+          <p:nvPr/>
+        </p:nvSpPr>
+        <p:spPr>
+          <a:xfrm>
+            <a:off x="2743200" y="2468880"/>
+            <a:ext cx="1600200" cy="1280160"/>
+          </a:xfrm>
+          <a:prstGeom prst="rect">
+            <a:avLst/>
+          </a:prstGeom>
+          <a:noFill/>
+        </p:spPr>
+        <p:txBody>
+          <a:bodyPr wrap="square" anchor="ctr">
+            <a:spAutoFit/>
+          </a:bodyPr>
+          <a:lstStyle/>
+          <a:p>
+            <a:pPr algn="ctr">
+              <a:spcAft>
+                <a:spcPts val="600"/>
+              </a:spcAft>
+            </a:pPr>
+            <a:r>
+              <a:rPr sz="1200" b="1" i="0">
+                <a:solidFill>
+                  <a:srgbClr val="FFFFFF"/>
+                </a:solidFill>
+                <a:latin typeface="Calibri"/>
+              </a:rPr>
+              <a:t>1. Translation</a:t>
+            </a:r>
+            <a:br/>
+            <a:r>
+              <a:t>Agent</a:t>
+            </a:r>
+          </a:p>
+        </p:txBody>
+      </p:sp>
+      <p:sp>
+        <p:nvSpPr>
+          <p:cNvPr id="10" name="Right Arrow 9"/>
+          <p:cNvSpPr/>
+          <p:nvPr/>
+        </p:nvSpPr>
+        <p:spPr>
+          <a:xfrm>
+            <a:off x="4352544" y="2880360"/>
+            <a:ext cx="365760" cy="457200"/>
+          </a:xfrm>
+          <a:prstGeom prst="rightArrow">
+            <a:avLst/>
+          </a:prstGeom>
+          <a:solidFill>
+            <a:srgbClr val="5B3FE0"/>
+          </a:solidFill>
+          <a:ln>
+            <a:noFill/>
+          </a:ln>
+          <a:effectLst/>
+        </p:spPr>
+        <p:style>
+          <a:lnRef idx="1">
+            <a:schemeClr val="accent1"/>
+          </a:lnRef>
+          <a:fillRef idx="3">
+            <a:schemeClr val="accent1"/>
+          </a:fillRef>
+          <a:effectRef idx="2">
+            <a:schemeClr val="accent1"/>
+          </a:effectRef>
+          <a:fontRef idx="minor">
+            <a:schemeClr val="lt1"/>
+          </a:fontRef>
+        </p:style>
+        <p:txBody>
+          <a:bodyPr rtlCol="0" anchor="ctr"/>
+          <a:lstStyle/>
+          <a:p>
+            <a:pPr algn="ctr"/>
+          </a:p>
+        </p:txBody>
+      </p:sp>
+      <p:sp>
+        <p:nvSpPr>
+          <p:cNvPr id="11" name="Rounded Rectangle 10"/>
+          <p:cNvSpPr/>
+          <p:nvPr/>
+        </p:nvSpPr>
+        <p:spPr>
+          <a:xfrm>
+            <a:off x="4736592" y="2377440"/>
+            <a:ext cx="1600200" cy="1463040"/>
+          </a:xfrm>
+          <a:prstGeom prst="roundRect">
+            <a:avLst/>
+          </a:prstGeom>
+          <a:solidFill>
+            <a:srgbClr val="3B27A0"/>
+          </a:solidFill>
+          <a:ln>
+            <a:noFill/>
+          </a:ln>
+          <a:effectLst/>
+        </p:spPr>
+        <p:style>
+          <a:lnRef idx="1">
+            <a:schemeClr val="accent1"/>
+          </a:lnRef>
+          <a:fillRef idx="3">
+            <a:schemeClr val="accent1"/>
+          </a:fillRef>
+          <a:effectRef idx="2">
+            <a:schemeClr val="accent1"/>
+          </a:effectRef>
+          <a:fontRef idx="minor">
+            <a:schemeClr val="lt1"/>
+          </a:fontRef>
+        </p:style>
+        <p:txBody>
+          <a:bodyPr rtlCol="0" anchor="ctr"/>
+          <a:lstStyle/>
+          <a:p>
+            <a:pPr algn="ctr"/>
+          </a:p>
+        </p:txBody>
+      </p:sp>
+      <p:sp>
+        <p:nvSpPr>
+          <p:cNvPr id="12" name="TextBox 11"/>
+          <p:cNvSpPr txBox="1"/>
+          <p:nvPr/>
+        </p:nvSpPr>
+        <p:spPr>
+          <a:xfrm>
+            <a:off x="4736592" y="2468880"/>
+            <a:ext cx="1600200" cy="1280160"/>
+          </a:xfrm>
+          <a:prstGeom prst="rect">
+            <a:avLst/>
+          </a:prstGeom>
+          <a:noFill/>
+        </p:spPr>
+        <p:txBody>
+          <a:bodyPr wrap="square" anchor="ctr">
+            <a:spAutoFit/>
+          </a:bodyPr>
+          <a:lstStyle/>
+          <a:p>
+            <a:pPr algn="ctr">
+              <a:spcAft>
+                <a:spcPts val="600"/>
+              </a:spcAft>
+            </a:pPr>
+            <a:r>
+              <a:rPr sz="1200" b="1" i="0">
+                <a:solidFill>
+                  <a:srgbClr val="FFFFFF"/>
+                </a:solidFill>
+                <a:latin typeface="Calibri"/>
+              </a:rPr>
+              <a:t>2. Personalised</a:t>
+            </a:r>
+            <a:br/>
+            <a:r>
+              <a:t>Context</a:t>
+            </a:r>
+          </a:p>
+        </p:txBody>
+      </p:sp>
+      <p:sp>
+        <p:nvSpPr>
+          <p:cNvPr id="13" name="Right Arrow 12"/>
+          <p:cNvSpPr/>
+          <p:nvPr/>
+        </p:nvSpPr>
+        <p:spPr>
+          <a:xfrm>
+            <a:off x="6345936" y="2880360"/>
+            <a:ext cx="365760" cy="457200"/>
+          </a:xfrm>
+          <a:prstGeom prst="rightArrow">
+            <a:avLst/>
+          </a:prstGeom>
+          <a:solidFill>
+            <a:srgbClr val="5B3FE0"/>
+          </a:solidFill>
+          <a:ln>
+            <a:noFill/>
+          </a:ln>
+          <a:effectLst/>
+        </p:spPr>
+        <p:style>
+          <a:lnRef idx="1">
+            <a:schemeClr val="accent1"/>
+          </a:lnRef>
+          <a:fillRef idx="3">
+            <a:schemeClr val="accent1"/>
+          </a:fillRef>
+          <a:effectRef idx="2">
+            <a:schemeClr val="accent1"/>
+          </a:effectRef>
+          <a:fontRef idx="minor">
+            <a:schemeClr val="lt1"/>
+          </a:fontRef>
+        </p:style>
+        <p:txBody>
+          <a:bodyPr rtlCol="0" anchor="ctr"/>
+          <a:lstStyle/>
+          <a:p>
+            <a:pPr algn="ctr"/>
+          </a:p>
+        </p:txBody>
+      </p:sp>
+      <p:sp>
+        <p:nvSpPr>
+          <p:cNvPr id="14" name="Rounded Rectangle 13"/>
+          <p:cNvSpPr/>
+          <p:nvPr/>
+        </p:nvSpPr>
+        <p:spPr>
+          <a:xfrm>
+            <a:off x="6729984" y="2377440"/>
+            <a:ext cx="1600200" cy="1463040"/>
+          </a:xfrm>
+          <a:prstGeom prst="roundRect">
+            <a:avLst/>
+          </a:prstGeom>
+          <a:solidFill>
+            <a:srgbClr val="5B3FE0"/>
+          </a:solidFill>
+          <a:ln>
+            <a:noFill/>
+          </a:ln>
+          <a:effectLst/>
+        </p:spPr>
+        <p:style>
+          <a:lnRef idx="1">
+            <a:schemeClr val="accent1"/>
+          </a:lnRef>
+          <a:fillRef idx="3">
+            <a:schemeClr val="accent1"/>
+          </a:fillRef>
+          <a:effectRef idx="2">
+            <a:schemeClr val="accent1"/>
+          </a:effectRef>
+          <a:fontRef idx="minor">
+            <a:schemeClr val="lt1"/>
+          </a:fontRef>
+        </p:style>
+        <p:txBody>
+          <a:bodyPr rtlCol="0" anchor="ctr"/>
+          <a:lstStyle/>
+          <a:p>
+            <a:pPr algn="ctr"/>
+          </a:p>
+        </p:txBody>
+      </p:sp>
+      <p:sp>
+        <p:nvSpPr>
+          <p:cNvPr id="15" name="TextBox 14"/>
+          <p:cNvSpPr txBox="1"/>
+          <p:nvPr/>
+        </p:nvSpPr>
+        <p:spPr>
+          <a:xfrm>
+            <a:off x="6729984" y="2468880"/>
+            <a:ext cx="1600200" cy="1280160"/>
+          </a:xfrm>
+          <a:prstGeom prst="rect">
+            <a:avLst/>
+          </a:prstGeom>
+          <a:noFill/>
+        </p:spPr>
+        <p:txBody>
+          <a:bodyPr wrap="square" anchor="ctr">
+            <a:spAutoFit/>
+          </a:bodyPr>
+          <a:lstStyle/>
+          <a:p>
+            <a:pPr algn="ctr">
+              <a:spcAft>
+                <a:spcPts val="600"/>
+              </a:spcAft>
+            </a:pPr>
+            <a:r>
+              <a:rPr sz="1200" b="1" i="0">
+                <a:solidFill>
+                  <a:srgbClr val="FFFFFF"/>
+                </a:solidFill>
+                <a:latin typeface="Calibri"/>
+              </a:rPr>
+              <a:t>3. Pedagogical</a:t>
+            </a:r>
+            <a:br/>
+            <a:r>
+              <a:t>Reasoning</a:t>
+            </a:r>
+          </a:p>
+        </p:txBody>
+      </p:sp>
+      <p:sp>
+        <p:nvSpPr>
+          <p:cNvPr id="16" name="Right Arrow 15"/>
+          <p:cNvSpPr/>
+          <p:nvPr/>
+        </p:nvSpPr>
+        <p:spPr>
+          <a:xfrm>
+            <a:off x="8339328" y="2880360"/>
+            <a:ext cx="365760" cy="457200"/>
+          </a:xfrm>
+          <a:prstGeom prst="rightArrow">
+            <a:avLst/>
+          </a:prstGeom>
+          <a:solidFill>
+            <a:srgbClr val="5B3FE0"/>
+          </a:solidFill>
+          <a:ln>
+            <a:noFill/>
+          </a:ln>
+          <a:effectLst/>
+        </p:spPr>
+        <p:style>
+          <a:lnRef idx="1">
+            <a:schemeClr val="accent1"/>
+          </a:lnRef>
+          <a:fillRef idx="3">
+            <a:schemeClr val="accent1"/>
+          </a:fillRef>
+          <a:effectRef idx="2">
+            <a:schemeClr val="accent1"/>
+          </a:effectRef>
+          <a:fontRef idx="minor">
+            <a:schemeClr val="lt1"/>
+          </a:fontRef>
+        </p:style>
+        <p:txBody>
+          <a:bodyPr rtlCol="0" anchor="ctr"/>
+          <a:lstStyle/>
+          <a:p>
+            <a:pPr algn="ctr"/>
+          </a:p>
+        </p:txBody>
+      </p:sp>
+      <p:sp>
+        <p:nvSpPr>
+          <p:cNvPr id="17" name="Rounded Rectangle 16"/>
+          <p:cNvSpPr/>
+          <p:nvPr/>
+        </p:nvSpPr>
+        <p:spPr>
+          <a:xfrm>
+            <a:off x="8723376" y="2377440"/>
+            <a:ext cx="1600200" cy="1463040"/>
+          </a:xfrm>
+          <a:prstGeom prst="roundRect">
+            <a:avLst/>
+          </a:prstGeom>
+          <a:solidFill>
+            <a:srgbClr val="3B27A0"/>
+          </a:solidFill>
+          <a:ln>
+            <a:noFill/>
+          </a:ln>
+          <a:effectLst/>
+        </p:spPr>
+        <p:style>
+          <a:lnRef idx="1">
+            <a:schemeClr val="accent1"/>
+          </a:lnRef>
+          <a:fillRef idx="3">
+            <a:schemeClr val="accent1"/>
+          </a:fillRef>
+          <a:effectRef idx="2">
+            <a:schemeClr val="accent1"/>
+          </a:effectRef>
+          <a:fontRef idx="minor">
+            <a:schemeClr val="lt1"/>
+          </a:fontRef>
+        </p:style>
+        <p:txBody>
+          <a:bodyPr rtlCol="0" anchor="ctr"/>
+          <a:lstStyle/>
+          <a:p>
+            <a:pPr algn="ctr"/>
+          </a:p>
+        </p:txBody>
+      </p:sp>
+      <p:sp>
+        <p:nvSpPr>
+          <p:cNvPr id="18" name="TextBox 17"/>
+          <p:cNvSpPr txBox="1"/>
+          <p:nvPr/>
+        </p:nvSpPr>
+        <p:spPr>
+          <a:xfrm>
+            <a:off x="8723376" y="2468880"/>
+            <a:ext cx="1600200" cy="1280160"/>
+          </a:xfrm>
+          <a:prstGeom prst="rect">
+            <a:avLst/>
+          </a:prstGeom>
+          <a:noFill/>
+        </p:spPr>
+        <p:txBody>
+          <a:bodyPr wrap="square" anchor="ctr">
+            <a:spAutoFit/>
+          </a:bodyPr>
+          <a:lstStyle/>
+          <a:p>
+            <a:pPr algn="ctr">
+              <a:spcAft>
+                <a:spcPts val="600"/>
+              </a:spcAft>
+            </a:pPr>
+            <a:r>
+              <a:rPr sz="1200" b="1" i="0">
+                <a:solidFill>
+                  <a:srgbClr val="FFFFFF"/>
+                </a:solidFill>
+                <a:latin typeface="Calibri"/>
+              </a:rPr>
+              <a:t>4. Verification</a:t>
+            </a:r>
+            <a:br/>
+            <a:r>
+              <a:t>Agent</a:t>
+            </a:r>
+          </a:p>
+        </p:txBody>
+      </p:sp>
+      <p:sp>
+        <p:nvSpPr>
+          <p:cNvPr id="19" name="Right Arrow 18"/>
+          <p:cNvSpPr/>
+          <p:nvPr/>
+        </p:nvSpPr>
+        <p:spPr>
+          <a:xfrm>
+            <a:off x="10332720" y="2880360"/>
+            <a:ext cx="365760" cy="457200"/>
+          </a:xfrm>
+          <a:prstGeom prst="rightArrow">
+            <a:avLst/>
+          </a:prstGeom>
+          <a:solidFill>
+            <a:srgbClr val="1E8E3E"/>
+          </a:solidFill>
+          <a:ln>
+            <a:noFill/>
+          </a:ln>
+          <a:effectLst/>
+        </p:spPr>
+        <p:style>
+          <a:lnRef idx="1">
+            <a:schemeClr val="accent1"/>
+          </a:lnRef>
+          <a:fillRef idx="3">
+            <a:schemeClr val="accent1"/>
+          </a:fillRef>
+          <a:effectRef idx="2">
+            <a:schemeClr val="accent1"/>
+          </a:effectRef>
+          <a:fontRef idx="minor">
+            <a:schemeClr val="lt1"/>
+          </a:fontRef>
+        </p:style>
+        <p:txBody>
+          <a:bodyPr rtlCol="0" anchor="ctr"/>
+          <a:lstStyle/>
+          <a:p>
+            <a:pPr algn="ctr"/>
+          </a:p>
+        </p:txBody>
+      </p:sp>
+      <p:sp>
+        <p:nvSpPr>
+          <p:cNvPr id="20" name="Rounded Rectangle 19"/>
+          <p:cNvSpPr/>
+          <p:nvPr/>
+        </p:nvSpPr>
+        <p:spPr>
+          <a:xfrm>
+            <a:off x="10716768" y="2377440"/>
+            <a:ext cx="1783080" cy="1463040"/>
+          </a:xfrm>
+          <a:prstGeom prst="roundRect">
+            <a:avLst/>
+          </a:prstGeom>
+          <a:solidFill>
+            <a:srgbClr val="1E8E3E"/>
+          </a:solidFill>
+          <a:ln>
+            <a:noFill/>
+          </a:ln>
+          <a:effectLst/>
+        </p:spPr>
+        <p:style>
+          <a:lnRef idx="1">
+            <a:schemeClr val="accent1"/>
+          </a:lnRef>
+          <a:fillRef idx="3">
+            <a:schemeClr val="accent1"/>
+          </a:fillRef>
+          <a:effectRef idx="2">
+            <a:schemeClr val="accent1"/>
+          </a:effectRef>
+          <a:fontRef idx="minor">
+            <a:schemeClr val="lt1"/>
+          </a:fontRef>
+        </p:style>
+        <p:txBody>
+          <a:bodyPr rtlCol="0" anchor="ctr"/>
+          <a:lstStyle/>
+          <a:p>
+            <a:pPr algn="ctr"/>
+          </a:p>
+        </p:txBody>
+      </p:sp>
+      <p:sp>
+        <p:nvSpPr>
+          <p:cNvPr id="21" name="TextBox 20"/>
+          <p:cNvSpPr txBox="1"/>
+          <p:nvPr/>
+        </p:nvSpPr>
+        <p:spPr>
+          <a:xfrm>
+            <a:off x="10716768" y="2468880"/>
+            <a:ext cx="1783080" cy="1280160"/>
+          </a:xfrm>
+          <a:prstGeom prst="rect">
+            <a:avLst/>
+          </a:prstGeom>
+          <a:noFill/>
+        </p:spPr>
+        <p:txBody>
+          <a:bodyPr wrap="square" anchor="ctr">
+            <a:spAutoFit/>
+          </a:bodyPr>
+          <a:lstStyle/>
+          <a:p>
+            <a:pPr algn="ctr">
+              <a:spcAft>
+                <a:spcPts val="600"/>
+              </a:spcAft>
+            </a:pPr>
+            <a:r>
+              <a:rPr sz="1100" b="1" i="0">
+                <a:solidFill>
+                  <a:srgbClr val="FFFFFF"/>
+                </a:solidFill>
+                <a:latin typeface="Calibri"/>
+              </a:rPr>
+              <a:t>Grounded</a:t>
+            </a:r>
+            <a:br/>
+            <a:r>
+              <a:t>mother-tongue</a:t>
+            </a:r>
+            <a:br/>
+            <a:r>
+              <a:t>answer + citations</a:t>
+            </a:r>
+          </a:p>
+        </p:txBody>
+      </p:sp>
+      <p:sp>
+        <p:nvSpPr>
+          <p:cNvPr id="22" name="TextBox 21"/>
+          <p:cNvSpPr txBox="1"/>
+          <p:nvPr/>
+        </p:nvSpPr>
+        <p:spPr>
+          <a:xfrm>
+            <a:off x="640080" y="4160520"/>
+            <a:ext cx="10972800" cy="822960"/>
+          </a:xfrm>
+          <a:prstGeom prst="rect">
+            <a:avLst/>
+          </a:prstGeom>
+          <a:noFill/>
+        </p:spPr>
+        <p:txBody>
+          <a:bodyPr wrap="square" anchor="t">
+            <a:spAutoFit/>
+          </a:bodyPr>
+          <a:lstStyle/>
+          <a:p>
+            <a:pPr algn="ctr">
+              <a:spcAft>
+                <a:spcPts val="600"/>
+              </a:spcAft>
+            </a:pPr>
+            <a:r>
+              <a:rPr sz="1300" b="0" i="0">
+                <a:solidFill>
+                  <a:srgbClr val="5A5A66"/>
+                </a:solidFill>
+                <a:latin typeface="Calibri"/>
+              </a:rPr>
+              <a:t>Knowledge: ChromaDB (cross-lingual vectors over OER PDFs) · SQLite (profiles, progress, audit)</a:t>
+            </a:r>
+          </a:p>
+        </p:txBody>
+      </p:sp>
+      <p:sp>
+        <p:nvSpPr>
+          <p:cNvPr id="23" name="Rounded Rectangle 22"/>
+          <p:cNvSpPr/>
+          <p:nvPr/>
+        </p:nvSpPr>
+        <p:spPr>
+          <a:xfrm>
+            <a:off x="640080" y="5029200"/>
+            <a:ext cx="10972800" cy="914400"/>
+          </a:xfrm>
+          <a:prstGeom prst="roundRect">
+            <a:avLst/>
+          </a:prstGeom>
+          <a:solidFill>
+            <a:srgbClr val="F1EEFC"/>
+          </a:solidFill>
+          <a:ln>
+            <a:noFill/>
+          </a:ln>
+          <a:effectLst/>
+        </p:spPr>
+        <p:style>
+          <a:lnRef idx="1">
+            <a:schemeClr val="accent1"/>
+          </a:lnRef>
+          <a:fillRef idx="3">
+            <a:schemeClr val="accent1"/>
+          </a:fillRef>
+          <a:effectRef idx="2">
+            <a:schemeClr val="accent1"/>
+          </a:effectRef>
+          <a:fontRef idx="minor">
+            <a:schemeClr val="lt1"/>
+          </a:fontRef>
+        </p:style>
+        <p:txBody>
+          <a:bodyPr rtlCol="0" anchor="ctr"/>
+          <a:lstStyle/>
+          <a:p>
+            <a:pPr algn="ctr"/>
+          </a:p>
+        </p:txBody>
+      </p:sp>
+      <p:sp>
+        <p:nvSpPr>
+          <p:cNvPr id="24" name="TextBox 23"/>
+          <p:cNvSpPr txBox="1"/>
+          <p:nvPr/>
+        </p:nvSpPr>
+        <p:spPr>
+          <a:xfrm>
+            <a:off x="731520" y="5120640"/>
+            <a:ext cx="10789920" cy="731520"/>
+          </a:xfrm>
+          <a:prstGeom prst="rect">
+            <a:avLst/>
+          </a:prstGeom>
+          <a:noFill/>
+        </p:spPr>
+        <p:txBody>
+          <a:bodyPr wrap="square" anchor="ctr">
+            <a:spAutoFit/>
+          </a:bodyPr>
+          <a:lstStyle/>
+          <a:p>
+            <a:pPr algn="ctr">
+              <a:spcAft>
+                <a:spcPts val="600"/>
+              </a:spcAft>
+            </a:pPr>
+            <a:r>
+              <a:rPr sz="1300" b="1" i="0">
+                <a:solidFill>
+                  <a:srgbClr val="1E1E28"/>
+                </a:solidFill>
+                <a:latin typeface="Calibri"/>
+              </a:rPr>
+              <a:t>Hardware (100% offline):  Solar panel → battery → Raspberry Pi → Wi-Fi router → students' phones    ·    two-node split for memory-constrained Pis</a:t>
             </a:r>
           </a:p>
         </p:txBody>
@@ -5749,7 +10082,7 @@
         <p:spPr>
           <a:xfrm>
             <a:off x="0" y="0"/>
-            <a:ext cx="201168" cy="6858000"/>
+            <a:ext cx="164592" cy="6858000"/>
           </a:xfrm>
           <a:prstGeom prst="rect">
             <a:avLst/>
@@ -5760,6 +10093,7 @@
           <a:ln>
             <a:noFill/>
           </a:ln>
+          <a:effectLst/>
         </p:spPr>
         <p:style>
           <a:lnRef idx="1">
@@ -5791,8 +10125,8 @@
         </p:nvSpPr>
         <p:spPr>
           <a:xfrm>
-            <a:off x="548640" y="411480"/>
-            <a:ext cx="11155680" cy="914400"/>
+            <a:off x="548640" y="365760"/>
+            <a:ext cx="11338560" cy="1005840"/>
           </a:xfrm>
           <a:prstGeom prst="rect">
             <a:avLst/>
@@ -5800,32 +10134,40 @@
           <a:noFill/>
         </p:spPr>
         <p:txBody>
-          <a:bodyPr wrap="square">
+          <a:bodyPr wrap="square" anchor="t">
             <a:spAutoFit/>
           </a:bodyPr>
           <a:lstStyle/>
           <a:p>
-            <a:pPr algn="l"/>
+            <a:pPr algn="l">
+              <a:spcAft>
+                <a:spcPts val="200"/>
+              </a:spcAft>
+            </a:pPr>
+            <a:r>
+              <a:rPr sz="1300" b="1" i="0">
+                <a:solidFill>
+                  <a:srgbClr val="5B3FE0"/>
+                </a:solidFill>
+                <a:latin typeface="Calibri"/>
+              </a:rPr>
+              <a:t>AI APPROACH</a:t>
+            </a:r>
+          </a:p>
+          <a:p>
+            <a:pPr algn="l">
+              <a:spcAft>
+                <a:spcPts val="600"/>
+              </a:spcAft>
+            </a:pPr>
             <a:r>
               <a:rPr sz="3000" b="1" i="0">
                 <a:solidFill>
-                  <a:srgbClr val="5B3FE0"/>
-                </a:solidFill>
-                <a:latin typeface="Calibri"/>
-              </a:rPr>
-              <a:t>AI Approach &amp; Model Selection</a:t>
-            </a:r>
-          </a:p>
-          <a:p>
-            <a:pPr algn="l"/>
-            <a:r>
-              <a:rPr sz="1500" b="0" i="1">
-                <a:solidFill>
-                  <a:srgbClr val="555560"/>
-                </a:solidFill>
-                <a:latin typeface="Calibri"/>
-              </a:rPr>
-              <a:t>Which models, and why</a:t>
+                  <a:srgbClr val="1E1E28"/>
+                </a:solidFill>
+                <a:latin typeface="Calibri"/>
+              </a:rPr>
+              <a:t>Open-weight models, chosen for the edge</a:t>
             </a:r>
           </a:p>
         </p:txBody>
@@ -5838,8 +10180,8 @@
         </p:nvSpPr>
         <p:spPr>
           <a:xfrm>
-            <a:off x="640080" y="1554480"/>
-            <a:ext cx="10972800" cy="4846320"/>
+            <a:off x="548640" y="6419088"/>
+            <a:ext cx="11064240" cy="365760"/>
           </a:xfrm>
           <a:prstGeom prst="rect">
             <a:avLst/>
@@ -5847,88 +10189,523 @@
           <a:noFill/>
         </p:spPr>
         <p:txBody>
-          <a:bodyPr wrap="square">
+          <a:bodyPr wrap="square" anchor="t">
             <a:spAutoFit/>
           </a:bodyPr>
           <a:lstStyle/>
           <a:p>
             <a:pPr algn="l">
               <a:spcAft>
-                <a:spcPts val="800"/>
-              </a:spcAft>
-            </a:pPr>
-            <a:r>
-              <a:rPr sz="1900" b="0" i="0">
-                <a:solidFill>
-                  <a:srgbClr val="202028"/>
-                </a:solidFill>
-                <a:latin typeface="Calibri"/>
-              </a:rPr>
-              <a:t>•  Phi-3 Mini (4-bit GGUF via Ollama) — reasoning &amp; tutoring; small enough for edge inference</a:t>
-            </a:r>
-          </a:p>
-          <a:p>
-            <a:pPr algn="l">
-              <a:spcAft>
-                <a:spcPts val="800"/>
-              </a:spcAft>
-            </a:pPr>
-            <a:r>
-              <a:rPr sz="1900" b="0" i="0">
-                <a:solidFill>
-                  <a:srgbClr val="202028"/>
-                </a:solidFill>
-                <a:latin typeface="Calibri"/>
-              </a:rPr>
-              <a:t>•  paraphrase-multilingual-MiniLM-L12-v2 — cross-lingual semantic retrieval (key to the bias fix)</a:t>
-            </a:r>
-          </a:p>
-          <a:p>
-            <a:pPr algn="l">
-              <a:spcAft>
-                <a:spcPts val="800"/>
-              </a:spcAft>
-            </a:pPr>
-            <a:r>
-              <a:rPr sz="1900" b="0" i="0">
-                <a:solidFill>
-                  <a:srgbClr val="202028"/>
-                </a:solidFill>
-                <a:latin typeface="Calibri"/>
-              </a:rPr>
-              <a:t>•  NLLB-200-distilled-600M — NMT across ASEAN languages; glossary bridge for non-NLLB dialects</a:t>
-            </a:r>
-          </a:p>
-          <a:p>
-            <a:pPr algn="l">
-              <a:spcAft>
-                <a:spcPts val="800"/>
-              </a:spcAft>
-            </a:pPr>
-            <a:r>
-              <a:rPr sz="1900" b="0" i="0">
-                <a:solidFill>
-                  <a:srgbClr val="202028"/>
-                </a:solidFill>
-                <a:latin typeface="Calibri"/>
-              </a:rPr>
-              <a:t>•  Whisper.cpp + Piper — offline speech-to-text and text-to-speech</a:t>
-            </a:r>
-          </a:p>
-          <a:p>
-            <a:pPr algn="l">
-              <a:spcAft>
-                <a:spcPts val="800"/>
-              </a:spcAft>
-            </a:pPr>
-            <a:r>
-              <a:rPr sz="1900" b="0" i="0">
-                <a:solidFill>
-                  <a:srgbClr val="202028"/>
-                </a:solidFill>
-                <a:latin typeface="Calibri"/>
-              </a:rPr>
-              <a:t>•  Why: open-weight, permissively licensed, ARM-optimised, fully offline</a:t>
+                <a:spcPts val="600"/>
+              </a:spcAft>
+            </a:pPr>
+            <a:r>
+              <a:rPr sz="1000" b="0" i="0">
+                <a:solidFill>
+                  <a:srgbClr val="5A5A66"/>
+                </a:solidFill>
+                <a:latin typeface="Calibri"/>
+              </a:rPr>
+              <a:t>Edge — AI Education at the Last Mile   ·   UM-Gunners</a:t>
+            </a:r>
+          </a:p>
+        </p:txBody>
+      </p:sp>
+      <p:sp>
+        <p:nvSpPr>
+          <p:cNvPr id="5" name="Rounded Rectangle 4"/>
+          <p:cNvSpPr/>
+          <p:nvPr/>
+        </p:nvSpPr>
+        <p:spPr>
+          <a:xfrm>
+            <a:off x="640080" y="1645920"/>
+            <a:ext cx="5349240" cy="1965960"/>
+          </a:xfrm>
+          <a:prstGeom prst="roundRect">
+            <a:avLst/>
+          </a:prstGeom>
+          <a:solidFill>
+            <a:srgbClr val="F1EEFC"/>
+          </a:solidFill>
+          <a:ln>
+            <a:noFill/>
+          </a:ln>
+          <a:effectLst/>
+        </p:spPr>
+        <p:style>
+          <a:lnRef idx="1">
+            <a:schemeClr val="accent1"/>
+          </a:lnRef>
+          <a:fillRef idx="3">
+            <a:schemeClr val="accent1"/>
+          </a:fillRef>
+          <a:effectRef idx="2">
+            <a:schemeClr val="accent1"/>
+          </a:effectRef>
+          <a:fontRef idx="minor">
+            <a:schemeClr val="lt1"/>
+          </a:fontRef>
+        </p:style>
+        <p:txBody>
+          <a:bodyPr rtlCol="0" anchor="ctr"/>
+          <a:lstStyle/>
+          <a:p>
+            <a:pPr algn="ctr"/>
+          </a:p>
+        </p:txBody>
+      </p:sp>
+      <p:sp>
+        <p:nvSpPr>
+          <p:cNvPr id="6" name="TextBox 5"/>
+          <p:cNvSpPr txBox="1"/>
+          <p:nvPr/>
+        </p:nvSpPr>
+        <p:spPr>
+          <a:xfrm>
+            <a:off x="868680" y="1810512"/>
+            <a:ext cx="4937760" cy="1645920"/>
+          </a:xfrm>
+          <a:prstGeom prst="rect">
+            <a:avLst/>
+          </a:prstGeom>
+          <a:noFill/>
+        </p:spPr>
+        <p:txBody>
+          <a:bodyPr wrap="square" anchor="t">
+            <a:spAutoFit/>
+          </a:bodyPr>
+          <a:lstStyle/>
+          <a:p>
+            <a:pPr algn="l">
+              <a:spcAft>
+                <a:spcPts val="200"/>
+              </a:spcAft>
+            </a:pPr>
+            <a:r>
+              <a:rPr sz="1800" b="1" i="0">
+                <a:solidFill>
+                  <a:srgbClr val="5B3FE0"/>
+                </a:solidFill>
+                <a:latin typeface="Calibri"/>
+              </a:rPr>
+              <a:t>Phi-3 Mini</a:t>
+            </a:r>
+          </a:p>
+          <a:p>
+            <a:pPr algn="l">
+              <a:spcAft>
+                <a:spcPts val="600"/>
+              </a:spcAft>
+            </a:pPr>
+            <a:r>
+              <a:rPr sz="1200" b="0" i="1">
+                <a:solidFill>
+                  <a:srgbClr val="5A5A66"/>
+                </a:solidFill>
+                <a:latin typeface="Calibri"/>
+              </a:rPr>
+              <a:t>4-bit GGUF · Ollama</a:t>
+            </a:r>
+          </a:p>
+          <a:p>
+            <a:pPr algn="l">
+              <a:spcAft>
+                <a:spcPts val="600"/>
+              </a:spcAft>
+            </a:pPr>
+            <a:r>
+              <a:rPr sz="1300" b="0" i="0">
+                <a:solidFill>
+                  <a:srgbClr val="1E1E28"/>
+                </a:solidFill>
+                <a:latin typeface="Calibri"/>
+              </a:rPr>
+              <a:t>Reasoning &amp; tutoring — small enough for on-device inference</a:t>
+            </a:r>
+          </a:p>
+        </p:txBody>
+      </p:sp>
+      <p:sp>
+        <p:nvSpPr>
+          <p:cNvPr id="7" name="Rounded Rectangle 6"/>
+          <p:cNvSpPr/>
+          <p:nvPr/>
+        </p:nvSpPr>
+        <p:spPr>
+          <a:xfrm>
+            <a:off x="6217920" y="1645920"/>
+            <a:ext cx="5349240" cy="1965960"/>
+          </a:xfrm>
+          <a:prstGeom prst="roundRect">
+            <a:avLst/>
+          </a:prstGeom>
+          <a:solidFill>
+            <a:srgbClr val="F1EEFC"/>
+          </a:solidFill>
+          <a:ln>
+            <a:noFill/>
+          </a:ln>
+          <a:effectLst/>
+        </p:spPr>
+        <p:style>
+          <a:lnRef idx="1">
+            <a:schemeClr val="accent1"/>
+          </a:lnRef>
+          <a:fillRef idx="3">
+            <a:schemeClr val="accent1"/>
+          </a:fillRef>
+          <a:effectRef idx="2">
+            <a:schemeClr val="accent1"/>
+          </a:effectRef>
+          <a:fontRef idx="minor">
+            <a:schemeClr val="lt1"/>
+          </a:fontRef>
+        </p:style>
+        <p:txBody>
+          <a:bodyPr rtlCol="0" anchor="ctr"/>
+          <a:lstStyle/>
+          <a:p>
+            <a:pPr algn="ctr"/>
+          </a:p>
+        </p:txBody>
+      </p:sp>
+      <p:sp>
+        <p:nvSpPr>
+          <p:cNvPr id="8" name="TextBox 7"/>
+          <p:cNvSpPr txBox="1"/>
+          <p:nvPr/>
+        </p:nvSpPr>
+        <p:spPr>
+          <a:xfrm>
+            <a:off x="6446520" y="1810512"/>
+            <a:ext cx="4937760" cy="1645920"/>
+          </a:xfrm>
+          <a:prstGeom prst="rect">
+            <a:avLst/>
+          </a:prstGeom>
+          <a:noFill/>
+        </p:spPr>
+        <p:txBody>
+          <a:bodyPr wrap="square" anchor="t">
+            <a:spAutoFit/>
+          </a:bodyPr>
+          <a:lstStyle/>
+          <a:p>
+            <a:pPr algn="l">
+              <a:spcAft>
+                <a:spcPts val="200"/>
+              </a:spcAft>
+            </a:pPr>
+            <a:r>
+              <a:rPr sz="1800" b="1" i="0">
+                <a:solidFill>
+                  <a:srgbClr val="0E809B"/>
+                </a:solidFill>
+                <a:latin typeface="Calibri"/>
+              </a:rPr>
+              <a:t>MiniLM-L12 (multilingual)</a:t>
+            </a:r>
+          </a:p>
+          <a:p>
+            <a:pPr algn="l">
+              <a:spcAft>
+                <a:spcPts val="600"/>
+              </a:spcAft>
+            </a:pPr>
+            <a:r>
+              <a:rPr sz="1200" b="0" i="1">
+                <a:solidFill>
+                  <a:srgbClr val="5A5A66"/>
+                </a:solidFill>
+                <a:latin typeface="Calibri"/>
+              </a:rPr>
+              <a:t>paraphrase-multilingual</a:t>
+            </a:r>
+          </a:p>
+          <a:p>
+            <a:pPr algn="l">
+              <a:spcAft>
+                <a:spcPts val="600"/>
+              </a:spcAft>
+            </a:pPr>
+            <a:r>
+              <a:rPr sz="1300" b="0" i="0">
+                <a:solidFill>
+                  <a:srgbClr val="1E1E28"/>
+                </a:solidFill>
+                <a:latin typeface="Calibri"/>
+              </a:rPr>
+              <a:t>Cross-lingual retrieval — the key to the bias fix</a:t>
+            </a:r>
+          </a:p>
+        </p:txBody>
+      </p:sp>
+      <p:sp>
+        <p:nvSpPr>
+          <p:cNvPr id="9" name="Rounded Rectangle 8"/>
+          <p:cNvSpPr/>
+          <p:nvPr/>
+        </p:nvSpPr>
+        <p:spPr>
+          <a:xfrm>
+            <a:off x="640080" y="3840480"/>
+            <a:ext cx="5349240" cy="1965960"/>
+          </a:xfrm>
+          <a:prstGeom prst="roundRect">
+            <a:avLst/>
+          </a:prstGeom>
+          <a:solidFill>
+            <a:srgbClr val="F1EEFC"/>
+          </a:solidFill>
+          <a:ln>
+            <a:noFill/>
+          </a:ln>
+          <a:effectLst/>
+        </p:spPr>
+        <p:style>
+          <a:lnRef idx="1">
+            <a:schemeClr val="accent1"/>
+          </a:lnRef>
+          <a:fillRef idx="3">
+            <a:schemeClr val="accent1"/>
+          </a:fillRef>
+          <a:effectRef idx="2">
+            <a:schemeClr val="accent1"/>
+          </a:effectRef>
+          <a:fontRef idx="minor">
+            <a:schemeClr val="lt1"/>
+          </a:fontRef>
+        </p:style>
+        <p:txBody>
+          <a:bodyPr rtlCol="0" anchor="ctr"/>
+          <a:lstStyle/>
+          <a:p>
+            <a:pPr algn="ctr"/>
+          </a:p>
+        </p:txBody>
+      </p:sp>
+      <p:sp>
+        <p:nvSpPr>
+          <p:cNvPr id="10" name="TextBox 9"/>
+          <p:cNvSpPr txBox="1"/>
+          <p:nvPr/>
+        </p:nvSpPr>
+        <p:spPr>
+          <a:xfrm>
+            <a:off x="868680" y="4005072"/>
+            <a:ext cx="4937760" cy="1645920"/>
+          </a:xfrm>
+          <a:prstGeom prst="rect">
+            <a:avLst/>
+          </a:prstGeom>
+          <a:noFill/>
+        </p:spPr>
+        <p:txBody>
+          <a:bodyPr wrap="square" anchor="t">
+            <a:spAutoFit/>
+          </a:bodyPr>
+          <a:lstStyle/>
+          <a:p>
+            <a:pPr algn="l">
+              <a:spcAft>
+                <a:spcPts val="200"/>
+              </a:spcAft>
+            </a:pPr>
+            <a:r>
+              <a:rPr sz="1800" b="1" i="0">
+                <a:solidFill>
+                  <a:srgbClr val="1E8E3E"/>
+                </a:solidFill>
+                <a:latin typeface="Calibri"/>
+              </a:rPr>
+              <a:t>NLLB-200-distilled-600M</a:t>
+            </a:r>
+          </a:p>
+          <a:p>
+            <a:pPr algn="l">
+              <a:spcAft>
+                <a:spcPts val="600"/>
+              </a:spcAft>
+            </a:pPr>
+            <a:r>
+              <a:rPr sz="1200" b="0" i="1">
+                <a:solidFill>
+                  <a:srgbClr val="5A5A66"/>
+                </a:solidFill>
+                <a:latin typeface="Calibri"/>
+              </a:rPr>
+              <a:t>+ glossary bridge</a:t>
+            </a:r>
+          </a:p>
+          <a:p>
+            <a:pPr algn="l">
+              <a:spcAft>
+                <a:spcPts val="600"/>
+              </a:spcAft>
+            </a:pPr>
+            <a:r>
+              <a:rPr sz="1300" b="0" i="0">
+                <a:solidFill>
+                  <a:srgbClr val="1E1E28"/>
+                </a:solidFill>
+                <a:latin typeface="Calibri"/>
+              </a:rPr>
+              <a:t>NMT across ASEAN languages; bridge for non-NLLB dialects</a:t>
+            </a:r>
+          </a:p>
+        </p:txBody>
+      </p:sp>
+      <p:sp>
+        <p:nvSpPr>
+          <p:cNvPr id="11" name="Rounded Rectangle 10"/>
+          <p:cNvSpPr/>
+          <p:nvPr/>
+        </p:nvSpPr>
+        <p:spPr>
+          <a:xfrm>
+            <a:off x="6217920" y="3840480"/>
+            <a:ext cx="5349240" cy="1965960"/>
+          </a:xfrm>
+          <a:prstGeom prst="roundRect">
+            <a:avLst/>
+          </a:prstGeom>
+          <a:solidFill>
+            <a:srgbClr val="F1EEFC"/>
+          </a:solidFill>
+          <a:ln>
+            <a:noFill/>
+          </a:ln>
+          <a:effectLst/>
+        </p:spPr>
+        <p:style>
+          <a:lnRef idx="1">
+            <a:schemeClr val="accent1"/>
+          </a:lnRef>
+          <a:fillRef idx="3">
+            <a:schemeClr val="accent1"/>
+          </a:fillRef>
+          <a:effectRef idx="2">
+            <a:schemeClr val="accent1"/>
+          </a:effectRef>
+          <a:fontRef idx="minor">
+            <a:schemeClr val="lt1"/>
+          </a:fontRef>
+        </p:style>
+        <p:txBody>
+          <a:bodyPr rtlCol="0" anchor="ctr"/>
+          <a:lstStyle/>
+          <a:p>
+            <a:pPr algn="ctr"/>
+          </a:p>
+        </p:txBody>
+      </p:sp>
+      <p:sp>
+        <p:nvSpPr>
+          <p:cNvPr id="12" name="TextBox 11"/>
+          <p:cNvSpPr txBox="1"/>
+          <p:nvPr/>
+        </p:nvSpPr>
+        <p:spPr>
+          <a:xfrm>
+            <a:off x="6446520" y="4005072"/>
+            <a:ext cx="4937760" cy="1645920"/>
+          </a:xfrm>
+          <a:prstGeom prst="rect">
+            <a:avLst/>
+          </a:prstGeom>
+          <a:noFill/>
+        </p:spPr>
+        <p:txBody>
+          <a:bodyPr wrap="square" anchor="t">
+            <a:spAutoFit/>
+          </a:bodyPr>
+          <a:lstStyle/>
+          <a:p>
+            <a:pPr algn="l">
+              <a:spcAft>
+                <a:spcPts val="200"/>
+              </a:spcAft>
+            </a:pPr>
+            <a:r>
+              <a:rPr sz="1800" b="1" i="0">
+                <a:solidFill>
+                  <a:srgbClr val="B06000"/>
+                </a:solidFill>
+                <a:latin typeface="Calibri"/>
+              </a:rPr>
+              <a:t>Whisper.cpp + Piper</a:t>
+            </a:r>
+          </a:p>
+          <a:p>
+            <a:pPr algn="l">
+              <a:spcAft>
+                <a:spcPts val="600"/>
+              </a:spcAft>
+            </a:pPr>
+            <a:r>
+              <a:rPr sz="1200" b="0" i="1">
+                <a:solidFill>
+                  <a:srgbClr val="5A5A66"/>
+                </a:solidFill>
+                <a:latin typeface="Calibri"/>
+              </a:rPr>
+              <a:t>ggml-base</a:t>
+            </a:r>
+          </a:p>
+          <a:p>
+            <a:pPr algn="l">
+              <a:spcAft>
+                <a:spcPts val="600"/>
+              </a:spcAft>
+            </a:pPr>
+            <a:r>
+              <a:rPr sz="1300" b="0" i="0">
+                <a:solidFill>
+                  <a:srgbClr val="1E1E28"/>
+                </a:solidFill>
+                <a:latin typeface="Calibri"/>
+              </a:rPr>
+              <a:t>Offline speech-to-text and text-to-speech</a:t>
+            </a:r>
+          </a:p>
+        </p:txBody>
+      </p:sp>
+      <p:sp>
+        <p:nvSpPr>
+          <p:cNvPr id="13" name="TextBox 12"/>
+          <p:cNvSpPr txBox="1"/>
+          <p:nvPr/>
+        </p:nvSpPr>
+        <p:spPr>
+          <a:xfrm>
+            <a:off x="640080" y="5943600"/>
+            <a:ext cx="10972800" cy="365760"/>
+          </a:xfrm>
+          <a:prstGeom prst="rect">
+            <a:avLst/>
+          </a:prstGeom>
+          <a:noFill/>
+        </p:spPr>
+        <p:txBody>
+          <a:bodyPr wrap="square" anchor="t">
+            <a:spAutoFit/>
+          </a:bodyPr>
+          <a:lstStyle/>
+          <a:p>
+            <a:pPr algn="l">
+              <a:spcAft>
+                <a:spcPts val="600"/>
+              </a:spcAft>
+            </a:pPr>
+            <a:r>
+              <a:rPr sz="1200" b="0" i="1">
+                <a:solidFill>
+                  <a:srgbClr val="5A5A66"/>
+                </a:solidFill>
+                <a:latin typeface="Calibri"/>
+              </a:rPr>
+              <a:t>Why: open-weight, permissively licensed, ARM-optimised, fully offline.</a:t>
             </a:r>
           </a:p>
         </p:txBody>
@@ -5968,7 +10745,7 @@
         <p:spPr>
           <a:xfrm>
             <a:off x="0" y="0"/>
-            <a:ext cx="201168" cy="6858000"/>
+            <a:ext cx="164592" cy="6858000"/>
           </a:xfrm>
           <a:prstGeom prst="rect">
             <a:avLst/>
@@ -5979,6 +10756,7 @@
           <a:ln>
             <a:noFill/>
           </a:ln>
+          <a:effectLst/>
         </p:spPr>
         <p:style>
           <a:lnRef idx="1">
@@ -6010,8 +10788,8 @@
         </p:nvSpPr>
         <p:spPr>
           <a:xfrm>
-            <a:off x="548640" y="411480"/>
-            <a:ext cx="11155680" cy="914400"/>
+            <a:off x="548640" y="365760"/>
+            <a:ext cx="11338560" cy="1005840"/>
           </a:xfrm>
           <a:prstGeom prst="rect">
             <a:avLst/>
@@ -6019,32 +10797,40 @@
           <a:noFill/>
         </p:spPr>
         <p:txBody>
-          <a:bodyPr wrap="square">
+          <a:bodyPr wrap="square" anchor="t">
             <a:spAutoFit/>
           </a:bodyPr>
           <a:lstStyle/>
           <a:p>
-            <a:pPr algn="l"/>
+            <a:pPr algn="l">
+              <a:spcAft>
+                <a:spcPts val="200"/>
+              </a:spcAft>
+            </a:pPr>
+            <a:r>
+              <a:rPr sz="1300" b="1" i="0">
+                <a:solidFill>
+                  <a:srgbClr val="5B3FE0"/>
+                </a:solidFill>
+                <a:latin typeface="Calibri"/>
+              </a:rPr>
+              <a:t>DATA STRATEGY</a:t>
+            </a:r>
+          </a:p>
+          <a:p>
+            <a:pPr algn="l">
+              <a:spcAft>
+                <a:spcPts val="600"/>
+              </a:spcAft>
+            </a:pPr>
             <a:r>
               <a:rPr sz="3000" b="1" i="0">
                 <a:solidFill>
-                  <a:srgbClr val="5B3FE0"/>
-                </a:solidFill>
-                <a:latin typeface="Calibri"/>
-              </a:rPr>
-              <a:t>Data Strategy</a:t>
-            </a:r>
-          </a:p>
-          <a:p>
-            <a:pPr algn="l"/>
-            <a:r>
-              <a:rPr sz="1500" b="0" i="1">
-                <a:solidFill>
-                  <a:srgbClr val="555560"/>
-                </a:solidFill>
-                <a:latin typeface="Calibri"/>
-              </a:rPr>
-              <a:t>Sources, licensing, cleaning</a:t>
+                  <a:srgbClr val="1E1E28"/>
+                </a:solidFill>
+                <a:latin typeface="Calibri"/>
+              </a:rPr>
+              <a:t>Curated, licensed, cleaned</a:t>
             </a:r>
           </a:p>
         </p:txBody>
@@ -6057,8 +10843,8 @@
         </p:nvSpPr>
         <p:spPr>
           <a:xfrm>
-            <a:off x="640080" y="1554480"/>
-            <a:ext cx="10972800" cy="4846320"/>
+            <a:off x="548640" y="6419088"/>
+            <a:ext cx="11064240" cy="365760"/>
           </a:xfrm>
           <a:prstGeom prst="rect">
             <a:avLst/>
@@ -6066,20 +10852,59 @@
           <a:noFill/>
         </p:spPr>
         <p:txBody>
-          <a:bodyPr wrap="square">
+          <a:bodyPr wrap="square" anchor="t">
             <a:spAutoFit/>
           </a:bodyPr>
           <a:lstStyle/>
           <a:p>
             <a:pPr algn="l">
               <a:spcAft>
-                <a:spcPts val="800"/>
-              </a:spcAft>
-            </a:pPr>
-            <a:r>
-              <a:rPr sz="1900" b="0" i="0">
-                <a:solidFill>
-                  <a:srgbClr val="202028"/>
+                <a:spcPts val="600"/>
+              </a:spcAft>
+            </a:pPr>
+            <a:r>
+              <a:rPr sz="1000" b="0" i="0">
+                <a:solidFill>
+                  <a:srgbClr val="5A5A66"/>
+                </a:solidFill>
+                <a:latin typeface="Calibri"/>
+              </a:rPr>
+              <a:t>Edge — AI Education at the Last Mile   ·   UM-Gunners</a:t>
+            </a:r>
+          </a:p>
+        </p:txBody>
+      </p:sp>
+      <p:sp>
+        <p:nvSpPr>
+          <p:cNvPr id="5" name="TextBox 4"/>
+          <p:cNvSpPr txBox="1"/>
+          <p:nvPr/>
+        </p:nvSpPr>
+        <p:spPr>
+          <a:xfrm>
+            <a:off x="640080" y="1645920"/>
+            <a:ext cx="10972800" cy="2926080"/>
+          </a:xfrm>
+          <a:prstGeom prst="rect">
+            <a:avLst/>
+          </a:prstGeom>
+          <a:noFill/>
+        </p:spPr>
+        <p:txBody>
+          <a:bodyPr wrap="square" anchor="t">
+            <a:spAutoFit/>
+          </a:bodyPr>
+          <a:lstStyle/>
+          <a:p>
+            <a:pPr algn="l">
+              <a:spcAft>
+                <a:spcPts val="900"/>
+              </a:spcAft>
+            </a:pPr>
+            <a:r>
+              <a:rPr sz="1800" b="0" i="0">
+                <a:solidFill>
+                  <a:srgbClr val="1E1E28"/>
                 </a:solidFill>
                 <a:latin typeface="Calibri"/>
               </a:rPr>
@@ -6089,49 +10914,122 @@
           <a:p>
             <a:pPr algn="l">
               <a:spcAft>
-                <a:spcPts val="800"/>
-              </a:spcAft>
-            </a:pPr>
-            <a:r>
-              <a:rPr sz="1900" b="0" i="0">
-                <a:solidFill>
-                  <a:srgbClr val="202028"/>
-                </a:solidFill>
-                <a:latin typeface="Calibri"/>
-              </a:rPr>
-              <a:t>•  Translation references: open VynerCK/Iban-language-data + teacher-verified corrections</a:t>
-            </a:r>
-          </a:p>
-          <a:p>
-            <a:pPr algn="l">
-              <a:spcAft>
-                <a:spcPts val="800"/>
-              </a:spcAft>
-            </a:pPr>
-            <a:r>
-              <a:rPr sz="1900" b="0" i="0">
-                <a:solidFill>
-                  <a:srgbClr val="202028"/>
-                </a:solidFill>
-                <a:latin typeface="Calibri"/>
-              </a:rPr>
-              <a:t>•  Cleaning: manual curation against ministry standards, page-level chunking, idempotent ingestion</a:t>
-            </a:r>
-          </a:p>
-          <a:p>
-            <a:pPr algn="l">
-              <a:spcAft>
-                <a:spcPts val="800"/>
-              </a:spcAft>
-            </a:pPr>
-            <a:r>
-              <a:rPr sz="1900" b="0" i="0">
-                <a:solidFill>
-                  <a:srgbClr val="202028"/>
-                </a:solidFill>
-                <a:latin typeface="Calibri"/>
-              </a:rPr>
-              <a:t>•  Licensing: CC BY 4.0, MIT (Phi-3), Apache 2.0 (Piper), CC BY-NC 4.0 (NLLB)</a:t>
+                <a:spcPts val="900"/>
+              </a:spcAft>
+            </a:pPr>
+            <a:r>
+              <a:rPr sz="1800" b="0" i="0">
+                <a:solidFill>
+                  <a:srgbClr val="1E1E28"/>
+                </a:solidFill>
+                <a:latin typeface="Calibri"/>
+              </a:rPr>
+              <a:t>•  Translation references: open VynerCK/Iban-language-data + teacher-verified corrections (the Dialect Flywheel)</a:t>
+            </a:r>
+          </a:p>
+          <a:p>
+            <a:pPr algn="l">
+              <a:spcAft>
+                <a:spcPts val="900"/>
+              </a:spcAft>
+            </a:pPr>
+            <a:r>
+              <a:rPr sz="1800" b="0" i="0">
+                <a:solidFill>
+                  <a:srgbClr val="1E1E28"/>
+                </a:solidFill>
+                <a:latin typeface="Calibri"/>
+              </a:rPr>
+              <a:t>•  Cleaning: manual curation against ministry standards · page-level chunking · idempotent ingestion</a:t>
+            </a:r>
+          </a:p>
+          <a:p>
+            <a:pPr algn="l">
+              <a:spcAft>
+                <a:spcPts val="900"/>
+              </a:spcAft>
+            </a:pPr>
+            <a:r>
+              <a:rPr sz="1800" b="0" i="0">
+                <a:solidFill>
+                  <a:srgbClr val="1E1E28"/>
+                </a:solidFill>
+                <a:latin typeface="Calibri"/>
+              </a:rPr>
+              <a:t>•  Integrity: versioned, provenance-tracked content manifest with enforced tamper quarantine</a:t>
+            </a:r>
+          </a:p>
+        </p:txBody>
+      </p:sp>
+      <p:sp>
+        <p:nvSpPr>
+          <p:cNvPr id="6" name="Rounded Rectangle 5"/>
+          <p:cNvSpPr/>
+          <p:nvPr/>
+        </p:nvSpPr>
+        <p:spPr>
+          <a:xfrm>
+            <a:off x="640080" y="4663440"/>
+            <a:ext cx="10972800" cy="1188720"/>
+          </a:xfrm>
+          <a:prstGeom prst="roundRect">
+            <a:avLst/>
+          </a:prstGeom>
+          <a:solidFill>
+            <a:srgbClr val="F1EEFC"/>
+          </a:solidFill>
+          <a:ln>
+            <a:noFill/>
+          </a:ln>
+          <a:effectLst/>
+        </p:spPr>
+        <p:style>
+          <a:lnRef idx="1">
+            <a:schemeClr val="accent1"/>
+          </a:lnRef>
+          <a:fillRef idx="3">
+            <a:schemeClr val="accent1"/>
+          </a:fillRef>
+          <a:effectRef idx="2">
+            <a:schemeClr val="accent1"/>
+          </a:effectRef>
+          <a:fontRef idx="minor">
+            <a:schemeClr val="lt1"/>
+          </a:fontRef>
+        </p:style>
+        <p:txBody>
+          <a:bodyPr rtlCol="0" anchor="ctr" tIns="164592" lIns="182880"/>
+          <a:lstStyle/>
+          <a:p>
+            <a:pPr algn="l">
+              <a:spcAft>
+                <a:spcPts val="400"/>
+              </a:spcAft>
+            </a:pPr>
+            <a:r>
+              <a:rPr sz="1400" b="1" i="0">
+                <a:solidFill>
+                  <a:srgbClr val="5B3FE0"/>
+                </a:solidFill>
+                <a:latin typeface="Calibri"/>
+              </a:rPr>
+              <a:t>Licensing</a:t>
+            </a:r>
+          </a:p>
+          <a:p>
+            <a:pPr algn="l">
+              <a:spcAft>
+                <a:spcPts val="600"/>
+              </a:spcAft>
+            </a:pPr>
+            <a:r>
+              <a:rPr sz="1300" b="0" i="0">
+                <a:solidFill>
+                  <a:srgbClr val="1E1E28"/>
+                </a:solidFill>
+                <a:latin typeface="Calibri"/>
+              </a:rPr>
+              <a:t>OpenStax CC BY 4.0   ·   Phi-3 MIT   ·   Piper Apache 2.0   ·   NLLB-200 CC BY-NC 4.0   ·   Iban/Cebuano CC BY 4.0</a:t>
             </a:r>
           </a:p>
         </p:txBody>
@@ -6171,7 +11069,7 @@
         <p:spPr>
           <a:xfrm>
             <a:off x="0" y="0"/>
-            <a:ext cx="201168" cy="6858000"/>
+            <a:ext cx="164592" cy="6858000"/>
           </a:xfrm>
           <a:prstGeom prst="rect">
             <a:avLst/>
@@ -6182,6 +11080,7 @@
           <a:ln>
             <a:noFill/>
           </a:ln>
+          <a:effectLst/>
         </p:spPr>
         <p:style>
           <a:lnRef idx="1">
@@ -6213,8 +11112,8 @@
         </p:nvSpPr>
         <p:spPr>
           <a:xfrm>
-            <a:off x="548640" y="411480"/>
-            <a:ext cx="11155680" cy="914400"/>
+            <a:off x="548640" y="365760"/>
+            <a:ext cx="11338560" cy="1005840"/>
           </a:xfrm>
           <a:prstGeom prst="rect">
             <a:avLst/>
@@ -6222,32 +11121,40 @@
           <a:noFill/>
         </p:spPr>
         <p:txBody>
-          <a:bodyPr wrap="square">
+          <a:bodyPr wrap="square" anchor="t">
             <a:spAutoFit/>
           </a:bodyPr>
           <a:lstStyle/>
           <a:p>
-            <a:pPr algn="l"/>
+            <a:pPr algn="l">
+              <a:spcAft>
+                <a:spcPts val="200"/>
+              </a:spcAft>
+            </a:pPr>
+            <a:r>
+              <a:rPr sz="1300" b="1" i="0">
+                <a:solidFill>
+                  <a:srgbClr val="5B3FE0"/>
+                </a:solidFill>
+                <a:latin typeface="Calibri"/>
+              </a:rPr>
+              <a:t>AI ETHICS &amp; RESPONSIBILITY</a:t>
+            </a:r>
+          </a:p>
+          <a:p>
+            <a:pPr algn="l">
+              <a:spcAft>
+                <a:spcPts val="600"/>
+              </a:spcAft>
+            </a:pPr>
             <a:r>
               <a:rPr sz="3000" b="1" i="0">
                 <a:solidFill>
-                  <a:srgbClr val="5B3FE0"/>
-                </a:solidFill>
-                <a:latin typeface="Calibri"/>
-              </a:rPr>
-              <a:t>AI Ethics &amp; Responsibility</a:t>
-            </a:r>
-          </a:p>
-          <a:p>
-            <a:pPr algn="l"/>
-            <a:r>
-              <a:rPr sz="1500" b="0" i="1">
-                <a:solidFill>
-                  <a:srgbClr val="555560"/>
-                </a:solidFill>
-                <a:latin typeface="Calibri"/>
-              </a:rPr>
-              <a:t>Bias mitigation &amp; privacy</a:t>
+                  <a:srgbClr val="1E1E28"/>
+                </a:solidFill>
+                <a:latin typeface="Calibri"/>
+              </a:rPr>
+              <a:t>Bias: measured, then mitigated</a:t>
             </a:r>
           </a:p>
         </p:txBody>
@@ -6260,8 +11167,8 @@
         </p:nvSpPr>
         <p:spPr>
           <a:xfrm>
-            <a:off x="640080" y="1554480"/>
-            <a:ext cx="10972800" cy="4846320"/>
+            <a:off x="548640" y="6419088"/>
+            <a:ext cx="11064240" cy="365760"/>
           </a:xfrm>
           <a:prstGeom prst="rect">
             <a:avLst/>
@@ -6269,72 +11176,186 @@
           <a:noFill/>
         </p:spPr>
         <p:txBody>
-          <a:bodyPr wrap="square">
+          <a:bodyPr wrap="square" anchor="t">
             <a:spAutoFit/>
           </a:bodyPr>
           <a:lstStyle/>
           <a:p>
             <a:pPr algn="l">
               <a:spcAft>
-                <a:spcPts val="800"/>
-              </a:spcAft>
-            </a:pPr>
-            <a:r>
-              <a:rPr sz="1900" b="0" i="0">
-                <a:solidFill>
-                  <a:srgbClr val="202028"/>
-                </a:solidFill>
-                <a:latin typeface="Calibri"/>
-              </a:rPr>
-              <a:t>•  Bias measured &amp; mitigated: same question, English 100% vs Thai 50% grounding → cross-lingual retrieval recovered Thai/Vietnamese to 62%, fully closed Iban</a:t>
-            </a:r>
-          </a:p>
-          <a:p>
-            <a:pPr algn="l">
-              <a:spcAft>
-                <a:spcPts val="800"/>
-              </a:spcAft>
-            </a:pPr>
-            <a:r>
-              <a:rPr sz="1900" b="0" i="0">
-                <a:solidFill>
-                  <a:srgbClr val="202028"/>
-                </a:solidFill>
-                <a:latin typeface="Calibri"/>
-              </a:rPr>
-              <a:t>•  Western-centric bias mitigated by using regional OER as the sole RAG context</a:t>
-            </a:r>
-          </a:p>
-          <a:p>
-            <a:pPr algn="l">
-              <a:spcAft>
-                <a:spcPts val="800"/>
-              </a:spcAft>
-            </a:pPr>
-            <a:r>
-              <a:rPr sz="1900" b="0" i="0">
-                <a:solidFill>
-                  <a:srgbClr val="202028"/>
-                </a:solidFill>
-                <a:latin typeface="Calibri"/>
-              </a:rPr>
-              <a:t>•  Privacy: RBAC + per-teacher identities + audit log; encryption (LUKS + encrypted USB); parental-consent record; retention purge + right-to-erasure</a:t>
-            </a:r>
-          </a:p>
-          <a:p>
-            <a:pPr algn="l">
-              <a:spcAft>
-                <a:spcPts val="800"/>
-              </a:spcAft>
-            </a:pPr>
-            <a:r>
-              <a:rPr sz="1900" b="0" i="0">
-                <a:solidFill>
-                  <a:srgbClr val="202028"/>
-                </a:solidFill>
-                <a:latin typeface="Calibri"/>
-              </a:rPr>
-              <a:t>•  Human oversight at every layer — curation, linguistic audit, confidence transparency</a:t>
+                <a:spcPts val="600"/>
+              </a:spcAft>
+            </a:pPr>
+            <a:r>
+              <a:rPr sz="1000" b="0" i="0">
+                <a:solidFill>
+                  <a:srgbClr val="5A5A66"/>
+                </a:solidFill>
+                <a:latin typeface="Calibri"/>
+              </a:rPr>
+              <a:t>Edge — AI Education at the Last Mile   ·   UM-Gunners</a:t>
+            </a:r>
+          </a:p>
+        </p:txBody>
+      </p:sp>
+      <p:graphicFrame>
+        <p:nvGraphicFramePr>
+          <p:cNvPr id="5" name="Chart 4"/>
+          <p:cNvGraphicFramePr>
+            <a:graphicFrameLocks noGrp="1"/>
+          </p:cNvGraphicFramePr>
+          <p:nvPr/>
+        </p:nvGraphicFramePr>
+        <p:xfrm>
+          <a:off x="548640" y="1645920"/>
+          <a:ext cx="6035040" cy="4297680"/>
+        </p:xfrm>
+        <a:graphic>
+          <a:graphicData uri="http://schemas.openxmlformats.org/drawingml/2006/chart">
+            <c:chart xmlns:c="http://schemas.openxmlformats.org/drawingml/2006/chart" r:id="rId2"/>
+          </a:graphicData>
+        </a:graphic>
+      </p:graphicFrame>
+      <p:sp>
+        <p:nvSpPr>
+          <p:cNvPr id="6" name="TextBox 5"/>
+          <p:cNvSpPr txBox="1"/>
+          <p:nvPr/>
+        </p:nvSpPr>
+        <p:spPr>
+          <a:xfrm>
+            <a:off x="6766560" y="1737360"/>
+            <a:ext cx="4937760" cy="3108960"/>
+          </a:xfrm>
+          <a:prstGeom prst="rect">
+            <a:avLst/>
+          </a:prstGeom>
+          <a:noFill/>
+        </p:spPr>
+        <p:txBody>
+          <a:bodyPr wrap="square" anchor="t">
+            <a:spAutoFit/>
+          </a:bodyPr>
+          <a:lstStyle/>
+          <a:p>
+            <a:pPr algn="l">
+              <a:spcAft>
+                <a:spcPts val="900"/>
+              </a:spcAft>
+            </a:pPr>
+            <a:r>
+              <a:rPr sz="1400" b="0" i="0">
+                <a:solidFill>
+                  <a:srgbClr val="1E1E28"/>
+                </a:solidFill>
+                <a:latin typeface="Calibri"/>
+              </a:rPr>
+              <a:t>•  Same question, varied language → English 100% vs Thai 50% grounding = measured bias</a:t>
+            </a:r>
+          </a:p>
+          <a:p>
+            <a:pPr algn="l">
+              <a:spcAft>
+                <a:spcPts val="900"/>
+              </a:spcAft>
+            </a:pPr>
+            <a:r>
+              <a:rPr sz="1400" b="0" i="0">
+                <a:solidFill>
+                  <a:srgbClr val="1E1E28"/>
+                </a:solidFill>
+                <a:latin typeface="Calibri"/>
+              </a:rPr>
+              <a:t>•  Root cause: query translation degraded retrieval</a:t>
+            </a:r>
+          </a:p>
+          <a:p>
+            <a:pPr algn="l">
+              <a:spcAft>
+                <a:spcPts val="900"/>
+              </a:spcAft>
+            </a:pPr>
+            <a:r>
+              <a:rPr sz="1400" b="0" i="0">
+                <a:solidFill>
+                  <a:srgbClr val="1E1E28"/>
+                </a:solidFill>
+                <a:latin typeface="Calibri"/>
+              </a:rPr>
+              <a:t>•  Fix: cross-lingual retrieval → Thai/Viet 62%, Iban fully closed; 0% non-response</a:t>
+            </a:r>
+          </a:p>
+        </p:txBody>
+      </p:sp>
+      <p:sp>
+        <p:nvSpPr>
+          <p:cNvPr id="7" name="Rounded Rectangle 6"/>
+          <p:cNvSpPr/>
+          <p:nvPr/>
+        </p:nvSpPr>
+        <p:spPr>
+          <a:xfrm>
+            <a:off x="6766560" y="4937760"/>
+            <a:ext cx="4937760" cy="1005840"/>
+          </a:xfrm>
+          <a:prstGeom prst="roundRect">
+            <a:avLst/>
+          </a:prstGeom>
+          <a:solidFill>
+            <a:srgbClr val="EAF6EE"/>
+          </a:solidFill>
+          <a:ln>
+            <a:noFill/>
+          </a:ln>
+          <a:effectLst/>
+        </p:spPr>
+        <p:style>
+          <a:lnRef idx="1">
+            <a:schemeClr val="accent1"/>
+          </a:lnRef>
+          <a:fillRef idx="3">
+            <a:schemeClr val="accent1"/>
+          </a:fillRef>
+          <a:effectRef idx="2">
+            <a:schemeClr val="accent1"/>
+          </a:effectRef>
+          <a:fontRef idx="minor">
+            <a:schemeClr val="lt1"/>
+          </a:fontRef>
+        </p:style>
+        <p:txBody>
+          <a:bodyPr rtlCol="0" anchor="ctr" tIns="128016" lIns="164592"/>
+          <a:lstStyle/>
+          <a:p>
+            <a:pPr algn="l">
+              <a:spcAft>
+                <a:spcPts val="300"/>
+              </a:spcAft>
+            </a:pPr>
+            <a:r>
+              <a:rPr sz="1300" b="1" i="0">
+                <a:solidFill>
+                  <a:srgbClr val="1E8E3E"/>
+                </a:solidFill>
+                <a:latin typeface="Calibri"/>
+              </a:rPr>
+              <a:t>Privacy &amp; governance</a:t>
+            </a:r>
+          </a:p>
+          <a:p>
+            <a:pPr algn="l">
+              <a:spcAft>
+                <a:spcPts val="600"/>
+              </a:spcAft>
+            </a:pPr>
+            <a:r>
+              <a:rPr sz="1200" b="0" i="0">
+                <a:solidFill>
+                  <a:srgbClr val="1E1E28"/>
+                </a:solidFill>
+                <a:latin typeface="Calibri"/>
+              </a:rPr>
+              <a:t>RBAC + per-teacher audit · encryption (LUKS + USB) · parental consent · retention &amp; erasure</a:t>
             </a:r>
           </a:p>
         </p:txBody>
@@ -6374,7 +11395,7 @@
         <p:spPr>
           <a:xfrm>
             <a:off x="0" y="0"/>
-            <a:ext cx="201168" cy="6858000"/>
+            <a:ext cx="164592" cy="6858000"/>
           </a:xfrm>
           <a:prstGeom prst="rect">
             <a:avLst/>
@@ -6385,6 +11406,7 @@
           <a:ln>
             <a:noFill/>
           </a:ln>
+          <a:effectLst/>
         </p:spPr>
         <p:style>
           <a:lnRef idx="1">
@@ -6416,8 +11438,8 @@
         </p:nvSpPr>
         <p:spPr>
           <a:xfrm>
-            <a:off x="548640" y="411480"/>
-            <a:ext cx="11155680" cy="914400"/>
+            <a:off x="548640" y="365760"/>
+            <a:ext cx="11338560" cy="1005840"/>
           </a:xfrm>
           <a:prstGeom prst="rect">
             <a:avLst/>
@@ -6425,32 +11447,40 @@
           <a:noFill/>
         </p:spPr>
         <p:txBody>
-          <a:bodyPr wrap="square">
+          <a:bodyPr wrap="square" anchor="t">
             <a:spAutoFit/>
           </a:bodyPr>
           <a:lstStyle/>
           <a:p>
-            <a:pPr algn="l"/>
+            <a:pPr algn="l">
+              <a:spcAft>
+                <a:spcPts val="200"/>
+              </a:spcAft>
+            </a:pPr>
+            <a:r>
+              <a:rPr sz="1300" b="1" i="0">
+                <a:solidFill>
+                  <a:srgbClr val="5B3FE0"/>
+                </a:solidFill>
+                <a:latin typeface="Calibri"/>
+              </a:rPr>
+              <a:t>PROTOTYPE DEMONSTRATION</a:t>
+            </a:r>
+          </a:p>
+          <a:p>
+            <a:pPr algn="l">
+              <a:spcAft>
+                <a:spcPts val="600"/>
+              </a:spcAft>
+            </a:pPr>
             <a:r>
               <a:rPr sz="3000" b="1" i="0">
                 <a:solidFill>
-                  <a:srgbClr val="5B3FE0"/>
-                </a:solidFill>
-                <a:latin typeface="Calibri"/>
-              </a:rPr>
-              <a:t>Prototype Demonstration</a:t>
-            </a:r>
-          </a:p>
-          <a:p>
-            <a:pPr algn="l"/>
-            <a:r>
-              <a:rPr sz="1500" b="0" i="1">
-                <a:solidFill>
-                  <a:srgbClr val="555560"/>
-                </a:solidFill>
-                <a:latin typeface="Calibri"/>
-              </a:rPr>
-              <a:t>Visual proof + the AI 'logic'  (insert screenshots / GIF)</a:t>
+                  <a:srgbClr val="1E1E28"/>
+                </a:solidFill>
+                <a:latin typeface="Calibri"/>
+              </a:rPr>
+              <a:t>The AI, grounded and transparent</a:t>
             </a:r>
           </a:p>
         </p:txBody>
@@ -6463,8 +11493,8 @@
         </p:nvSpPr>
         <p:spPr>
           <a:xfrm>
-            <a:off x="640080" y="1554480"/>
-            <a:ext cx="10972800" cy="4846320"/>
+            <a:off x="548640" y="6419088"/>
+            <a:ext cx="11064240" cy="365760"/>
           </a:xfrm>
           <a:prstGeom prst="rect">
             <a:avLst/>
@@ -6472,72 +11502,190 @@
           <a:noFill/>
         </p:spPr>
         <p:txBody>
-          <a:bodyPr wrap="square">
+          <a:bodyPr wrap="square" anchor="t">
             <a:spAutoFit/>
           </a:bodyPr>
           <a:lstStyle/>
           <a:p>
             <a:pPr algn="l">
               <a:spcAft>
-                <a:spcPts val="800"/>
-              </a:spcAft>
-            </a:pPr>
-            <a:r>
-              <a:rPr sz="1900" b="0" i="0">
-                <a:solidFill>
-                  <a:srgbClr val="202028"/>
-                </a:solidFill>
-                <a:latin typeface="Calibri"/>
-              </a:rPr>
-              <a:t>•  Demo video: https://youtu.be/Ms_y6FUbKwU</a:t>
-            </a:r>
-          </a:p>
-          <a:p>
-            <a:pPr algn="l">
-              <a:spcAft>
-                <a:spcPts val="800"/>
-              </a:spcAft>
-            </a:pPr>
-            <a:r>
-              <a:rPr sz="1900" b="0" i="0">
-                <a:solidFill>
-                  <a:srgbClr val="202028"/>
-                </a:solidFill>
-                <a:latin typeface="Calibri"/>
-              </a:rPr>
-              <a:t>•  Live: grounded chat with page-level citations + confidence badge</a:t>
-            </a:r>
-          </a:p>
-          <a:p>
-            <a:pPr algn="l">
-              <a:spcAft>
-                <a:spcPts val="800"/>
-              </a:spcAft>
-            </a:pPr>
-            <a:r>
-              <a:rPr sz="1900" b="0" i="0">
-                <a:solidFill>
-                  <a:srgbClr val="202028"/>
-                </a:solidFill>
-                <a:latin typeface="Calibri"/>
-              </a:rPr>
-              <a:t>•  Tiered AI logic: grounded (cited) → supplementary (labelled) → controlled non-response</a:t>
-            </a:r>
-          </a:p>
-          <a:p>
-            <a:pPr algn="l">
-              <a:spcAft>
-                <a:spcPts val="800"/>
-              </a:spcAft>
-            </a:pPr>
-            <a:r>
-              <a:rPr sz="1900" b="0" i="0">
-                <a:solidFill>
-                  <a:srgbClr val="202028"/>
-                </a:solidFill>
-                <a:latin typeface="Calibri"/>
-              </a:rPr>
-              <a:t>•  Mobile-first PWA — students connect from their own phones; teacher analytics dashboard</a:t>
+                <a:spcPts val="600"/>
+              </a:spcAft>
+            </a:pPr>
+            <a:r>
+              <a:rPr sz="1000" b="0" i="0">
+                <a:solidFill>
+                  <a:srgbClr val="5A5A66"/>
+                </a:solidFill>
+                <a:latin typeface="Calibri"/>
+              </a:rPr>
+              <a:t>Edge — AI Education at the Last Mile   ·   UM-Gunners</a:t>
+            </a:r>
+          </a:p>
+        </p:txBody>
+      </p:sp>
+      <p:pic>
+        <p:nvPicPr>
+          <p:cNvPr id="5" name="Picture 4" descr="demo_chat2.png"/>
+          <p:cNvPicPr>
+            <a:picLocks noChangeAspect="1"/>
+          </p:cNvPicPr>
+          <p:nvPr/>
+        </p:nvPicPr>
+        <p:blipFill>
+          <a:blip r:embed="rId2"/>
+          <a:stretch>
+            <a:fillRect/>
+          </a:stretch>
+        </p:blipFill>
+        <p:spPr>
+          <a:xfrm>
+            <a:off x="640080" y="1600200"/>
+            <a:ext cx="2286000" cy="4572000"/>
+          </a:xfrm>
+          <a:prstGeom prst="rect">
+            <a:avLst/>
+          </a:prstGeom>
+        </p:spPr>
+      </p:pic>
+      <p:sp>
+        <p:nvSpPr>
+          <p:cNvPr id="6" name="TextBox 5"/>
+          <p:cNvSpPr txBox="1"/>
+          <p:nvPr/>
+        </p:nvSpPr>
+        <p:spPr>
+          <a:xfrm>
+            <a:off x="5486400" y="1828800"/>
+            <a:ext cx="6217920" cy="3291840"/>
+          </a:xfrm>
+          <a:prstGeom prst="rect">
+            <a:avLst/>
+          </a:prstGeom>
+          <a:noFill/>
+        </p:spPr>
+        <p:txBody>
+          <a:bodyPr wrap="square" anchor="t">
+            <a:spAutoFit/>
+          </a:bodyPr>
+          <a:lstStyle/>
+          <a:p>
+            <a:pPr algn="l">
+              <a:spcAft>
+                <a:spcPts val="900"/>
+              </a:spcAft>
+            </a:pPr>
+            <a:r>
+              <a:rPr sz="1500" b="0" i="0">
+                <a:solidFill>
+                  <a:srgbClr val="1E1E28"/>
+                </a:solidFill>
+                <a:latin typeface="Calibri"/>
+              </a:rPr>
+              <a:t>•  Real grounded answer with page-level citations (3 sources shown)</a:t>
+            </a:r>
+          </a:p>
+          <a:p>
+            <a:pPr algn="l">
+              <a:spcAft>
+                <a:spcPts val="900"/>
+              </a:spcAft>
+            </a:pPr>
+            <a:r>
+              <a:rPr sz="1500" b="0" i="0">
+                <a:solidFill>
+                  <a:srgbClr val="1E1E28"/>
+                </a:solidFill>
+                <a:latin typeface="Calibri"/>
+              </a:rPr>
+              <a:t>•  Green “Verified” confidence badge — transparent about certainty</a:t>
+            </a:r>
+          </a:p>
+          <a:p>
+            <a:pPr algn="l">
+              <a:spcAft>
+                <a:spcPts val="900"/>
+              </a:spcAft>
+            </a:pPr>
+            <a:r>
+              <a:rPr sz="1500" b="0" i="0">
+                <a:solidFill>
+                  <a:srgbClr val="1E1E28"/>
+                </a:solidFill>
+                <a:latin typeface="Calibri"/>
+              </a:rPr>
+              <a:t>•  Auto-generated fraction diagram — visual, mother-tongue ready</a:t>
+            </a:r>
+          </a:p>
+          <a:p>
+            <a:pPr algn="l">
+              <a:spcAft>
+                <a:spcPts val="900"/>
+              </a:spcAft>
+            </a:pPr>
+            <a:r>
+              <a:rPr sz="1500" b="0" i="0">
+                <a:solidFill>
+                  <a:srgbClr val="1E1E28"/>
+                </a:solidFill>
+                <a:latin typeface="Calibri"/>
+              </a:rPr>
+              <a:t>•  Tiered logic: grounded → supplementary → controlled non-response</a:t>
+            </a:r>
+          </a:p>
+          <a:p>
+            <a:pPr algn="l">
+              <a:spcAft>
+                <a:spcPts val="900"/>
+              </a:spcAft>
+            </a:pPr>
+            <a:r>
+              <a:rPr sz="1500" b="0" i="0">
+                <a:solidFill>
+                  <a:srgbClr val="1E1E28"/>
+                </a:solidFill>
+                <a:latin typeface="Calibri"/>
+              </a:rPr>
+              <a:t>•  Mobile-first PWA: students use their own phones, fully offline</a:t>
+            </a:r>
+          </a:p>
+        </p:txBody>
+      </p:sp>
+      <p:sp>
+        <p:nvSpPr>
+          <p:cNvPr id="7" name="TextBox 6"/>
+          <p:cNvSpPr txBox="1"/>
+          <p:nvPr/>
+        </p:nvSpPr>
+        <p:spPr>
+          <a:xfrm>
+            <a:off x="5486400" y="5394960"/>
+            <a:ext cx="6217920" cy="548640"/>
+          </a:xfrm>
+          <a:prstGeom prst="rect">
+            <a:avLst/>
+          </a:prstGeom>
+          <a:noFill/>
+        </p:spPr>
+        <p:txBody>
+          <a:bodyPr wrap="square" anchor="t">
+            <a:spAutoFit/>
+          </a:bodyPr>
+          <a:lstStyle/>
+          <a:p>
+            <a:pPr algn="l">
+              <a:spcAft>
+                <a:spcPts val="600"/>
+              </a:spcAft>
+            </a:pPr>
+            <a:r>
+              <a:rPr sz="1400" b="1" i="0">
+                <a:solidFill>
+                  <a:srgbClr val="5B3FE0"/>
+                </a:solidFill>
+                <a:latin typeface="Calibri"/>
+              </a:rPr>
+              <a:t>▶  Demo video: https://youtu.be/Ms_y6FUbKwU</a:t>
             </a:r>
           </a:p>
         </p:txBody>

--- a/docs/AI for Education_University of Malaya_UM-Gunners_PitchDeck.pptx
+++ b/docs/AI for Education_University of Malaya_UM-Gunners_PitchDeck.pptx
@@ -133,7 +133,7 @@
           <a:p>
             <a:r>
               <a:rPr sz="1200"/>
-              <a:t>Grounding rate by language (same question)</a:t>
+              <a:t>Curriculum-grounding rate by language</a:t>
             </a:r>
           </a:p>
         </c:rich>
@@ -11198,17 +11198,100 @@
           </a:p>
         </p:txBody>
       </p:sp>
+      <p:sp>
+        <p:nvSpPr>
+          <p:cNvPr id="5" name="Rounded Rectangle 4"/>
+          <p:cNvSpPr/>
+          <p:nvPr/>
+        </p:nvSpPr>
+        <p:spPr>
+          <a:xfrm>
+            <a:off x="640080" y="1463040"/>
+            <a:ext cx="10972800" cy="777240"/>
+          </a:xfrm>
+          <a:prstGeom prst="roundRect">
+            <a:avLst/>
+          </a:prstGeom>
+          <a:solidFill>
+            <a:srgbClr val="EAF6EE"/>
+          </a:solidFill>
+          <a:ln>
+            <a:noFill/>
+          </a:ln>
+          <a:effectLst/>
+        </p:spPr>
+        <p:style>
+          <a:lnRef idx="1">
+            <a:schemeClr val="accent1"/>
+          </a:lnRef>
+          <a:fillRef idx="3">
+            <a:schemeClr val="accent1"/>
+          </a:fillRef>
+          <a:effectRef idx="2">
+            <a:schemeClr val="accent1"/>
+          </a:effectRef>
+          <a:fontRef idx="minor">
+            <a:schemeClr val="lt1"/>
+          </a:fontRef>
+        </p:style>
+        <p:txBody>
+          <a:bodyPr rtlCol="0" anchor="ctr"/>
+          <a:lstStyle/>
+          <a:p>
+            <a:pPr algn="ctr"/>
+          </a:p>
+        </p:txBody>
+      </p:sp>
+      <p:sp>
+        <p:nvSpPr>
+          <p:cNvPr id="6" name="TextBox 5"/>
+          <p:cNvSpPr txBox="1"/>
+          <p:nvPr/>
+        </p:nvSpPr>
+        <p:spPr>
+          <a:xfrm>
+            <a:off x="868680" y="1517904"/>
+            <a:ext cx="10607040" cy="640080"/>
+          </a:xfrm>
+          <a:prstGeom prst="rect">
+            <a:avLst/>
+          </a:prstGeom>
+          <a:noFill/>
+        </p:spPr>
+        <p:txBody>
+          <a:bodyPr wrap="square" anchor="ctr">
+            <a:spAutoFit/>
+          </a:bodyPr>
+          <a:lstStyle/>
+          <a:p>
+            <a:pPr algn="l">
+              <a:spcAft>
+                <a:spcPts val="600"/>
+              </a:spcAft>
+            </a:pPr>
+            <a:r>
+              <a:rPr sz="1500" b="1" i="0">
+                <a:solidFill>
+                  <a:srgbClr val="1E8E3E"/>
+                </a:solidFill>
+                <a:latin typeface="Calibri"/>
+              </a:rPr>
+              <a:t>✓  100% of questions answered in EVERY language tested — 0% non-response. No student is ever left without an answer.</a:t>
+            </a:r>
+          </a:p>
+        </p:txBody>
+      </p:sp>
       <p:graphicFrame>
         <p:nvGraphicFramePr>
-          <p:cNvPr id="5" name="Chart 4"/>
+          <p:cNvPr id="7" name="Chart 6"/>
           <p:cNvGraphicFramePr>
             <a:graphicFrameLocks noGrp="1"/>
           </p:cNvGraphicFramePr>
           <p:nvPr/>
         </p:nvGraphicFramePr>
         <p:xfrm>
-          <a:off x="548640" y="1645920"/>
-          <a:ext cx="6035040" cy="4297680"/>
+          <a:off x="548640" y="2423160"/>
+          <a:ext cx="6035040" cy="3566160"/>
         </p:xfrm>
         <a:graphic>
           <a:graphicData uri="http://schemas.openxmlformats.org/drawingml/2006/chart">
@@ -11218,14 +11301,14 @@
       </p:graphicFrame>
       <p:sp>
         <p:nvSpPr>
-          <p:cNvPr id="6" name="TextBox 5"/>
+          <p:cNvPr id="8" name="TextBox 7"/>
           <p:cNvSpPr txBox="1"/>
           <p:nvPr/>
         </p:nvSpPr>
         <p:spPr>
           <a:xfrm>
-            <a:off x="6766560" y="1737360"/>
-            <a:ext cx="4937760" cy="3108960"/>
+            <a:off x="6766560" y="2468880"/>
+            <a:ext cx="4937760" cy="2194560"/>
           </a:xfrm>
           <a:prstGeom prst="rect">
             <a:avLst/>
@@ -11244,13 +11327,13 @@
               </a:spcAft>
             </a:pPr>
             <a:r>
-              <a:rPr sz="1400" b="0" i="0">
+              <a:rPr sz="1300" b="0" i="0">
                 <a:solidFill>
                   <a:srgbClr val="1E1E28"/>
                 </a:solidFill>
                 <a:latin typeface="Calibri"/>
               </a:rPr>
-              <a:t>•  Same question, varied language → English 100% vs Thai 50% grounding = measured bias</a:t>
+              <a:t>•  Same question, varied language: a measured bias (English 100% vs Thai 50% grounding)</a:t>
             </a:r>
           </a:p>
           <a:p>
@@ -11260,7 +11343,7 @@
               </a:spcAft>
             </a:pPr>
             <a:r>
-              <a:rPr sz="1400" b="0" i="0">
+              <a:rPr sz="1300" b="0" i="0">
                 <a:solidFill>
                   <a:srgbClr val="1E1E28"/>
                 </a:solidFill>
@@ -11276,33 +11359,33 @@
               </a:spcAft>
             </a:pPr>
             <a:r>
-              <a:rPr sz="1400" b="0" i="0">
+              <a:rPr sz="1300" b="0" i="0">
                 <a:solidFill>
                   <a:srgbClr val="1E1E28"/>
                 </a:solidFill>
                 <a:latin typeface="Calibri"/>
               </a:rPr>
-              <a:t>•  Fix: cross-lingual retrieval → Thai/Viet 62%, Iban fully closed; 0% non-response</a:t>
-            </a:r>
-          </a:p>
-        </p:txBody>
-      </p:sp>
-      <p:sp>
-        <p:nvSpPr>
-          <p:cNvPr id="7" name="Rounded Rectangle 6"/>
+              <a:t>•  Fix: cross-lingual retrieval → Thai/Viet 62%, Iban fully closed</a:t>
+            </a:r>
+          </a:p>
+        </p:txBody>
+      </p:sp>
+      <p:sp>
+        <p:nvSpPr>
+          <p:cNvPr id="9" name="Rounded Rectangle 8"/>
           <p:cNvSpPr/>
           <p:nvPr/>
         </p:nvSpPr>
         <p:spPr>
           <a:xfrm>
-            <a:off x="6766560" y="4937760"/>
-            <a:ext cx="4937760" cy="1005840"/>
+            <a:off x="6766560" y="4572000"/>
+            <a:ext cx="4937760" cy="1371600"/>
           </a:xfrm>
           <a:prstGeom prst="roundRect">
             <a:avLst/>
           </a:prstGeom>
           <a:solidFill>
-            <a:srgbClr val="EAF6EE"/>
+            <a:srgbClr val="F1EEFC"/>
           </a:solidFill>
           <a:ln>
             <a:noFill/>
@@ -11335,7 +11418,7 @@
             <a:r>
               <a:rPr sz="1300" b="1" i="0">
                 <a:solidFill>
-                  <a:srgbClr val="1E8E3E"/>
+                  <a:srgbClr val="5B3FE0"/>
                 </a:solidFill>
                 <a:latin typeface="Calibri"/>
               </a:rPr>
@@ -11355,7 +11438,7 @@
                 </a:solidFill>
                 <a:latin typeface="Calibri"/>
               </a:rPr>
-              <a:t>RBAC + per-teacher audit · encryption (LUKS + USB) · parental consent · retention &amp; erasure</a:t>
+              <a:t>RBAC + per-teacher audit log · encryption (LUKS + encrypted USB) · parental consent record · retention purge &amp; right-to-erasure</a:t>
             </a:r>
           </a:p>
         </p:txBody>
